--- a/problemas/5_Materials_Uriel/presentacion_materiales_uriel.pptx
+++ b/problemas/5_Materials_Uriel/presentacion_materiales_uriel.pptx
@@ -509,18 +509,7 @@
           <a:lstStyle/>
           <a:p>
             <a:r>
-              <a:t>GUION DE ORADOR (DIAPOSITIVA 1):</a:t>
-            </a:r>
-          </a:p>
-          <a:p>
-            <a:r>
-              <a:t>Buenos días tribunal y compañeros. Soy Uriel, y en esta parte de nuestra presentación voy a presentar la clasificación no supervisada de materiales eléctricos mediante el algoritmo DBSCAN.</a:t>
-            </a:r>
-          </a:p>
-          <a:p/>
-          <a:p>
-            <a:r>
-              <a:t>El objetivo central de este trabajo es demostrar cómo un algoritmo de aprendizaje no supervisado basado en densidad espacial es capaz de redescubrir, sin ninguna etiqueta previa y partiendo únicamente de propiedades macroscópicas medibles en laboratorio, las tres grandes familias termodinámicas y cuánticas de la materia: metales conductores, semiconductores tecnológicos y aislantes dieléctricos.</a:t>
+              <a:t>Buenos días tribunal y compañeros. Soy Uriel y presento la clasificación no supervisada de materiales eléctricos con DBSCAN.</a:t>
             </a:r>
           </a:p>
         </p:txBody>
@@ -590,23 +579,27 @@
           <a:lstStyle/>
           <a:p>
             <a:r>
-              <a:t>GUION DE ORADOR (DIAPOSITIVA 2):</a:t>
-            </a:r>
-          </a:p>
-          <a:p>
-            <a:r>
-              <a:t>Para abordar este problema, debemos plantearnos qué magnitudes macroscópicas definen a un material.</a:t>
-            </a:r>
-          </a:p>
-          <a:p>
-            <a:r>
-              <a:t>En estado sólido, la resistividad presenta un comportamiento extraordinario: abarca más de 30 órdenes de magnitud. Si utilizáramos una escala lineal, el cobre, el silicio y el agua quedarían todos aplastados contra el cero, y solo el teflón se distinguiría. Por ello, la primera variable fundamental es el logaritmo en base 10 de la resistividad a 300 Kelvin.</a:t>
-            </a:r>
-          </a:p>
-          <a:p/>
-          <a:p>
-            <a:r>
-              <a:t>Sin embargo, la resistividad sola no basta: un semiconductor dopado puede tener una resistividad parecida a una aleación metálica sucia. Aquí entra nuestra segunda variable: el coeficiente de temperatura alfa, que nos dice cómo cambia la resistividad al variar la temperatura. Juntas, estas dos variables forman un espacio bidimensional completísimo donde emerge la física cuántica.</a:t>
+              <a:t>GUION SLIDE 2:</a:t>
+            </a:r>
+          </a:p>
+          <a:p>
+            <a:r>
+              <a:t>Definimos el problema físico: las propiedades de transporte revelan directamente la estructura de bandas.</a:t>
+            </a:r>
+          </a:p>
+          <a:p>
+            <a:r>
+              <a:t>- Metales: bandas solapadas, electrones libres, alfa positivo por choques con fonones.</a:t>
+            </a:r>
+          </a:p>
+          <a:p>
+            <a:r>
+              <a:t>- Semiconductores: bandgap moderado (~1 eV), alfa fuertemente negativo por activación térmica según Boltzmann.</a:t>
+            </a:r>
+          </a:p>
+          <a:p>
+            <a:r>
+              <a:t>- Aislantes: bandgap colosal (&gt; 5 eV), sin portadores libres a 300 K, alfa nulo y resistividad extrema.</a:t>
             </a:r>
           </a:p>
         </p:txBody>
@@ -676,27 +669,17 @@
           <a:lstStyle/>
           <a:p>
             <a:r>
-              <a:t>GUION DE ORADOR (DIAPOSITIVA 3):</a:t>
-            </a:r>
-          </a:p>
-          <a:p>
-            <a:r>
-              <a:t>En esta diapositiva vemos la justificación física de por qué estos materiales forman islas separadas.</a:t>
-            </a:r>
-          </a:p>
-          <a:p>
-            <a:r>
-              <a:t>1. En los metales, no hay gap de energía; los electrones son libres. Al calentar, los átomos vibran más y entorpecen a los electrones mediante fonones. Por eso, alfa es SIEMPRE positivo.</a:t>
-            </a:r>
-          </a:p>
-          <a:p>
-            <a:r>
-              <a:t>2. En los semiconductores, ocurre exactamente lo opuesto: hay un bandgap moderado. Al calentar, la energía térmica excita electrones a través del gap exponencialmente según la estadística de Boltzmann. Hay tantos portadores nuevos que la resistividad CAE drásticamente. Por eso su alfa es fuertemente NEGATIVO.</a:t>
-            </a:r>
-          </a:p>
-          <a:p>
-            <a:r>
-              <a:t>3. En los aislantes, el gap es tan inmenso (mayor a 5 o 9 electronvoltios) que a temperatura ambiente no hay portadores libres. Su alfa es prácticamente cero y su resistividad se dispara más allá de 10 a la 11 ohmios metro.</a:t>
+              <a:t>GUION SLIDE 3:</a:t>
+            </a:r>
+          </a:p>
+          <a:p>
+            <a:r>
+              <a:t>Disponemos de 57 materiales reales en el dataset.</a:t>
+            </a:r>
+          </a:p>
+          <a:p>
+            <a:r>
+              <a:t>Como se aprecia en el gráfico comparativo: en escala lineal, el 99% de los materiales se aplasta en el cero. El logaritmo de resistividad es imprescindible para desplegar el espacio, y combinado con alfa crea un plano perfecto para el clustering.</a:t>
             </a:r>
           </a:p>
         </p:txBody>
@@ -766,23 +749,17 @@
           <a:lstStyle/>
           <a:p>
             <a:r>
-              <a:t>GUION DE ORADOR (DIAPOSITIVA 4):</a:t>
-            </a:r>
-          </a:p>
-          <a:p>
-            <a:r>
-              <a:t>Una pregunta obligada del tribunal es: ¿por qué no usar simplemente K-Means?</a:t>
-            </a:r>
-          </a:p>
-          <a:p>
-            <a:r>
-              <a:t>La respuesta radica en la propia naturaleza de los datos físicos: K-Means asume implícitamente que los clusters tienen forma esférica y similar varianza o densidad. Pero en física de materiales esto no ocurre: los metales tienen resistividades idénticas en una ventana estrechísima, mientras que los aislantes se extienden a lo largo de 12 órdenes de magnitud.</a:t>
-            </a:r>
-          </a:p>
-          <a:p/>
-          <a:p>
-            <a:r>
-              <a:t>K-Means fracasaría aquí intentando igualar los tamaños de los grupos. DBSCAN, por contra, se basa exclusivamente en conectividad local por densidad (Core Points, Border Points y Noise). Si hay una región densa, DBSCAN la sigue y la agrupa; si hay un punto aislado, lo marca como ruido (-1) sin contaminar los grupos genuinos.</a:t>
+              <a:t>GUION SLIDE 4:</a:t>
+            </a:r>
+          </a:p>
+          <a:p>
+            <a:r>
+              <a:t>Pregunta clave: ¿por qué DBSCAN y no K-Means?</a:t>
+            </a:r>
+          </a:p>
+          <a:p>
+            <a:r>
+              <a:t>En el gráfico de la derecha se ve claro: K-Means impone fronteras esféricas forzadas. Al tener metales ultra concentrados y aislantes dispersos, K-Means falla. DBSCAN sigue los caminos de densidad natural y aísla puntos atípicos como ruido.</a:t>
             </a:r>
           </a:p>
         </p:txBody>
@@ -852,23 +829,27 @@
           <a:lstStyle/>
           <a:p>
             <a:r>
-              <a:t>GUION DE ORADOR (DIAPOSITIVA 5):</a:t>
-            </a:r>
-          </a:p>
-          <a:p>
-            <a:r>
-              <a:t>En cuanto a la metodología, hay dos aspectos críticos que la rúbrica evalúa con rigor:</a:t>
-            </a:r>
-          </a:p>
-          <a:p>
-            <a:r>
-              <a:t>Primero: el escalado. La distancia euclídea de DBSCAN suma los cuadrados de las diferencias. Si no escalamos, una variación en el logaritmo de resistividad es de 31 unidades, mientras que alfa varía solo en 0.08 unidades. La resistividad se comería a alfa. Por eso hemos programado manualmente con NumPy la estandarización Z-score: restando la media de cada variable y dividiendo entre su desviación típica.</a:t>
-            </a:r>
-          </a:p>
-          <a:p/>
-          <a:p>
-            <a:r>
-              <a:t>Segundo: los parámetros. min_samples se fija en 3 siguiendo la heurística de que debe ser al menos la dimensión espacial más uno (2 + 1). Y para el radio épsilon, fijamos 0.65 tras analizar el codo de distancias de los vecinos más próximos, asegurando la máxima silueta sin unir grupos distintos.</a:t>
+              <a:t>GUION SLIDE 5:</a:t>
+            </a:r>
+          </a:p>
+          <a:p>
+            <a:r>
+              <a:t>En metodología: solo las fórmulas esenciales.</a:t>
+            </a:r>
+          </a:p>
+          <a:p>
+            <a:r>
+              <a:t>1. Escalado Z-Score manual con NumPy para igualar varianzas.</a:t>
+            </a:r>
+          </a:p>
+          <a:p>
+            <a:r>
+              <a:t>2. Criterio de núcleo de DBSCAN: puntos con al menos min_samples vecinos en radio épsilon.</a:t>
+            </a:r>
+          </a:p>
+          <a:p>
+            <a:r>
+              <a:t>3. Hiperparámetros fijados rigurosamente: min_samples=3 (dimensión + 1) y épsilon=0.65 obtenido por el codo k-NN.</a:t>
             </a:r>
           </a:p>
         </p:txBody>
@@ -938,37 +919,32 @@
           <a:lstStyle/>
           <a:p>
             <a:r>
-              <a:t>GUION DE ORADOR (DIAPOSITIVA 6):</a:t>
-            </a:r>
-          </a:p>
-          <a:p>
-            <a:r>
-              <a:t>Aquí pueden observar en pantalla el resultado directo de ejecutar DBSCAN sobre los 57 materiales reales.</a:t>
-            </a:r>
-          </a:p>
-          <a:p>
-            <a:r>
-              <a:t>Fíjense en la elegancia de la separación:</a:t>
-            </a:r>
-          </a:p>
-          <a:p>
-            <a:r>
-              <a:t>- En color ámbar a la izquierda, tenemos el Cluster 0 con todos los conductores metálicos: plata, cobre, oro, aluminio... Todos con logaritmo de resistividad en torno a -8 y un alfa positivo bien visible por encima de cero.</a:t>
-            </a:r>
-          </a:p>
-          <a:p>
-            <a:r>
-              <a:t>- En color azul a la derecha, el Cluster 1 agrupa los aislantes: cuarzo, teflón, vidrio... Están muy separados en el eje horizontal y centrados en torno a alfa igual a cero.</a:t>
-            </a:r>
-          </a:p>
-          <a:p>
-            <a:r>
-              <a:t>- Y en color verde esmeralda abajo al centro, el Cluster 2 agrupa los semiconductores clave: silicio, germanio, arseniuro de galio... Están aislados de los metales precisamente porque su alfa cae en la zona negativa, por debajo de la línea discontinua de alfa = 0.</a:t>
-            </a:r>
-          </a:p>
-          <a:p>
-            <a:r>
-              <a:t>DBSCAN ha descubierto estas tres clases sin que nadie le dijera qué era cada material.</a:t>
+              <a:t>GUION SLIDE 6:</a:t>
+            </a:r>
+          </a:p>
+          <a:p>
+            <a:r>
+              <a:t>Este es el resultado gráfico final en pantalla grande:</a:t>
+            </a:r>
+          </a:p>
+          <a:p>
+            <a:r>
+              <a:t>- Cluster 0 (ámbar): Metales conductores (Cu, Ag, Au, Al) concentrados arriba a la izquierda con alfa &gt; 0.</a:t>
+            </a:r>
+          </a:p>
+          <a:p>
+            <a:r>
+              <a:t>- Cluster 1 (azul): Aislantes dieléctricos (Vidrio, Cuarzo, Teflón) a la derecha con alfa centrado en cero.</a:t>
+            </a:r>
+          </a:p>
+          <a:p>
+            <a:r>
+              <a:t>- Cluster 2 (verde): Semiconductores (Silicio, Germanio, GaAs) abajo, claramente separados por alfa fuertemente negativo.</a:t>
+            </a:r>
+          </a:p>
+          <a:p>
+            <a:r>
+              <a:t>La línea horizontal de alfa = 0 marca la división física fundamental entre choques de fonones y generación térmica de portadores.</a:t>
             </a:r>
           </a:p>
         </p:txBody>
@@ -1038,38 +1014,32 @@
           <a:lstStyle/>
           <a:p>
             <a:r>
-              <a:t>GUION DE ORADOR (DIAPOSITIVA 7):</a:t>
-            </a:r>
-          </a:p>
-          <a:p>
-            <a:r>
-              <a:t>Pasemos ahora a la validación cuantitativa y rigurosa de los resultados.</a:t>
-            </a:r>
-          </a:p>
-          <a:p>
-            <a:r>
-              <a:t>En la matriz de contingencia cruzamos la etiqueta física real con el cluster descubierto por DBSCAN:</a:t>
-            </a:r>
-          </a:p>
-          <a:p>
-            <a:r>
-              <a:t>- Los 10 aislantes fueron identificados con un 100% de pureza en el Cluster 1.</a:t>
-            </a:r>
-          </a:p>
-          <a:p>
-            <a:r>
-              <a:t>- Los 35 conductores fueron clasificados con un 100% de pureza en el Cluster 0.</a:t>
-            </a:r>
-          </a:p>
-          <a:p>
-            <a:r>
-              <a:t>- En los semiconductores, 10 de 12 se agruparon limpiamente en el Cluster 2. Los dos restantes corresponden a semimetales con estructura anisótropa como el grafito, cuya resistividad a temperatura ambiente es prácticamente metálica.</a:t>
-            </a:r>
-          </a:p>
-          <a:p/>
-          <a:p>
-            <a:r>
-              <a:t>Además, evaluamos el Silhouette Score de forma no supervisada con scikit-learn, obteniendo una puntuación de 0.7858. En Machine Learning, una silueta superior a 0.71 se clasifica como una estructura excelente y contundente, lo que demuestra el éxito del clustering.</a:t>
+              <a:t>GUION SLIDE 7:</a:t>
+            </a:r>
+          </a:p>
+          <a:p>
+            <a:r>
+              <a:t>En cuanto a validación, la prueba reina es la Matriz de Contingencia Física:</a:t>
+            </a:r>
+          </a:p>
+          <a:p>
+            <a:r>
+              <a:t>- 100% de pureza en conductores (35 de 35 metales en cluster 0).</a:t>
+            </a:r>
+          </a:p>
+          <a:p>
+            <a:r>
+              <a:t>- 100% de pureza en aislantes (10 de 10 dieléctricos en cluster 1).</a:t>
+            </a:r>
+          </a:p>
+          <a:p>
+            <a:r>
+              <a:t>- En semiconductores, los 10 materiales tecnológicos puros (silicio, germanio, arseniuro de galio) forman el cluster 2. Los dos restantes son semimetales cuyo transporte a 300 K es prácticamente metálico.</a:t>
+            </a:r>
+          </a:p>
+          <a:p>
+            <a:r>
+              <a:t>Y como métrica matemática no supervisada, el Silhouette Score arroja 0.7858, confirmando la solidez del agrupamiento.</a:t>
             </a:r>
           </a:p>
         </p:txBody>
@@ -1139,39 +1109,32 @@
           <a:lstStyle/>
           <a:p>
             <a:r>
-              <a:t>GUION DE ORADOR (DIAPOSITIVA 8):</a:t>
-            </a:r>
-          </a:p>
-          <a:p>
-            <a:r>
-              <a:t>Para concluir mi exposición:</a:t>
-            </a:r>
-          </a:p>
-          <a:p>
-            <a:r>
-              <a:t>Hemos demostrado con éxito que un algoritmo no supervisado basado en densidad como DBSCAN, alimentado con medidas de laboratorio en el espacio (log10(rho), alfa) y con una estandarización Z-score rigurosa, es capaz de redescubrir las tres fases cuánticas de la materia con una silueta de 0.7858 y un 100% de pureza en conductores y aislantes.</a:t>
-            </a:r>
-          </a:p>
-          <a:p/>
-          <a:p>
-            <a:r>
-              <a:t>Respecto a posibles preguntas que puedan surgir:</a:t>
-            </a:r>
-          </a:p>
-          <a:p>
-            <a:r>
-              <a:t>Si nos preguntan por la sensibilidad a épsilon, sabemos que 0.65 es la ventana óptima: por debajo de 0.4 los aislantes se rompen en ruido, y por encima de 1.0 los semiconductores se funden con los conductores.</a:t>
-            </a:r>
-          </a:p>
-          <a:p>
-            <a:r>
-              <a:t>Y si nos preguntan por qué el logaritmo, es fundamental para permitir que magnitudes separadas por 30 órdenes de magnitud puedan coexistir en una misma métrica euclídea.</a:t>
-            </a:r>
-          </a:p>
-          <a:p/>
-          <a:p>
-            <a:r>
-              <a:t>Muchas gracias por su atención, quedo a su disposición para cualquier pregunta.</a:t>
+              <a:t>GUION SLIDE 8:</a:t>
+            </a:r>
+          </a:p>
+          <a:p>
+            <a:r>
+              <a:t>Para concluir:</a:t>
+            </a:r>
+          </a:p>
+          <a:p>
+            <a:r>
+              <a:t>1. DBSCAN demuestra que la densidad espacial macroscópica refleja con total fidelidad la física cuántica de bandas.</a:t>
+            </a:r>
+          </a:p>
+          <a:p>
+            <a:r>
+              <a:t>2. Ha demostrado ser la herramienta correcta frente a K-Means al tolerar densidades desiguales.</a:t>
+            </a:r>
+          </a:p>
+          <a:p>
+            <a:r>
+              <a:t>3. Con solo dos variables físicas y una estandarización rigurosa, se obtiene una pureza del 100% en conductores y aislantes.</a:t>
+            </a:r>
+          </a:p>
+          <a:p>
+            <a:r>
+              <a:t>Muchas gracias.</a:t>
             </a:r>
           </a:p>
         </p:txBody>
@@ -4194,7 +4157,7 @@
           <a:solidFill>
             <a:srgbClr val="F8FAFC"/>
           </a:solidFill>
-          <a:ln w="15240">
+          <a:ln w="13970">
             <a:solidFill>
               <a:srgbClr val="059669"/>
             </a:solidFill>
@@ -4252,7 +4215,7 @@
               </a:defRPr>
             </a:pPr>
             <a:r>
-              <a:t>PROYECTO CPIA · CLUSTERING EN FÍSICA DEL ESTADO SÓLIDO</a:t>
+              <a:t>CPIA · APRENDIZAJE NO SUPERVISADO</a:t>
             </a:r>
           </a:p>
         </p:txBody>
@@ -4309,13 +4272,13 @@
           <a:noFill/>
         </p:spPr>
         <p:txBody>
-          <a:bodyPr wrap="square">
+          <a:bodyPr wrap="none">
             <a:spAutoFit/>
           </a:bodyPr>
           <a:lstStyle/>
           <a:p>
             <a:pPr>
-              <a:defRPr sz="1800">
+              <a:defRPr sz="1700">
                 <a:solidFill>
                   <a:srgbClr val="334155"/>
                 </a:solidFill>
@@ -4357,7 +4320,7 @@
               </a:defRPr>
             </a:pPr>
             <a:r>
-              <a:t>Autor: Uriel</a:t>
+              <a:t>Uriel · Grado en Ingeniería Física (UPC)</a:t>
             </a:r>
           </a:p>
           <a:p>
@@ -4370,18 +4333,6 @@
             </a:pPr>
             <a:r>
               <a:t>Equipo: Matías · Martí · Uriel · Arnau Montull</a:t>
-            </a:r>
-          </a:p>
-          <a:p>
-            <a:pPr>
-              <a:defRPr sz="1300">
-                <a:solidFill>
-                  <a:srgbClr val="64748B"/>
-                </a:solidFill>
-              </a:defRPr>
-            </a:pPr>
-            <a:r>
-              <a:t>Grado en Ingeniería Física · Universitat Politècnica de Catalunya (UPC)</a:t>
             </a:r>
           </a:p>
         </p:txBody>
@@ -4412,8 +4363,8 @@
         </p:nvSpPr>
         <p:spPr>
           <a:xfrm>
-            <a:off x="731520" y="365760"/>
-            <a:ext cx="10698480" cy="365760"/>
+            <a:off x="731520" y="320040"/>
+            <a:ext cx="10698480" cy="320040"/>
           </a:xfrm>
           <a:prstGeom prst="rect">
             <a:avLst/>
@@ -4421,20 +4372,20 @@
           <a:noFill/>
         </p:spPr>
         <p:txBody>
-          <a:bodyPr wrap="square">
+          <a:bodyPr wrap="none">
             <a:spAutoFit/>
           </a:bodyPr>
           <a:lstStyle/>
           <a:p>
             <a:pPr>
-              <a:defRPr sz="1100" b="1">
+              <a:defRPr sz="1050" b="1">
                 <a:solidFill>
                   <a:srgbClr val="059669"/>
                 </a:solidFill>
               </a:defRPr>
             </a:pPr>
             <a:r>
-              <a:t>CPIA · APRENDIZAJE NO SUPERVISADO</a:t>
+              <a:t>CPIA · CLUSTERING EN FÍSICA</a:t>
             </a:r>
           </a:p>
         </p:txBody>
@@ -4447,8 +4398,8 @@
         </p:nvSpPr>
         <p:spPr>
           <a:xfrm>
-            <a:off x="731520" y="685800"/>
-            <a:ext cx="10698480" cy="731520"/>
+            <a:off x="731520" y="621792"/>
+            <a:ext cx="10698480" cy="640080"/>
           </a:xfrm>
           <a:prstGeom prst="rect">
             <a:avLst/>
@@ -4456,20 +4407,20 @@
           <a:noFill/>
         </p:spPr>
         <p:txBody>
-          <a:bodyPr wrap="square">
+          <a:bodyPr wrap="none">
             <a:spAutoFit/>
           </a:bodyPr>
           <a:lstStyle/>
           <a:p>
             <a:pPr>
-              <a:defRPr sz="2400" b="1">
+              <a:defRPr sz="2200" b="1">
                 <a:solidFill>
                   <a:srgbClr val="0F172A"/>
                 </a:solidFill>
               </a:defRPr>
             </a:pPr>
             <a:r>
-              <a:t>Contexto Físico y Espacio de Características</a:t>
+              <a:t>El Problema Físico: Estructura de Bandas y Firmas Térmicas</a:t>
             </a:r>
           </a:p>
         </p:txBody>
@@ -4482,8 +4433,8 @@
         </p:nvSpPr>
         <p:spPr>
           <a:xfrm>
-            <a:off x="731520" y="1417320"/>
-            <a:ext cx="10728655" cy="27432"/>
+            <a:off x="731520" y="1298448"/>
+            <a:ext cx="10728655" cy="18288"/>
           </a:xfrm>
           <a:prstGeom prst="rect">
             <a:avLst/>
@@ -4527,8 +4478,8 @@
         </p:nvSpPr>
         <p:spPr>
           <a:xfrm>
-            <a:off x="731520" y="1645920"/>
-            <a:ext cx="5120640" cy="4572000"/>
+            <a:off x="731520" y="1463040"/>
+            <a:ext cx="10728655" cy="1188720"/>
           </a:xfrm>
           <a:prstGeom prst="roundRect">
             <a:avLst/>
@@ -4536,9 +4487,9 @@
           <a:solidFill>
             <a:srgbClr val="F8FAFC"/>
           </a:solidFill>
-          <a:ln w="15240">
+          <a:ln w="13970">
             <a:solidFill>
-              <a:srgbClr val="CBD5E1"/>
+              <a:srgbClr val="2563EB"/>
             </a:solidFill>
           </a:ln>
         </p:spPr>
@@ -4572,8 +4523,8 @@
         </p:nvSpPr>
         <p:spPr>
           <a:xfrm>
-            <a:off x="1005840" y="1828800"/>
-            <a:ext cx="4572000" cy="4206240"/>
+            <a:off x="914400" y="1508760"/>
+            <a:ext cx="10332720" cy="1097280"/>
           </a:xfrm>
           <a:prstGeom prst="rect">
             <a:avLst/>
@@ -4587,218 +4538,57 @@
           <a:lstStyle/>
           <a:p>
             <a:pPr>
-              <a:defRPr sz="1800" b="1">
+              <a:defRPr sz="1200" b="1">
                 <a:solidFill>
                   <a:srgbClr val="2563EB"/>
                 </a:solidFill>
               </a:defRPr>
             </a:pPr>
             <a:r>
-              <a:t>¿Cómo clasificar materiales sin etiquetas?</a:t>
+              <a:t>Ecuaciones Macroscópicas de Transporte Eléctrico:</a:t>
             </a:r>
           </a:p>
           <a:p>
             <a:pPr>
-              <a:spcAft>
-                <a:spcPts val="800"/>
-              </a:spcAft>
-              <a:defRPr sz="1350">
-                <a:solidFill>
-                  <a:srgbClr val="1E293B"/>
-                </a:solidFill>
-              </a:defRPr>
-            </a:pPr>
-            <a:r>
-              <a:t>• 30 órdenes de magnitud: La resistividad eléctrica a 300 K abarca desde la plata (1.6·10⁻⁸ Ω·m) hasta el teflón (&gt; 10²² Ω·m).</a:t>
-            </a:r>
-          </a:p>
-          <a:p>
-            <a:pPr>
-              <a:spcAft>
-                <a:spcPts val="800"/>
-              </a:spcAft>
-              <a:defRPr sz="1350">
-                <a:solidFill>
-                  <a:srgbClr val="1E293B"/>
-                </a:solidFill>
-              </a:defRPr>
-            </a:pPr>
-            <a:r>
-              <a:t>• Compresión logarítmica obligatoria: Definimos x₁ = log₁₀(ρ₃₀₀K). Sin escala logarítmica, el 99% de los materiales colapsaría en el origen.</a:t>
-            </a:r>
-          </a:p>
-          <a:p>
-            <a:pPr>
-              <a:spcAft>
-                <a:spcPts val="800"/>
-              </a:spcAft>
-              <a:defRPr sz="1350">
-                <a:solidFill>
-                  <a:srgbClr val="1E293B"/>
-                </a:solidFill>
-              </a:defRPr>
-            </a:pPr>
-            <a:r>
-              <a:t>• Dataset oficial: 57 materiales reales recopilados con precisión experimental (metales puros, semiconductores clave y polímeros/cerámicas aislantes).</a:t>
-            </a:r>
-          </a:p>
-          <a:p>
-            <a:pPr>
-              <a:spcAft>
-                <a:spcPts val="800"/>
-              </a:spcAft>
-              <a:defRPr sz="1350">
-                <a:solidFill>
-                  <a:srgbClr val="1E293B"/>
-                </a:solidFill>
-              </a:defRPr>
-            </a:pPr>
-            <a:r>
-              <a:t>• Objetivo no supervisado: Comprobar si el agrupamiento por densidad recupera las fases físicas puras.</a:t>
-            </a:r>
-          </a:p>
-        </p:txBody>
-      </p:sp>
-      <p:sp>
-        <p:nvSpPr>
-          <p:cNvPr id="7" name="Rounded Rectangle 6"/>
-          <p:cNvSpPr/>
+              <a:spcBef>
+                <a:spcPts val="400"/>
+              </a:spcBef>
+              <a:defRPr sz="1500" b="1">
+                <a:solidFill>
+                  <a:srgbClr val="0F172A"/>
+                </a:solidFill>
+              </a:defRPr>
+            </a:pPr>
+            <a:r>
+              <a:t>1. Variación térmica:  ρ(T) = ρ₀ · [1 + α·(T - T₀)]       2. Coeficiente térmico:  α = (1 / ρ₀) · (dρ / dT)₃₀₀K</a:t>
+            </a:r>
+          </a:p>
+        </p:txBody>
+      </p:sp>
+      <p:pic>
+        <p:nvPicPr>
+          <p:cNvPr id="7" name="Picture 6" descr="esquema_bandas_materiales.png"/>
+          <p:cNvPicPr>
+            <a:picLocks noChangeAspect="1"/>
+          </p:cNvPicPr>
           <p:nvPr/>
-        </p:nvSpPr>
-        <p:spPr>
-          <a:xfrm>
-            <a:off x="6217920" y="1645920"/>
-            <a:ext cx="5212080" cy="4572000"/>
-          </a:xfrm>
-          <a:prstGeom prst="roundRect">
-            <a:avLst/>
-          </a:prstGeom>
-          <a:solidFill>
-            <a:srgbClr val="F8FAFC"/>
-          </a:solidFill>
-          <a:ln w="15240">
-            <a:solidFill>
-              <a:srgbClr val="CBD5E1"/>
-            </a:solidFill>
-          </a:ln>
-        </p:spPr>
-        <p:style>
-          <a:lnRef idx="1">
-            <a:schemeClr val="accent1"/>
-          </a:lnRef>
-          <a:fillRef idx="3">
-            <a:schemeClr val="accent1"/>
-          </a:fillRef>
-          <a:effectRef idx="2">
-            <a:schemeClr val="accent1"/>
-          </a:effectRef>
-          <a:fontRef idx="minor">
-            <a:schemeClr val="lt1"/>
-          </a:fontRef>
-        </p:style>
-        <p:txBody>
-          <a:bodyPr rtlCol="0" anchor="ctr"/>
-          <a:lstStyle/>
-          <a:p>
-            <a:pPr algn="ctr"/>
-          </a:p>
-        </p:txBody>
-      </p:sp>
-      <p:sp>
-        <p:nvSpPr>
-          <p:cNvPr id="8" name="TextBox 7"/>
-          <p:cNvSpPr txBox="1"/>
-          <p:nvPr/>
-        </p:nvSpPr>
-        <p:spPr>
-          <a:xfrm>
-            <a:off x="6492240" y="1828800"/>
-            <a:ext cx="4663440" cy="4206240"/>
+        </p:nvPicPr>
+        <p:blipFill>
+          <a:blip r:embed="rId2"/>
+          <a:stretch>
+            <a:fillRect/>
+          </a:stretch>
+        </p:blipFill>
+        <p:spPr>
+          <a:xfrm>
+            <a:off x="731520" y="2788920"/>
+            <a:ext cx="10728655" cy="4019800"/>
           </a:xfrm>
           <a:prstGeom prst="rect">
             <a:avLst/>
           </a:prstGeom>
-          <a:noFill/>
-        </p:spPr>
-        <p:txBody>
-          <a:bodyPr wrap="square">
-            <a:spAutoFit/>
-          </a:bodyPr>
-          <a:lstStyle/>
-          <a:p>
-            <a:pPr>
-              <a:defRPr sz="1800" b="1">
-                <a:solidFill>
-                  <a:srgbClr val="059669"/>
-                </a:solidFill>
-              </a:defRPr>
-            </a:pPr>
-            <a:r>
-              <a:t>Las Dos Firmas Cuánticas Macroscópicas</a:t>
-            </a:r>
-          </a:p>
-          <a:p>
-            <a:pPr>
-              <a:spcAft>
-                <a:spcPts val="800"/>
-              </a:spcAft>
-              <a:defRPr sz="1350">
-                <a:solidFill>
-                  <a:srgbClr val="1E293B"/>
-                </a:solidFill>
-              </a:defRPr>
-            </a:pPr>
-            <a:r>
-              <a:t>• Variable 1: log₁₀(ρ₃₀₀K) Magnitud de la resistencia al flujo de portadores a temperatura ambiente (300 K).</a:t>
-            </a:r>
-          </a:p>
-          <a:p>
-            <a:pPr>
-              <a:spcAft>
-                <a:spcPts val="800"/>
-              </a:spcAft>
-              <a:defRPr sz="1350">
-                <a:solidFill>
-                  <a:srgbClr val="1E293B"/>
-                </a:solidFill>
-              </a:defRPr>
-            </a:pPr>
-            <a:r>
-              <a:t>• Variable 2: Coeficiente térmico α Derivada de la resistividad frente a temperatura: α = (1/ρ₀) · (dρ/dT).</a:t>
-            </a:r>
-          </a:p>
-          <a:p>
-            <a:pPr>
-              <a:spcAft>
-                <a:spcPts val="800"/>
-              </a:spcAft>
-              <a:defRPr sz="1350">
-                <a:solidFill>
-                  <a:srgbClr val="1E293B"/>
-                </a:solidFill>
-              </a:defRPr>
-            </a:pPr>
-            <a:r>
-              <a:t>• Firma física de α: Es el parámetro cuántico decisivo: indica si la resistividad sube o baja cuando calentamos el material.</a:t>
-            </a:r>
-          </a:p>
-          <a:p>
-            <a:pPr>
-              <a:spcAft>
-                <a:spcPts val="800"/>
-              </a:spcAft>
-              <a:defRPr sz="1350">
-                <a:solidFill>
-                  <a:srgbClr val="1E293B"/>
-                </a:solidFill>
-              </a:defRPr>
-            </a:pPr>
-            <a:r>
-              <a:t>• Espacio bidimensional: Trabajamos en el plano (log₁₀ρ, α), donde cada material se proyecta como una coordenada única.</a:t>
-            </a:r>
-          </a:p>
-        </p:txBody>
-      </p:sp>
+        </p:spPr>
+      </p:pic>
     </p:spTree>
   </p:cSld>
   <p:clrMapOvr>
@@ -4825,8 +4615,8 @@
         </p:nvSpPr>
         <p:spPr>
           <a:xfrm>
-            <a:off x="731520" y="365760"/>
-            <a:ext cx="10698480" cy="365760"/>
+            <a:off x="731520" y="320040"/>
+            <a:ext cx="10698480" cy="320040"/>
           </a:xfrm>
           <a:prstGeom prst="rect">
             <a:avLst/>
@@ -4834,20 +4624,20 @@
           <a:noFill/>
         </p:spPr>
         <p:txBody>
-          <a:bodyPr wrap="square">
+          <a:bodyPr wrap="none">
             <a:spAutoFit/>
           </a:bodyPr>
           <a:lstStyle/>
           <a:p>
             <a:pPr>
-              <a:defRPr sz="1100" b="1">
+              <a:defRPr sz="1050" b="1">
                 <a:solidFill>
                   <a:srgbClr val="059669"/>
                 </a:solidFill>
               </a:defRPr>
             </a:pPr>
             <a:r>
-              <a:t>CPIA · APRENDIZAJE NO SUPERVISADO</a:t>
+              <a:t>CPIA · CLUSTERING EN FÍSICA</a:t>
             </a:r>
           </a:p>
         </p:txBody>
@@ -4860,8 +4650,8 @@
         </p:nvSpPr>
         <p:spPr>
           <a:xfrm>
-            <a:off x="731520" y="685800"/>
-            <a:ext cx="10698480" cy="731520"/>
+            <a:off x="731520" y="621792"/>
+            <a:ext cx="10698480" cy="640080"/>
           </a:xfrm>
           <a:prstGeom prst="rect">
             <a:avLst/>
@@ -4869,20 +4659,20 @@
           <a:noFill/>
         </p:spPr>
         <p:txBody>
-          <a:bodyPr wrap="square">
+          <a:bodyPr wrap="none">
             <a:spAutoFit/>
           </a:bodyPr>
           <a:lstStyle/>
           <a:p>
             <a:pPr>
-              <a:defRPr sz="2400" b="1">
+              <a:defRPr sz="2200" b="1">
                 <a:solidFill>
                   <a:srgbClr val="0F172A"/>
                 </a:solidFill>
               </a:defRPr>
             </a:pPr>
             <a:r>
-              <a:t>Fundamento Cuántico: ¿Por qué se agrupan en el plano?</a:t>
+              <a:t>Dataset Experimental y Espacio de Trabajo (log₁₀ρ, α)</a:t>
             </a:r>
           </a:p>
         </p:txBody>
@@ -4895,8 +4685,8 @@
         </p:nvSpPr>
         <p:spPr>
           <a:xfrm>
-            <a:off x="731520" y="1417320"/>
-            <a:ext cx="10728655" cy="27432"/>
+            <a:off x="731520" y="1298448"/>
+            <a:ext cx="10728655" cy="18288"/>
           </a:xfrm>
           <a:prstGeom prst="rect">
             <a:avLst/>
@@ -4940,8 +4730,8 @@
         </p:nvSpPr>
         <p:spPr>
           <a:xfrm>
-            <a:off x="731520" y="1645920"/>
-            <a:ext cx="3337560" cy="4572000"/>
+            <a:off x="731520" y="1508760"/>
+            <a:ext cx="4023360" cy="4754880"/>
           </a:xfrm>
           <a:prstGeom prst="roundRect">
             <a:avLst/>
@@ -4949,9 +4739,9 @@
           <a:solidFill>
             <a:srgbClr val="F8FAFC"/>
           </a:solidFill>
-          <a:ln w="15240">
+          <a:ln w="13970">
             <a:solidFill>
-              <a:srgbClr val="D97706"/>
+              <a:srgbClr val="CBD5E1"/>
             </a:solidFill>
           </a:ln>
         </p:spPr>
@@ -4985,8 +4775,8 @@
         </p:nvSpPr>
         <p:spPr>
           <a:xfrm>
-            <a:off x="914400" y="1828800"/>
-            <a:ext cx="2971800" cy="4206240"/>
+            <a:off x="914400" y="1645920"/>
+            <a:ext cx="3657600" cy="4389120"/>
           </a:xfrm>
           <a:prstGeom prst="rect">
             <a:avLst/>
@@ -5002,18 +4792,18 @@
             <a:pPr>
               <a:defRPr sz="1700" b="1">
                 <a:solidFill>
-                  <a:srgbClr val="D97706"/>
-                </a:solidFill>
-              </a:defRPr>
-            </a:pPr>
-            <a:r>
-              <a:t>1. Metales (Conductores)</a:t>
+                  <a:srgbClr val="0F172A"/>
+                </a:solidFill>
+              </a:defRPr>
+            </a:pPr>
+            <a:r>
+              <a:t>¿Cómo clasificar sin etiquetas?</a:t>
             </a:r>
           </a:p>
           <a:p>
             <a:pPr>
               <a:spcAft>
-                <a:spcPts val="600"/>
+                <a:spcPts val="800"/>
               </a:spcAft>
               <a:defRPr sz="1200">
                 <a:solidFill>
@@ -5022,13 +4812,13 @@
               </a:defRPr>
             </a:pPr>
             <a:r>
-              <a:t>• Estructura de bandas: Banda de conducción semillena, sin gap energético (Eg = 0).</a:t>
+              <a:t>• 57 Materiales reales: Metales puros, aleaciones, semiconductores y aislantes.</a:t>
             </a:r>
           </a:p>
           <a:p>
             <a:pPr>
               <a:spcAft>
-                <a:spcPts val="600"/>
+                <a:spcPts val="800"/>
               </a:spcAft>
               <a:defRPr sz="1200">
                 <a:solidFill>
@@ -5037,13 +4827,13 @@
               </a:defRPr>
             </a:pPr>
             <a:r>
-              <a:t>• Mecanismo: Electrones libres en el mar de Fermi.</a:t>
+              <a:t>• 30 órdenes de magnitud: De metales (~10⁻⁸ Ω·m) a teflón (&gt; 10²² Ω·m).</a:t>
             </a:r>
           </a:p>
           <a:p>
             <a:pPr>
               <a:spcAft>
-                <a:spcPts val="600"/>
+                <a:spcPts val="800"/>
               </a:spcAft>
               <a:defRPr sz="1200">
                 <a:solidFill>
@@ -5052,13 +4842,13 @@
               </a:defRPr>
             </a:pPr>
             <a:r>
-              <a:t>• Efecto de la temperatura: Al calentar, aumenta la vibración de la red (fonones). Mayor choque = mayor resistencia.</a:t>
+              <a:t>• Compresión logarítmica: x₁ = log₁₀(ρ₃₀₀K) evita el colapso numérico.</a:t>
             </a:r>
           </a:p>
           <a:p>
             <a:pPr>
               <a:spcAft>
-                <a:spcPts val="600"/>
+                <a:spcPts val="800"/>
               </a:spcAft>
               <a:defRPr sz="1200">
                 <a:solidFill>
@@ -5067,13 +4857,13 @@
               </a:defRPr>
             </a:pPr>
             <a:r>
-              <a:t>• Signo de α: α &gt; 0 (+0.003 a +0.006 K⁻¹).</a:t>
+              <a:t>• Firma cuántica: x₂ = α (diferencia el origen microscópico).</a:t>
             </a:r>
           </a:p>
           <a:p>
             <a:pPr>
               <a:spcAft>
-                <a:spcPts val="600"/>
+                <a:spcPts val="800"/>
               </a:spcAft>
               <a:defRPr sz="1200">
                 <a:solidFill>
@@ -5082,321 +4872,35 @@
               </a:defRPr>
             </a:pPr>
             <a:r>
-              <a:t>• Topología: Cúmulo ultra denso alrededor de log₁₀ρ ≈ -8.</a:t>
-            </a:r>
-          </a:p>
-        </p:txBody>
-      </p:sp>
-      <p:sp>
-        <p:nvSpPr>
-          <p:cNvPr id="7" name="Rounded Rectangle 6"/>
-          <p:cNvSpPr/>
+              <a:t>• Objetivo no supervisado: Identificar las fases de forma autónoma por densidad.</a:t>
+            </a:r>
+          </a:p>
+        </p:txBody>
+      </p:sp>
+      <p:pic>
+        <p:nvPicPr>
+          <p:cNvPr id="7" name="Picture 6" descr="distribucion_escala_rho.png"/>
+          <p:cNvPicPr>
+            <a:picLocks noChangeAspect="1"/>
+          </p:cNvPicPr>
           <p:nvPr/>
-        </p:nvSpPr>
-        <p:spPr>
-          <a:xfrm>
-            <a:off x="4416552" y="1645920"/>
-            <a:ext cx="3337560" cy="4572000"/>
-          </a:xfrm>
-          <a:prstGeom prst="roundRect">
-            <a:avLst/>
-          </a:prstGeom>
-          <a:solidFill>
-            <a:srgbClr val="F8FAFC"/>
-          </a:solidFill>
-          <a:ln w="15240">
-            <a:solidFill>
-              <a:srgbClr val="059669"/>
-            </a:solidFill>
-          </a:ln>
-        </p:spPr>
-        <p:style>
-          <a:lnRef idx="1">
-            <a:schemeClr val="accent1"/>
-          </a:lnRef>
-          <a:fillRef idx="3">
-            <a:schemeClr val="accent1"/>
-          </a:fillRef>
-          <a:effectRef idx="2">
-            <a:schemeClr val="accent1"/>
-          </a:effectRef>
-          <a:fontRef idx="minor">
-            <a:schemeClr val="lt1"/>
-          </a:fontRef>
-        </p:style>
-        <p:txBody>
-          <a:bodyPr rtlCol="0" anchor="ctr"/>
-          <a:lstStyle/>
-          <a:p>
-            <a:pPr algn="ctr"/>
-          </a:p>
-        </p:txBody>
-      </p:sp>
-      <p:sp>
-        <p:nvSpPr>
-          <p:cNvPr id="8" name="TextBox 7"/>
-          <p:cNvSpPr txBox="1"/>
-          <p:nvPr/>
-        </p:nvSpPr>
-        <p:spPr>
-          <a:xfrm>
-            <a:off x="4599432" y="1828800"/>
-            <a:ext cx="2971800" cy="4206240"/>
+        </p:nvPicPr>
+        <p:blipFill>
+          <a:blip r:embed="rId2"/>
+          <a:stretch>
+            <a:fillRect/>
+          </a:stretch>
+        </p:blipFill>
+        <p:spPr>
+          <a:xfrm>
+            <a:off x="4937760" y="1783080"/>
+            <a:ext cx="6492240" cy="2426393"/>
           </a:xfrm>
           <a:prstGeom prst="rect">
             <a:avLst/>
           </a:prstGeom>
-          <a:noFill/>
-        </p:spPr>
-        <p:txBody>
-          <a:bodyPr wrap="square">
-            <a:spAutoFit/>
-          </a:bodyPr>
-          <a:lstStyle/>
-          <a:p>
-            <a:pPr>
-              <a:defRPr sz="1700" b="1">
-                <a:solidFill>
-                  <a:srgbClr val="059669"/>
-                </a:solidFill>
-              </a:defRPr>
-            </a:pPr>
-            <a:r>
-              <a:t>2. Semiconductores</a:t>
-            </a:r>
-          </a:p>
-          <a:p>
-            <a:pPr>
-              <a:spcAft>
-                <a:spcPts val="600"/>
-              </a:spcAft>
-              <a:defRPr sz="1200">
-                <a:solidFill>
-                  <a:srgbClr val="1E293B"/>
-                </a:solidFill>
-              </a:defRPr>
-            </a:pPr>
-            <a:r>
-              <a:t>• Estructura de bandas: Gap moderado (Eg ≈ 0.2 a 2.0 eV: Si, Ge, GaAs).</a:t>
-            </a:r>
-          </a:p>
-          <a:p>
-            <a:pPr>
-              <a:spcAft>
-                <a:spcPts val="600"/>
-              </a:spcAft>
-              <a:defRPr sz="1200">
-                <a:solidFill>
-                  <a:srgbClr val="1E293B"/>
-                </a:solidFill>
-              </a:defRPr>
-            </a:pPr>
-            <a:r>
-              <a:t>• Mecanismo: Activación térmica según Boltzmann: n ∝ exp(-Eg / 2kBT).</a:t>
-            </a:r>
-          </a:p>
-          <a:p>
-            <a:pPr>
-              <a:spcAft>
-                <a:spcPts val="600"/>
-              </a:spcAft>
-              <a:defRPr sz="1200">
-                <a:solidFill>
-                  <a:srgbClr val="1E293B"/>
-                </a:solidFill>
-              </a:defRPr>
-            </a:pPr>
-            <a:r>
-              <a:t>• Efecto de la temperatura: El calor libera avalanchas de portadores libres. La resistencia se desploma.</a:t>
-            </a:r>
-          </a:p>
-          <a:p>
-            <a:pPr>
-              <a:spcAft>
-                <a:spcPts val="600"/>
-              </a:spcAft>
-              <a:defRPr sz="1200">
-                <a:solidFill>
-                  <a:srgbClr val="1E293B"/>
-                </a:solidFill>
-              </a:defRPr>
-            </a:pPr>
-            <a:r>
-              <a:t>• Signo de α: α &lt; 0 fuertemente negativo (-0.015 a -0.075 K⁻¹).</a:t>
-            </a:r>
-          </a:p>
-          <a:p>
-            <a:pPr>
-              <a:spcAft>
-                <a:spcPts val="600"/>
-              </a:spcAft>
-              <a:defRPr sz="1200">
-                <a:solidFill>
-                  <a:srgbClr val="1E293B"/>
-                </a:solidFill>
-              </a:defRPr>
-            </a:pPr>
-            <a:r>
-              <a:t>• Topología: Región intermedia claramente separada por α negativo.</a:t>
-            </a:r>
-          </a:p>
-        </p:txBody>
-      </p:sp>
-      <p:sp>
-        <p:nvSpPr>
-          <p:cNvPr id="9" name="Rounded Rectangle 8"/>
-          <p:cNvSpPr/>
-          <p:nvPr/>
-        </p:nvSpPr>
-        <p:spPr>
-          <a:xfrm>
-            <a:off x="8101584" y="1645920"/>
-            <a:ext cx="3337560" cy="4572000"/>
-          </a:xfrm>
-          <a:prstGeom prst="roundRect">
-            <a:avLst/>
-          </a:prstGeom>
-          <a:solidFill>
-            <a:srgbClr val="F8FAFC"/>
-          </a:solidFill>
-          <a:ln w="15240">
-            <a:solidFill>
-              <a:srgbClr val="2563EB"/>
-            </a:solidFill>
-          </a:ln>
-        </p:spPr>
-        <p:style>
-          <a:lnRef idx="1">
-            <a:schemeClr val="accent1"/>
-          </a:lnRef>
-          <a:fillRef idx="3">
-            <a:schemeClr val="accent1"/>
-          </a:fillRef>
-          <a:effectRef idx="2">
-            <a:schemeClr val="accent1"/>
-          </a:effectRef>
-          <a:fontRef idx="minor">
-            <a:schemeClr val="lt1"/>
-          </a:fontRef>
-        </p:style>
-        <p:txBody>
-          <a:bodyPr rtlCol="0" anchor="ctr"/>
-          <a:lstStyle/>
-          <a:p>
-            <a:pPr algn="ctr"/>
-          </a:p>
-        </p:txBody>
-      </p:sp>
-      <p:sp>
-        <p:nvSpPr>
-          <p:cNvPr id="10" name="TextBox 9"/>
-          <p:cNvSpPr txBox="1"/>
-          <p:nvPr/>
-        </p:nvSpPr>
-        <p:spPr>
-          <a:xfrm>
-            <a:off x="8284464" y="1828800"/>
-            <a:ext cx="2971800" cy="4206240"/>
-          </a:xfrm>
-          <a:prstGeom prst="rect">
-            <a:avLst/>
-          </a:prstGeom>
-          <a:noFill/>
-        </p:spPr>
-        <p:txBody>
-          <a:bodyPr wrap="square">
-            <a:spAutoFit/>
-          </a:bodyPr>
-          <a:lstStyle/>
-          <a:p>
-            <a:pPr>
-              <a:defRPr sz="1700" b="1">
-                <a:solidFill>
-                  <a:srgbClr val="2563EB"/>
-                </a:solidFill>
-              </a:defRPr>
-            </a:pPr>
-            <a:r>
-              <a:t>3. Aislantes (Dieléctricos)</a:t>
-            </a:r>
-          </a:p>
-          <a:p>
-            <a:pPr>
-              <a:spcAft>
-                <a:spcPts val="600"/>
-              </a:spcAft>
-              <a:defRPr sz="1200">
-                <a:solidFill>
-                  <a:srgbClr val="1E293B"/>
-                </a:solidFill>
-              </a:defRPr>
-            </a:pPr>
-            <a:r>
-              <a:t>• Estructura de bandas: Gap prohibido gigantesco (Eg &gt; 5 a 9 eV: Vidrio, Cuarzo, Teflón).</a:t>
-            </a:r>
-          </a:p>
-          <a:p>
-            <a:pPr>
-              <a:spcAft>
-                <a:spcPts val="600"/>
-              </a:spcAft>
-              <a:defRPr sz="1200">
-                <a:solidFill>
-                  <a:srgbClr val="1E293B"/>
-                </a:solidFill>
-              </a:defRPr>
-            </a:pPr>
-            <a:r>
-              <a:t>• Mecanismo: kBT a 300 K es ~0.026 eV; insuficiente para excitar electrones a la banda superior.</a:t>
-            </a:r>
-          </a:p>
-          <a:p>
-            <a:pPr>
-              <a:spcAft>
-                <a:spcPts val="600"/>
-              </a:spcAft>
-              <a:defRPr sz="1200">
-                <a:solidFill>
-                  <a:srgbClr val="1E293B"/>
-                </a:solidFill>
-              </a:defRPr>
-            </a:pPr>
-            <a:r>
-              <a:t>• Efecto de la temperatura: Prácticamente nulo a escala ordinaria.</a:t>
-            </a:r>
-          </a:p>
-          <a:p>
-            <a:pPr>
-              <a:spcAft>
-                <a:spcPts val="600"/>
-              </a:spcAft>
-              <a:defRPr sz="1200">
-                <a:solidFill>
-                  <a:srgbClr val="1E293B"/>
-                </a:solidFill>
-              </a:defRPr>
-            </a:pPr>
-            <a:r>
-              <a:t>• Signo de α: α ≈ 0 K⁻¹.</a:t>
-            </a:r>
-          </a:p>
-          <a:p>
-            <a:pPr>
-              <a:spcAft>
-                <a:spcPts val="600"/>
-              </a:spcAft>
-              <a:defRPr sz="1200">
-                <a:solidFill>
-                  <a:srgbClr val="1E293B"/>
-                </a:solidFill>
-              </a:defRPr>
-            </a:pPr>
-            <a:r>
-              <a:t>• Topología: Cúmulo ancho y disperso en resistividades altísimas (log₁₀ρ &gt; 11).</a:t>
-            </a:r>
-          </a:p>
-        </p:txBody>
-      </p:sp>
+        </p:spPr>
+      </p:pic>
     </p:spTree>
   </p:cSld>
   <p:clrMapOvr>
@@ -5423,8 +4927,8 @@
         </p:nvSpPr>
         <p:spPr>
           <a:xfrm>
-            <a:off x="731520" y="365760"/>
-            <a:ext cx="10698480" cy="365760"/>
+            <a:off x="731520" y="320040"/>
+            <a:ext cx="10698480" cy="320040"/>
           </a:xfrm>
           <a:prstGeom prst="rect">
             <a:avLst/>
@@ -5432,20 +4936,20 @@
           <a:noFill/>
         </p:spPr>
         <p:txBody>
-          <a:bodyPr wrap="square">
+          <a:bodyPr wrap="none">
             <a:spAutoFit/>
           </a:bodyPr>
           <a:lstStyle/>
           <a:p>
             <a:pPr>
-              <a:defRPr sz="1100" b="1">
+              <a:defRPr sz="1050" b="1">
                 <a:solidFill>
                   <a:srgbClr val="059669"/>
                 </a:solidFill>
               </a:defRPr>
             </a:pPr>
             <a:r>
-              <a:t>CPIA · APRENDIZAJE NO SUPERVISADO</a:t>
+              <a:t>CPIA · CLUSTERING EN FÍSICA</a:t>
             </a:r>
           </a:p>
         </p:txBody>
@@ -5458,8 +4962,8 @@
         </p:nvSpPr>
         <p:spPr>
           <a:xfrm>
-            <a:off x="731520" y="685800"/>
-            <a:ext cx="10698480" cy="731520"/>
+            <a:off x="731520" y="621792"/>
+            <a:ext cx="10698480" cy="640080"/>
           </a:xfrm>
           <a:prstGeom prst="rect">
             <a:avLst/>
@@ -5467,13 +4971,13 @@
           <a:noFill/>
         </p:spPr>
         <p:txBody>
-          <a:bodyPr wrap="square">
+          <a:bodyPr wrap="none">
             <a:spAutoFit/>
           </a:bodyPr>
           <a:lstStyle/>
           <a:p>
             <a:pPr>
-              <a:defRPr sz="2400" b="1">
+              <a:defRPr sz="2200" b="1">
                 <a:solidFill>
                   <a:srgbClr val="0F172A"/>
                 </a:solidFill>
@@ -5493,8 +4997,8 @@
         </p:nvSpPr>
         <p:spPr>
           <a:xfrm>
-            <a:off x="731520" y="1417320"/>
-            <a:ext cx="10728655" cy="27432"/>
+            <a:off x="731520" y="1298448"/>
+            <a:ext cx="10728655" cy="18288"/>
           </a:xfrm>
           <a:prstGeom prst="rect">
             <a:avLst/>
@@ -5538,8 +5042,8 @@
         </p:nvSpPr>
         <p:spPr>
           <a:xfrm>
-            <a:off x="731520" y="1645920"/>
-            <a:ext cx="5120640" cy="4572000"/>
+            <a:off x="731520" y="1508760"/>
+            <a:ext cx="4389120" cy="4754880"/>
           </a:xfrm>
           <a:prstGeom prst="roundRect">
             <a:avLst/>
@@ -5547,7 +5051,7 @@
           <a:solidFill>
             <a:srgbClr val="F8FAFC"/>
           </a:solidFill>
-          <a:ln w="15240">
+          <a:ln w="13970">
             <a:solidFill>
               <a:srgbClr val="CBD5E1"/>
             </a:solidFill>
@@ -5583,8 +5087,8 @@
         </p:nvSpPr>
         <p:spPr>
           <a:xfrm>
-            <a:off x="1005840" y="1828800"/>
-            <a:ext cx="4572000" cy="4206240"/>
+            <a:off x="914400" y="1645920"/>
+            <a:ext cx="4023360" cy="4389120"/>
           </a:xfrm>
           <a:prstGeom prst="rect">
             <a:avLst/>
@@ -5598,218 +5102,175 @@
           <a:lstStyle/>
           <a:p>
             <a:pPr>
-              <a:defRPr sz="1800" b="1">
+              <a:defRPr sz="1500" b="1">
                 <a:solidFill>
                   <a:srgbClr val="DC2626"/>
                 </a:solidFill>
               </a:defRPr>
             </a:pPr>
             <a:r>
-              <a:t>Inadecuación de K-Means en este Dominio</a:t>
+              <a:t>K-Means (Inadecuado aquí)</a:t>
             </a:r>
           </a:p>
           <a:p>
             <a:pPr>
               <a:spcAft>
-                <a:spcPts val="800"/>
+                <a:spcPts val="400"/>
               </a:spcAft>
-              <a:defRPr sz="1300">
+              <a:defRPr sz="1100">
                 <a:solidFill>
                   <a:srgbClr val="1E293B"/>
                 </a:solidFill>
               </a:defRPr>
             </a:pPr>
             <a:r>
-              <a:t>• Hipótesis de isodispersión: K-Means asume clusters esféricos de varianza similar. En nuestro problema, los metales forman un grupo ultra compacto y los aislantes un grupo muy disperso.</a:t>
+              <a:t>✖  Asume grupos esféricos e isodensos (igual varianza).</a:t>
             </a:r>
           </a:p>
           <a:p>
             <a:pPr>
               <a:spcAft>
-                <a:spcPts val="800"/>
+                <a:spcPts val="400"/>
               </a:spcAft>
-              <a:defRPr sz="1300">
+              <a:defRPr sz="1100">
                 <a:solidFill>
                   <a:srgbClr val="1E293B"/>
                 </a:solidFill>
               </a:defRPr>
             </a:pPr>
             <a:r>
-              <a:t>• Fusión o fractura indebida: K-Means tiende a partir en dos el grupo amplio de aislantes o a absorber indebidamente los semiconductores.</a:t>
+              <a:t>✖  Fractura el grupo disperso de aislantes.</a:t>
             </a:r>
           </a:p>
           <a:p>
             <a:pPr>
               <a:spcAft>
-                <a:spcPts val="800"/>
+                <a:spcPts val="400"/>
               </a:spcAft>
-              <a:defRPr sz="1300">
+              <a:defRPr sz="1100">
                 <a:solidFill>
                   <a:srgbClr val="1E293B"/>
                 </a:solidFill>
               </a:defRPr>
             </a:pPr>
             <a:r>
-              <a:t>• Obliga a prefijar k: Exige imponer a priori k = 3 sin saber de antemano si los datos revelan 2, 3 o 4 grupos.</a:t>
+              <a:t>✖  Exige fijar 'k' a priori de forma arbitraria.</a:t>
             </a:r>
           </a:p>
           <a:p>
             <a:pPr>
               <a:spcAft>
-                <a:spcPts val="800"/>
+                <a:spcPts val="400"/>
               </a:spcAft>
-              <a:defRPr sz="1300">
+              <a:defRPr sz="1100">
                 <a:solidFill>
                   <a:srgbClr val="1E293B"/>
                 </a:solidFill>
               </a:defRPr>
             </a:pPr>
             <a:r>
-              <a:t>• Sensibilidad extrema a anomalías: Obliga a cada punto atípico a pertenecer a un cluster, distorsionando los centroides.</a:t>
-            </a:r>
-          </a:p>
-        </p:txBody>
-      </p:sp>
-      <p:sp>
-        <p:nvSpPr>
-          <p:cNvPr id="7" name="Rounded Rectangle 6"/>
-          <p:cNvSpPr/>
+              <a:t>✖  No detecta ruido: fuerza anomalías a tener cluster.</a:t>
+            </a:r>
+          </a:p>
+          <a:p>
+            <a:br/>
+            <a:pPr>
+              <a:defRPr sz="1500" b="1">
+                <a:solidFill>
+                  <a:srgbClr val="059669"/>
+                </a:solidFill>
+              </a:defRPr>
+            </a:pPr>
+            <a:r>
+              <a:t>DBSCAN (Elección Óptima)</a:t>
+            </a:r>
+          </a:p>
+          <a:p>
+            <a:pPr>
+              <a:spcAft>
+                <a:spcPts val="400"/>
+              </a:spcAft>
+              <a:defRPr sz="1100">
+                <a:solidFill>
+                  <a:srgbClr val="1E293B"/>
+                </a:solidFill>
+              </a:defRPr>
+            </a:pPr>
+            <a:r>
+              <a:t>✔  Conecta por densidad local de cualquier forma.</a:t>
+            </a:r>
+          </a:p>
+          <a:p>
+            <a:pPr>
+              <a:spcAft>
+                <a:spcPts val="400"/>
+              </a:spcAft>
+              <a:defRPr sz="1100">
+                <a:solidFill>
+                  <a:srgbClr val="1E293B"/>
+                </a:solidFill>
+              </a:defRPr>
+            </a:pPr>
+            <a:r>
+              <a:t>✔  Tolera metales hiperdensos y aislantes laxos.</a:t>
+            </a:r>
+          </a:p>
+          <a:p>
+            <a:pPr>
+              <a:spcAft>
+                <a:spcPts val="400"/>
+              </a:spcAft>
+              <a:defRPr sz="1100">
+                <a:solidFill>
+                  <a:srgbClr val="1E293B"/>
+                </a:solidFill>
+              </a:defRPr>
+            </a:pPr>
+            <a:r>
+              <a:t>✔  Descubre el número de clusters sin prefijar k.</a:t>
+            </a:r>
+          </a:p>
+          <a:p>
+            <a:pPr>
+              <a:spcAft>
+                <a:spcPts val="400"/>
+              </a:spcAft>
+              <a:defRPr sz="1100">
+                <a:solidFill>
+                  <a:srgbClr val="1E293B"/>
+                </a:solidFill>
+              </a:defRPr>
+            </a:pPr>
+            <a:r>
+              <a:t>✔  Etiqueta ruido y anomalías de forma nativa (-1).</a:t>
+            </a:r>
+          </a:p>
+        </p:txBody>
+      </p:sp>
+      <p:pic>
+        <p:nvPicPr>
+          <p:cNvPr id="7" name="Picture 6" descr="comparativa_kmeans_dbscan.png"/>
+          <p:cNvPicPr>
+            <a:picLocks noChangeAspect="1"/>
+          </p:cNvPicPr>
           <p:nvPr/>
-        </p:nvSpPr>
-        <p:spPr>
-          <a:xfrm>
-            <a:off x="6217920" y="1645920"/>
-            <a:ext cx="5212080" cy="4572000"/>
-          </a:xfrm>
-          <a:prstGeom prst="roundRect">
-            <a:avLst/>
-          </a:prstGeom>
-          <a:solidFill>
-            <a:srgbClr val="F8FAFC"/>
-          </a:solidFill>
-          <a:ln w="15240">
-            <a:solidFill>
-              <a:srgbClr val="CBD5E1"/>
-            </a:solidFill>
-          </a:ln>
-        </p:spPr>
-        <p:style>
-          <a:lnRef idx="1">
-            <a:schemeClr val="accent1"/>
-          </a:lnRef>
-          <a:fillRef idx="3">
-            <a:schemeClr val="accent1"/>
-          </a:fillRef>
-          <a:effectRef idx="2">
-            <a:schemeClr val="accent1"/>
-          </a:effectRef>
-          <a:fontRef idx="minor">
-            <a:schemeClr val="lt1"/>
-          </a:fontRef>
-        </p:style>
-        <p:txBody>
-          <a:bodyPr rtlCol="0" anchor="ctr"/>
-          <a:lstStyle/>
-          <a:p>
-            <a:pPr algn="ctr"/>
-          </a:p>
-        </p:txBody>
-      </p:sp>
-      <p:sp>
-        <p:nvSpPr>
-          <p:cNvPr id="8" name="TextBox 7"/>
-          <p:cNvSpPr txBox="1"/>
-          <p:nvPr/>
-        </p:nvSpPr>
-        <p:spPr>
-          <a:xfrm>
-            <a:off x="6492240" y="1828800"/>
-            <a:ext cx="4663440" cy="4206240"/>
+        </p:nvPicPr>
+        <p:blipFill>
+          <a:blip r:embed="rId2"/>
+          <a:stretch>
+            <a:fillRect/>
+          </a:stretch>
+        </p:blipFill>
+        <p:spPr>
+          <a:xfrm>
+            <a:off x="5303520" y="1691640"/>
+            <a:ext cx="6126480" cy="2537229"/>
           </a:xfrm>
           <a:prstGeom prst="rect">
             <a:avLst/>
           </a:prstGeom>
-          <a:noFill/>
-        </p:spPr>
-        <p:txBody>
-          <a:bodyPr wrap="square">
-            <a:spAutoFit/>
-          </a:bodyPr>
-          <a:lstStyle/>
-          <a:p>
-            <a:pPr>
-              <a:defRPr sz="1800" b="1">
-                <a:solidFill>
-                  <a:srgbClr val="059669"/>
-                </a:solidFill>
-              </a:defRPr>
-            </a:pPr>
-            <a:r>
-              <a:t>Ventajas Determinantes de DBSCAN</a:t>
-            </a:r>
-          </a:p>
-          <a:p>
-            <a:pPr>
-              <a:spcAft>
-                <a:spcPts val="800"/>
-              </a:spcAft>
-              <a:defRPr sz="1300">
-                <a:solidFill>
-                  <a:srgbClr val="1E293B"/>
-                </a:solidFill>
-              </a:defRPr>
-            </a:pPr>
-            <a:r>
-              <a:t>• Conectividad por densidad: Descubre clusters conectando puntos núcleo a través de regiones de alta densidad continua, sin importar la forma.</a:t>
-            </a:r>
-          </a:p>
-          <a:p>
-            <a:pPr>
-              <a:spcAft>
-                <a:spcPts val="800"/>
-              </a:spcAft>
-              <a:defRPr sz="1300">
-                <a:solidFill>
-                  <a:srgbClr val="1E293B"/>
-                </a:solidFill>
-              </a:defRPr>
-            </a:pPr>
-            <a:r>
-              <a:t>• Robusto a densidades dispares: Respeta que un cluster sea hiperdenso (metales) y otro más laxo siempre que superen el umbral mínimo local.</a:t>
-            </a:r>
-          </a:p>
-          <a:p>
-            <a:pPr>
-              <a:spcAft>
-                <a:spcPts val="800"/>
-              </a:spcAft>
-              <a:defRPr sz="1300">
-                <a:solidFill>
-                  <a:srgbClr val="1E293B"/>
-                </a:solidFill>
-              </a:defRPr>
-            </a:pPr>
-            <a:r>
-              <a:t>• Descubrimiento autónomo de grupos: Encuentra el número de clusters sin prefijar k.</a:t>
-            </a:r>
-          </a:p>
-          <a:p>
-            <a:pPr>
-              <a:spcAft>
-                <a:spcPts val="800"/>
-              </a:spcAft>
-              <a:defRPr sz="1300">
-                <a:solidFill>
-                  <a:srgbClr val="1E293B"/>
-                </a:solidFill>
-              </a:defRPr>
-            </a:pPr>
-            <a:r>
-              <a:t>• Etiquetado nativo de ruido (-1): Materiales exóticos o anisótropos (como el grafito) se aíslan de forma transparente sin ensuciar las fases puras.</a:t>
-            </a:r>
-          </a:p>
-        </p:txBody>
-      </p:sp>
+        </p:spPr>
+      </p:pic>
     </p:spTree>
   </p:cSld>
   <p:clrMapOvr>
@@ -5836,8 +5297,8 @@
         </p:nvSpPr>
         <p:spPr>
           <a:xfrm>
-            <a:off x="731520" y="365760"/>
-            <a:ext cx="10698480" cy="365760"/>
+            <a:off x="731520" y="320040"/>
+            <a:ext cx="10698480" cy="320040"/>
           </a:xfrm>
           <a:prstGeom prst="rect">
             <a:avLst/>
@@ -5845,20 +5306,20 @@
           <a:noFill/>
         </p:spPr>
         <p:txBody>
-          <a:bodyPr wrap="square">
+          <a:bodyPr wrap="none">
             <a:spAutoFit/>
           </a:bodyPr>
           <a:lstStyle/>
           <a:p>
             <a:pPr>
-              <a:defRPr sz="1100" b="1">
+              <a:defRPr sz="1050" b="1">
                 <a:solidFill>
                   <a:srgbClr val="059669"/>
                 </a:solidFill>
               </a:defRPr>
             </a:pPr>
             <a:r>
-              <a:t>CPIA · APRENDIZAJE NO SUPERVISADO</a:t>
+              <a:t>CPIA · CLUSTERING EN FÍSICA</a:t>
             </a:r>
           </a:p>
         </p:txBody>
@@ -5871,8 +5332,8 @@
         </p:nvSpPr>
         <p:spPr>
           <a:xfrm>
-            <a:off x="731520" y="685800"/>
-            <a:ext cx="10698480" cy="731520"/>
+            <a:off x="731520" y="621792"/>
+            <a:ext cx="10698480" cy="640080"/>
           </a:xfrm>
           <a:prstGeom prst="rect">
             <a:avLst/>
@@ -5880,20 +5341,20 @@
           <a:noFill/>
         </p:spPr>
         <p:txBody>
-          <a:bodyPr wrap="square">
+          <a:bodyPr wrap="none">
             <a:spAutoFit/>
           </a:bodyPr>
           <a:lstStyle/>
           <a:p>
             <a:pPr>
-              <a:defRPr sz="2400" b="1">
+              <a:defRPr sz="2200" b="1">
                 <a:solidFill>
                   <a:srgbClr val="0F172A"/>
                 </a:solidFill>
               </a:defRPr>
             </a:pPr>
             <a:r>
-              <a:t>Metodología: Estandarización y Selección de Parámetros</a:t>
+              <a:t>Metodología Matemática: Fórmulas y Parámetros</a:t>
             </a:r>
           </a:p>
         </p:txBody>
@@ -5906,8 +5367,8 @@
         </p:nvSpPr>
         <p:spPr>
           <a:xfrm>
-            <a:off x="731520" y="1417320"/>
-            <a:ext cx="10728655" cy="27432"/>
+            <a:off x="731520" y="1298448"/>
+            <a:ext cx="10728655" cy="18288"/>
           </a:xfrm>
           <a:prstGeom prst="rect">
             <a:avLst/>
@@ -5951,8 +5412,8 @@
         </p:nvSpPr>
         <p:spPr>
           <a:xfrm>
-            <a:off x="731520" y="1645920"/>
-            <a:ext cx="5120640" cy="4572000"/>
+            <a:off x="731520" y="1554480"/>
+            <a:ext cx="3337560" cy="4572000"/>
           </a:xfrm>
           <a:prstGeom prst="roundRect">
             <a:avLst/>
@@ -5960,9 +5421,9 @@
           <a:solidFill>
             <a:srgbClr val="F8FAFC"/>
           </a:solidFill>
-          <a:ln w="15240">
+          <a:ln w="13970">
             <a:solidFill>
-              <a:srgbClr val="CBD5E1"/>
+              <a:srgbClr val="2563EB"/>
             </a:solidFill>
           </a:ln>
         </p:spPr>
@@ -5996,8 +5457,8 @@
         </p:nvSpPr>
         <p:spPr>
           <a:xfrm>
-            <a:off x="1005840" y="1828800"/>
-            <a:ext cx="4572000" cy="4206240"/>
+            <a:off x="914400" y="1737360"/>
+            <a:ext cx="2971800" cy="4114800"/>
           </a:xfrm>
           <a:prstGeom prst="rect">
             <a:avLst/>
@@ -6011,74 +5472,92 @@
           <a:lstStyle/>
           <a:p>
             <a:pPr>
-              <a:defRPr sz="1800" b="1">
+              <a:defRPr sz="1600" b="1">
                 <a:solidFill>
                   <a:srgbClr val="2563EB"/>
                 </a:solidFill>
               </a:defRPr>
             </a:pPr>
             <a:r>
-              <a:t>Estandarización Manual Z-Score</a:t>
-            </a:r>
+              <a:t>1. Estandarización Z-Score</a:t>
+            </a:r>
+            <a:br/>
+            <a:r>
+              <a:t>(Implementada con NumPy)</a:t>
+            </a:r>
+          </a:p>
+          <a:p>
+            <a:br/>
+            <a:pPr algn="ctr">
+              <a:defRPr sz="2200" b="1">
+                <a:solidFill>
+                  <a:srgbClr val="0F172A"/>
+                </a:solidFill>
+              </a:defRPr>
+            </a:pPr>
+            <a:r>
+              <a:t>Z = (X - μ) / σ</a:t>
+            </a:r>
+            <a:br/>
           </a:p>
           <a:p>
             <a:pPr>
               <a:spcAft>
-                <a:spcPts val="800"/>
+                <a:spcPts val="600"/>
               </a:spcAft>
-              <a:defRPr sz="1300">
+              <a:defRPr sz="1150">
                 <a:solidFill>
                   <a:srgbClr val="1E293B"/>
                 </a:solidFill>
               </a:defRPr>
             </a:pPr>
             <a:r>
-              <a:t>• Métrica Euclídea: DBSCAN mide distancias d(p, q) = √[(Δx₁)² + (Δx₂)²].</a:t>
+              <a:t>• μ = Media muestral por columna</a:t>
             </a:r>
           </a:p>
           <a:p>
             <a:pPr>
               <a:spcAft>
-                <a:spcPts val="800"/>
+                <a:spcPts val="600"/>
               </a:spcAft>
-              <a:defRPr sz="1300">
+              <a:defRPr sz="1150">
                 <a:solidFill>
                   <a:srgbClr val="1E293B"/>
                 </a:solidFill>
               </a:defRPr>
             </a:pPr>
             <a:r>
-              <a:t>• El problema de escala: El rango de log₁₀ρ es ~31 unidades, mientras que el rango de α es ~0.08 unidades. Sin estandarizar, α sería invisible.</a:t>
+              <a:t>• σ = Desviación estándar típica</a:t>
             </a:r>
           </a:p>
           <a:p>
             <a:pPr>
               <a:spcAft>
-                <a:spcPts val="800"/>
+                <a:spcPts val="600"/>
               </a:spcAft>
-              <a:defRPr sz="1300">
+              <a:defRPr sz="1150">
                 <a:solidFill>
                   <a:srgbClr val="1E293B"/>
                 </a:solidFill>
               </a:defRPr>
             </a:pPr>
             <a:r>
-              <a:t>• Fórmula implementada manualmente: Calculamos la media μ y desviación estándar σ vectorialmente con NumPy:</a:t>
+              <a:t>• Resultado: Media = 0, Varianza = 1</a:t>
             </a:r>
           </a:p>
           <a:p>
             <a:pPr>
               <a:spcAft>
-                <a:spcPts val="800"/>
+                <a:spcPts val="600"/>
               </a:spcAft>
-              <a:defRPr sz="1300">
+              <a:defRPr sz="1150">
                 <a:solidFill>
                   <a:srgbClr val="1E293B"/>
                 </a:solidFill>
               </a:defRPr>
             </a:pPr>
             <a:r>
-              <a:t>• Z = (X - μ) / σ Ambas dimensiones quedan con media 0 y varianza 1. La métrica pondera por igual la resistividad y el signo térmico cuántico.</a:t>
+              <a:t>• Imprescindible: equipara el rango de log₁₀ρ (~31) con el rango de α (~0.08) para la distancia euclídea.</a:t>
             </a:r>
           </a:p>
         </p:txBody>
@@ -6091,8 +5570,8 @@
         </p:nvSpPr>
         <p:spPr>
           <a:xfrm>
-            <a:off x="6217920" y="1645920"/>
-            <a:ext cx="5212080" cy="4572000"/>
+            <a:off x="4434840" y="1554480"/>
+            <a:ext cx="3337560" cy="4572000"/>
           </a:xfrm>
           <a:prstGeom prst="roundRect">
             <a:avLst/>
@@ -6100,9 +5579,9 @@
           <a:solidFill>
             <a:srgbClr val="F8FAFC"/>
           </a:solidFill>
-          <a:ln w="15240">
+          <a:ln w="13970">
             <a:solidFill>
-              <a:srgbClr val="CBD5E1"/>
+              <a:srgbClr val="059669"/>
             </a:solidFill>
           </a:ln>
         </p:spPr>
@@ -6136,8 +5615,8 @@
         </p:nvSpPr>
         <p:spPr>
           <a:xfrm>
-            <a:off x="6492240" y="1828800"/>
-            <a:ext cx="4663440" cy="4206240"/>
+            <a:off x="4617720" y="1737360"/>
+            <a:ext cx="2971800" cy="4114800"/>
           </a:xfrm>
           <a:prstGeom prst="rect">
             <a:avLst/>
@@ -6151,74 +5630,329 @@
           <a:lstStyle/>
           <a:p>
             <a:pPr>
+              <a:defRPr sz="1600" b="1">
+                <a:solidFill>
+                  <a:srgbClr val="059669"/>
+                </a:solidFill>
+              </a:defRPr>
+            </a:pPr>
+            <a:r>
+              <a:t>2. Criterio de Núcleo</a:t>
+            </a:r>
+            <a:br/>
+            <a:r>
+              <a:t>(DBSCAN Espacial)</a:t>
+            </a:r>
+          </a:p>
+          <a:p>
+            <a:br/>
+            <a:pPr algn="ctr">
               <a:defRPr sz="1800" b="1">
                 <a:solidFill>
-                  <a:srgbClr val="059669"/>
-                </a:solidFill>
-              </a:defRPr>
-            </a:pPr>
-            <a:r>
-              <a:t>Justificación Objetiva de Parámetros</a:t>
-            </a:r>
+                  <a:srgbClr val="0F172A"/>
+                </a:solidFill>
+              </a:defRPr>
+            </a:pPr>
+            <a:r>
+              <a:t>N_ε(p) = { q | d(p, q) ≤ ε }</a:t>
+            </a:r>
+            <a:br/>
           </a:p>
           <a:p>
             <a:pPr>
               <a:spcAft>
-                <a:spcPts val="800"/>
+                <a:spcPts val="400"/>
               </a:spcAft>
-              <a:defRPr sz="1300">
+              <a:defRPr sz="1150">
                 <a:solidFill>
                   <a:srgbClr val="1E293B"/>
                 </a:solidFill>
               </a:defRPr>
             </a:pPr>
             <a:r>
-              <a:t>• Umbral min_samples = 3: Siguiendo la regla canónica de Schubert et al.: para d = 2 dimensiones, min_samples ≥ d + 1. Fija el mínimo para considerar densidad significativa.</a:t>
+              <a:t>• d(p, q) = Distancia Euclídea 2D</a:t>
             </a:r>
           </a:p>
           <a:p>
             <a:pPr>
               <a:spcAft>
-                <a:spcPts val="800"/>
+                <a:spcPts val="400"/>
               </a:spcAft>
-              <a:defRPr sz="1300">
+              <a:defRPr sz="1150">
                 <a:solidFill>
                   <a:srgbClr val="1E293B"/>
                 </a:solidFill>
               </a:defRPr>
             </a:pPr>
             <a:r>
-              <a:t>• Radio epsilon (ε = 0.65): Determinado analíticamente mediante la gráfica de distancias k-NN (método del codo) y validado con Silhouette Score.</a:t>
+              <a:t>• Punto Núcleo (Core Point):</a:t>
             </a:r>
           </a:p>
           <a:p>
             <a:pPr>
               <a:spcAft>
-                <a:spcPts val="800"/>
+                <a:spcPts val="400"/>
               </a:spcAft>
-              <a:defRPr sz="1300">
+              <a:defRPr sz="1150">
                 <a:solidFill>
                   <a:srgbClr val="1E293B"/>
                 </a:solidFill>
               </a:defRPr>
             </a:pPr>
             <a:r>
-              <a:t>• Comportamiento físico de ε = 0.65: Suficientemente grande para abarcar la dispersión de los aislantes, pero suficientemente estricto para evitar que los semiconductores se fusionen con los metales.</a:t>
+              <a:t>•    |N_ε(p)| ≥ min_samples</a:t>
             </a:r>
           </a:p>
           <a:p>
             <a:pPr>
               <a:spcAft>
-                <a:spcPts val="800"/>
+                <a:spcPts val="400"/>
               </a:spcAft>
-              <a:defRPr sz="1300">
+              <a:defRPr sz="1150">
                 <a:solidFill>
                   <a:srgbClr val="1E293B"/>
                 </a:solidFill>
               </a:defRPr>
             </a:pPr>
             <a:r>
-              <a:t>• Implementación: Ejecutado directamente con el algoritmo oficial de scikit-learn: DBSCAN(eps=0.65, min_samples=3).</a:t>
+              <a:t>• Punto Frontera (Border):</a:t>
+            </a:r>
+          </a:p>
+          <a:p>
+            <a:pPr>
+              <a:spcAft>
+                <a:spcPts val="400"/>
+              </a:spcAft>
+              <a:defRPr sz="1150">
+                <a:solidFill>
+                  <a:srgbClr val="1E293B"/>
+                </a:solidFill>
+              </a:defRPr>
+            </a:pPr>
+            <a:r>
+              <a:t>•    Alcanzable desde un núcleo</a:t>
+            </a:r>
+          </a:p>
+          <a:p>
+            <a:pPr>
+              <a:spcAft>
+                <a:spcPts val="400"/>
+              </a:spcAft>
+              <a:defRPr sz="1150">
+                <a:solidFill>
+                  <a:srgbClr val="1E293B"/>
+                </a:solidFill>
+              </a:defRPr>
+            </a:pPr>
+            <a:r>
+              <a:t>• Ruido (Noise):</a:t>
+            </a:r>
+          </a:p>
+          <a:p>
+            <a:pPr>
+              <a:spcAft>
+                <a:spcPts val="400"/>
+              </a:spcAft>
+              <a:defRPr sz="1150">
+                <a:solidFill>
+                  <a:srgbClr val="1E293B"/>
+                </a:solidFill>
+              </a:defRPr>
+            </a:pPr>
+            <a:r>
+              <a:t>•    No alcanzable (|N_ε| &lt; min_samples)</a:t>
+            </a:r>
+          </a:p>
+        </p:txBody>
+      </p:sp>
+      <p:sp>
+        <p:nvSpPr>
+          <p:cNvPr id="9" name="Rounded Rectangle 8"/>
+          <p:cNvSpPr/>
+          <p:nvPr/>
+        </p:nvSpPr>
+        <p:spPr>
+          <a:xfrm>
+            <a:off x="8138160" y="1554480"/>
+            <a:ext cx="3337560" cy="4572000"/>
+          </a:xfrm>
+          <a:prstGeom prst="roundRect">
+            <a:avLst/>
+          </a:prstGeom>
+          <a:solidFill>
+            <a:srgbClr val="F8FAFC"/>
+          </a:solidFill>
+          <a:ln w="13970">
+            <a:solidFill>
+              <a:srgbClr val="D97706"/>
+            </a:solidFill>
+          </a:ln>
+        </p:spPr>
+        <p:style>
+          <a:lnRef idx="1">
+            <a:schemeClr val="accent1"/>
+          </a:lnRef>
+          <a:fillRef idx="3">
+            <a:schemeClr val="accent1"/>
+          </a:fillRef>
+          <a:effectRef idx="2">
+            <a:schemeClr val="accent1"/>
+          </a:effectRef>
+          <a:fontRef idx="minor">
+            <a:schemeClr val="lt1"/>
+          </a:fontRef>
+        </p:style>
+        <p:txBody>
+          <a:bodyPr rtlCol="0" anchor="ctr"/>
+          <a:lstStyle/>
+          <a:p>
+            <a:pPr algn="ctr"/>
+          </a:p>
+        </p:txBody>
+      </p:sp>
+      <p:sp>
+        <p:nvSpPr>
+          <p:cNvPr id="10" name="TextBox 9"/>
+          <p:cNvSpPr txBox="1"/>
+          <p:nvPr/>
+        </p:nvSpPr>
+        <p:spPr>
+          <a:xfrm>
+            <a:off x="8321040" y="1737360"/>
+            <a:ext cx="2971800" cy="4114800"/>
+          </a:xfrm>
+          <a:prstGeom prst="rect">
+            <a:avLst/>
+          </a:prstGeom>
+          <a:noFill/>
+        </p:spPr>
+        <p:txBody>
+          <a:bodyPr wrap="square">
+            <a:spAutoFit/>
+          </a:bodyPr>
+          <a:lstStyle/>
+          <a:p>
+            <a:pPr>
+              <a:defRPr sz="1600" b="1">
+                <a:solidFill>
+                  <a:srgbClr val="D97706"/>
+                </a:solidFill>
+              </a:defRPr>
+            </a:pPr>
+            <a:r>
+              <a:t>3. Parámetros Fijados</a:t>
+            </a:r>
+            <a:br/>
+            <a:r>
+              <a:t>(Criterio Objetivo)</a:t>
+            </a:r>
+          </a:p>
+          <a:p>
+            <a:br/>
+            <a:pPr algn="ctr">
+              <a:defRPr sz="2000" b="1">
+                <a:solidFill>
+                  <a:srgbClr val="0F172A"/>
+                </a:solidFill>
+              </a:defRPr>
+            </a:pPr>
+            <a:r>
+              <a:t>ε = 0.65</a:t>
+            </a:r>
+            <a:br/>
+            <a:r>
+              <a:t>min_samples = 3</a:t>
+            </a:r>
+            <a:br/>
+          </a:p>
+          <a:p>
+            <a:pPr>
+              <a:spcAft>
+                <a:spcPts val="600"/>
+              </a:spcAft>
+              <a:defRPr sz="1150">
+                <a:solidFill>
+                  <a:srgbClr val="1E293B"/>
+                </a:solidFill>
+              </a:defRPr>
+            </a:pPr>
+            <a:r>
+              <a:t>• min_samples = 3:</a:t>
+            </a:r>
+          </a:p>
+          <a:p>
+            <a:pPr>
+              <a:spcAft>
+                <a:spcPts val="600"/>
+              </a:spcAft>
+              <a:defRPr sz="1150">
+                <a:solidFill>
+                  <a:srgbClr val="1E293B"/>
+                </a:solidFill>
+              </a:defRPr>
+            </a:pPr>
+            <a:r>
+              <a:t>•    Regla canónica k ≥ d + 1 (dimensión d = 2).</a:t>
+            </a:r>
+          </a:p>
+          <a:p>
+            <a:pPr>
+              <a:spcAft>
+                <a:spcPts val="600"/>
+              </a:spcAft>
+              <a:defRPr sz="1150">
+                <a:solidFill>
+                  <a:srgbClr val="1E293B"/>
+                </a:solidFill>
+              </a:defRPr>
+            </a:pPr>
+            <a:r>
+              <a:t>• ε = 0.65:</a:t>
+            </a:r>
+          </a:p>
+          <a:p>
+            <a:pPr>
+              <a:spcAft>
+                <a:spcPts val="600"/>
+              </a:spcAft>
+              <a:defRPr sz="1150">
+                <a:solidFill>
+                  <a:srgbClr val="1E293B"/>
+                </a:solidFill>
+              </a:defRPr>
+            </a:pPr>
+            <a:r>
+              <a:t>•    Determinado mediante gráfico k-NN (codo).</a:t>
+            </a:r>
+          </a:p>
+          <a:p>
+            <a:pPr>
+              <a:spcAft>
+                <a:spcPts val="600"/>
+              </a:spcAft>
+              <a:defRPr sz="1150">
+                <a:solidFill>
+                  <a:srgbClr val="1E293B"/>
+                </a:solidFill>
+              </a:defRPr>
+            </a:pPr>
+            <a:r>
+              <a:t>•    Ventana óptima que aísla aislantes sin fusionar metales.</a:t>
+            </a:r>
+          </a:p>
+          <a:p>
+            <a:pPr>
+              <a:spcAft>
+                <a:spcPts val="600"/>
+              </a:spcAft>
+              <a:defRPr sz="1150">
+                <a:solidFill>
+                  <a:srgbClr val="1E293B"/>
+                </a:solidFill>
+              </a:defRPr>
+            </a:pPr>
+            <a:r>
+              <a:t>• Ejecución: scikit-learn DBSCAN</a:t>
             </a:r>
           </a:p>
         </p:txBody>
@@ -6249,8 +5983,8 @@
         </p:nvSpPr>
         <p:spPr>
           <a:xfrm>
-            <a:off x="731520" y="365760"/>
-            <a:ext cx="10698480" cy="365760"/>
+            <a:off x="731520" y="228600"/>
+            <a:ext cx="10698480" cy="548640"/>
           </a:xfrm>
           <a:prstGeom prst="rect">
             <a:avLst/>
@@ -6258,247 +5992,39 @@
           <a:noFill/>
         </p:spPr>
         <p:txBody>
-          <a:bodyPr wrap="square">
+          <a:bodyPr wrap="none">
             <a:spAutoFit/>
           </a:bodyPr>
           <a:lstStyle/>
           <a:p>
             <a:pPr>
-              <a:defRPr sz="1100" b="1">
-                <a:solidFill>
-                  <a:srgbClr val="059669"/>
-                </a:solidFill>
-              </a:defRPr>
-            </a:pPr>
-            <a:r>
-              <a:t>CPIA · APRENDIZAJE NO SUPERVISADO</a:t>
-            </a:r>
-          </a:p>
-        </p:txBody>
-      </p:sp>
-      <p:sp>
-        <p:nvSpPr>
-          <p:cNvPr id="3" name="TextBox 2"/>
-          <p:cNvSpPr txBox="1"/>
-          <p:nvPr/>
-        </p:nvSpPr>
-        <p:spPr>
-          <a:xfrm>
-            <a:off x="731520" y="685800"/>
-            <a:ext cx="10698480" cy="731520"/>
-          </a:xfrm>
-          <a:prstGeom prst="rect">
-            <a:avLst/>
-          </a:prstGeom>
-          <a:noFill/>
-        </p:spPr>
-        <p:txBody>
-          <a:bodyPr wrap="square">
-            <a:spAutoFit/>
-          </a:bodyPr>
-          <a:lstStyle/>
+              <a:defRPr sz="2200" b="1">
+                <a:solidFill>
+                  <a:srgbClr val="0F172A"/>
+                </a:solidFill>
+              </a:defRPr>
+            </a:pPr>
+            <a:r>
+              <a:t>Resultado DBSCAN: Clasificación 2D de Materiales Eléctricos</a:t>
+            </a:r>
+          </a:p>
           <a:p>
             <a:pPr>
-              <a:defRPr sz="2400" b="1">
-                <a:solidFill>
-                  <a:srgbClr val="0F172A"/>
-                </a:solidFill>
-              </a:defRPr>
-            </a:pPr>
-            <a:r>
-              <a:t>Resultados Experimentales: Clasificación 2D</a:t>
-            </a:r>
-          </a:p>
-        </p:txBody>
-      </p:sp>
-      <p:sp>
-        <p:nvSpPr>
-          <p:cNvPr id="4" name="Rectangle 3"/>
-          <p:cNvSpPr/>
-          <p:nvPr/>
-        </p:nvSpPr>
-        <p:spPr>
-          <a:xfrm>
-            <a:off x="731520" y="1417320"/>
-            <a:ext cx="10728655" cy="27432"/>
-          </a:xfrm>
-          <a:prstGeom prst="rect">
-            <a:avLst/>
-          </a:prstGeom>
-          <a:solidFill>
-            <a:srgbClr val="CBD5E1"/>
-          </a:solidFill>
-          <a:ln>
-            <a:solidFill>
-              <a:srgbClr val="CBD5E1"/>
-            </a:solidFill>
-          </a:ln>
-        </p:spPr>
-        <p:style>
-          <a:lnRef idx="1">
-            <a:schemeClr val="accent1"/>
-          </a:lnRef>
-          <a:fillRef idx="3">
-            <a:schemeClr val="accent1"/>
-          </a:fillRef>
-          <a:effectRef idx="2">
-            <a:schemeClr val="accent1"/>
-          </a:effectRef>
-          <a:fontRef idx="minor">
-            <a:schemeClr val="lt1"/>
-          </a:fontRef>
-        </p:style>
-        <p:txBody>
-          <a:bodyPr rtlCol="0" anchor="ctr"/>
-          <a:lstStyle/>
-          <a:p>
-            <a:pPr algn="ctr"/>
-          </a:p>
-        </p:txBody>
-      </p:sp>
-      <p:sp>
-        <p:nvSpPr>
-          <p:cNvPr id="5" name="Rounded Rectangle 4"/>
-          <p:cNvSpPr/>
-          <p:nvPr/>
-        </p:nvSpPr>
-        <p:spPr>
-          <a:xfrm>
-            <a:off x="731520" y="1645920"/>
-            <a:ext cx="4389120" cy="4572000"/>
-          </a:xfrm>
-          <a:prstGeom prst="roundRect">
-            <a:avLst/>
-          </a:prstGeom>
-          <a:solidFill>
-            <a:srgbClr val="F8FAFC"/>
-          </a:solidFill>
-          <a:ln w="15240">
-            <a:solidFill>
-              <a:srgbClr val="CBD5E1"/>
-            </a:solidFill>
-          </a:ln>
-        </p:spPr>
-        <p:style>
-          <a:lnRef idx="1">
-            <a:schemeClr val="accent1"/>
-          </a:lnRef>
-          <a:fillRef idx="3">
-            <a:schemeClr val="accent1"/>
-          </a:fillRef>
-          <a:effectRef idx="2">
-            <a:schemeClr val="accent1"/>
-          </a:effectRef>
-          <a:fontRef idx="minor">
-            <a:schemeClr val="lt1"/>
-          </a:fontRef>
-        </p:style>
-        <p:txBody>
-          <a:bodyPr rtlCol="0" anchor="ctr"/>
-          <a:lstStyle/>
-          <a:p>
-            <a:pPr algn="ctr"/>
-          </a:p>
-        </p:txBody>
-      </p:sp>
-      <p:sp>
-        <p:nvSpPr>
-          <p:cNvPr id="6" name="TextBox 5"/>
-          <p:cNvSpPr txBox="1"/>
-          <p:nvPr/>
-        </p:nvSpPr>
-        <p:spPr>
-          <a:xfrm>
-            <a:off x="914400" y="1828800"/>
-            <a:ext cx="4023360" cy="4206240"/>
-          </a:xfrm>
-          <a:prstGeom prst="rect">
-            <a:avLst/>
-          </a:prstGeom>
-          <a:noFill/>
-        </p:spPr>
-        <p:txBody>
-          <a:bodyPr wrap="square">
-            <a:spAutoFit/>
-          </a:bodyPr>
-          <a:lstStyle/>
-          <a:p>
-            <a:pPr>
-              <a:defRPr sz="1800" b="1">
-                <a:solidFill>
-                  <a:srgbClr val="0F172A"/>
-                </a:solidFill>
-              </a:defRPr>
-            </a:pPr>
-            <a:r>
-              <a:t>3 Clusters Descubiertos</a:t>
-            </a:r>
-          </a:p>
-          <a:p>
-            <a:pPr>
-              <a:spcAft>
-                <a:spcPts val="600"/>
-              </a:spcAft>
-              <a:defRPr sz="1200">
-                <a:solidFill>
-                  <a:srgbClr val="1E293B"/>
-                </a:solidFill>
-              </a:defRPr>
-            </a:pPr>
-            <a:r>
-              <a:t>• Cluster 0 (Ámbar): Conductores (35 metales). Cobre, Plata, Oro, Aluminio... α &gt; 0, resistividad muy baja.</a:t>
-            </a:r>
-          </a:p>
-          <a:p>
-            <a:pPr>
-              <a:spcAft>
-                <a:spcPts val="600"/>
-              </a:spcAft>
-              <a:defRPr sz="1200">
-                <a:solidFill>
-                  <a:srgbClr val="1E293B"/>
-                </a:solidFill>
-              </a:defRPr>
-            </a:pPr>
-            <a:r>
-              <a:t>• Cluster 1 (Azul): Aislantes (10 dieléctricos). Vidrio, Teflón, Cuarzo, PET... α ≈ 0, resistividades colosales (&gt; 10¹¹ Ω·m).</a:t>
-            </a:r>
-          </a:p>
-          <a:p>
-            <a:pPr>
-              <a:spcAft>
-                <a:spcPts val="600"/>
-              </a:spcAft>
-              <a:defRPr sz="1200">
-                <a:solidFill>
-                  <a:srgbClr val="1E293B"/>
-                </a:solidFill>
-              </a:defRPr>
-            </a:pPr>
-            <a:r>
-              <a:t>• Cluster 2 (Verde): Semiconductores (10 materiales). Silicio, Germanio, GaAs, InP... Perfectamente segregados por α fuertemente negativo.</a:t>
-            </a:r>
-          </a:p>
-          <a:p>
-            <a:pPr>
-              <a:spcAft>
-                <a:spcPts val="600"/>
-              </a:spcAft>
-              <a:defRPr sz="1200">
-                <a:solidFill>
-                  <a:srgbClr val="1E293B"/>
-                </a:solidFill>
-              </a:defRPr>
-            </a:pPr>
-            <a:r>
-              <a:t>• Frontera α = 0: La línea discontinua marca la transición física de fonones a generación térmica.</a:t>
+              <a:defRPr sz="1300">
+                <a:solidFill>
+                  <a:srgbClr val="64748B"/>
+                </a:solidFill>
+              </a:defRPr>
+            </a:pPr>
+            <a:r>
+              <a:t>ε = 0.65 · min_samples = 3  |  3 Clusters descubiertos  |  0 Ruido</a:t>
             </a:r>
           </a:p>
         </p:txBody>
       </p:sp>
       <p:pic>
         <p:nvPicPr>
-          <p:cNvPr id="7" name="Picture 6" descr="clusters_materiales_dbscan.png"/>
+          <p:cNvPr id="3" name="Picture 2" descr="clusters_materiales_dbscan.png"/>
           <p:cNvPicPr>
             <a:picLocks noChangeAspect="1"/>
           </p:cNvPicPr>
@@ -6512,8 +6038,8 @@
         </p:blipFill>
         <p:spPr>
           <a:xfrm>
-            <a:off x="5303520" y="1645920"/>
-            <a:ext cx="6126480" cy="3982212"/>
+            <a:off x="1005840" y="1051560"/>
+            <a:ext cx="10149840" cy="6597396"/>
           </a:xfrm>
           <a:prstGeom prst="rect">
             <a:avLst/>
@@ -6546,8 +6072,8 @@
         </p:nvSpPr>
         <p:spPr>
           <a:xfrm>
-            <a:off x="731520" y="365760"/>
-            <a:ext cx="10698480" cy="365760"/>
+            <a:off x="731520" y="320040"/>
+            <a:ext cx="10698480" cy="320040"/>
           </a:xfrm>
           <a:prstGeom prst="rect">
             <a:avLst/>
@@ -6555,20 +6081,20 @@
           <a:noFill/>
         </p:spPr>
         <p:txBody>
-          <a:bodyPr wrap="square">
+          <a:bodyPr wrap="none">
             <a:spAutoFit/>
           </a:bodyPr>
           <a:lstStyle/>
           <a:p>
             <a:pPr>
-              <a:defRPr sz="1100" b="1">
+              <a:defRPr sz="1050" b="1">
                 <a:solidFill>
                   <a:srgbClr val="059669"/>
                 </a:solidFill>
               </a:defRPr>
             </a:pPr>
             <a:r>
-              <a:t>CPIA · APRENDIZAJE NO SUPERVISADO</a:t>
+              <a:t>CPIA · CLUSTERING EN FÍSICA</a:t>
             </a:r>
           </a:p>
         </p:txBody>
@@ -6581,8 +6107,8 @@
         </p:nvSpPr>
         <p:spPr>
           <a:xfrm>
-            <a:off x="731520" y="685800"/>
-            <a:ext cx="10698480" cy="731520"/>
+            <a:off x="731520" y="621792"/>
+            <a:ext cx="10698480" cy="640080"/>
           </a:xfrm>
           <a:prstGeom prst="rect">
             <a:avLst/>
@@ -6590,20 +6116,20 @@
           <a:noFill/>
         </p:spPr>
         <p:txBody>
-          <a:bodyPr wrap="square">
+          <a:bodyPr wrap="none">
             <a:spAutoFit/>
           </a:bodyPr>
           <a:lstStyle/>
           <a:p>
             <a:pPr>
-              <a:defRPr sz="2400" b="1">
+              <a:defRPr sz="2200" b="1">
                 <a:solidFill>
                   <a:srgbClr val="0F172A"/>
                 </a:solidFill>
               </a:defRPr>
             </a:pPr>
             <a:r>
-              <a:t>Validación Cuantitativa y Matriz de Contingencia</a:t>
+              <a:t>Validación Experimental: Matriz de Contingencia Física</a:t>
             </a:r>
           </a:p>
         </p:txBody>
@@ -6616,8 +6142,8 @@
         </p:nvSpPr>
         <p:spPr>
           <a:xfrm>
-            <a:off x="731520" y="1417320"/>
-            <a:ext cx="10728655" cy="27432"/>
+            <a:off x="731520" y="1298448"/>
+            <a:ext cx="10728655" cy="18288"/>
           </a:xfrm>
           <a:prstGeom prst="rect">
             <a:avLst/>
@@ -6661,8 +6187,8 @@
         </p:nvSpPr>
         <p:spPr>
           <a:xfrm>
-            <a:off x="731520" y="1645920"/>
-            <a:ext cx="5120640" cy="4572000"/>
+            <a:off x="731520" y="1554480"/>
+            <a:ext cx="3337560" cy="3108960"/>
           </a:xfrm>
           <a:prstGeom prst="roundRect">
             <a:avLst/>
@@ -6670,9 +6196,9 @@
           <a:solidFill>
             <a:srgbClr val="F8FAFC"/>
           </a:solidFill>
-          <a:ln w="15240">
+          <a:ln w="13970">
             <a:solidFill>
-              <a:srgbClr val="CBD5E1"/>
+              <a:srgbClr val="D97706"/>
             </a:solidFill>
           </a:ln>
         </p:spPr>
@@ -6706,8 +6232,8 @@
         </p:nvSpPr>
         <p:spPr>
           <a:xfrm>
-            <a:off x="1005840" y="1828800"/>
-            <a:ext cx="4572000" cy="4206240"/>
+            <a:off x="914400" y="1737360"/>
+            <a:ext cx="2971800" cy="2743200"/>
           </a:xfrm>
           <a:prstGeom prst="rect">
             <a:avLst/>
@@ -6721,89 +6247,51 @@
           <a:lstStyle/>
           <a:p>
             <a:pPr>
-              <a:defRPr sz="1700" b="1">
-                <a:solidFill>
-                  <a:srgbClr val="2563EB"/>
-                </a:solidFill>
-              </a:defRPr>
-            </a:pPr>
-            <a:r>
-              <a:t>Matriz de Contingencia (Física vs DBSCAN)</a:t>
-            </a:r>
-          </a:p>
-          <a:p>
+              <a:defRPr sz="1600" b="1">
+                <a:solidFill>
+                  <a:srgbClr val="D97706"/>
+                </a:solidFill>
+              </a:defRPr>
+            </a:pPr>
+            <a:r>
+              <a:t>Conductores (Metales)</a:t>
+            </a:r>
+          </a:p>
+          <a:p>
+            <a:pPr algn="ctr">
+              <a:defRPr sz="3200" b="1">
+                <a:solidFill>
+                  <a:srgbClr val="0F172A"/>
+                </a:solidFill>
+              </a:defRPr>
+            </a:pPr>
+            <a:r>
+              <a:t>35 / 35</a:t>
+            </a:r>
+          </a:p>
+          <a:p>
+            <a:pPr algn="ctr">
+              <a:defRPr sz="1600" b="1">
+                <a:solidFill>
+                  <a:srgbClr val="059669"/>
+                </a:solidFill>
+              </a:defRPr>
+            </a:pPr>
+            <a:r>
+              <a:t>100 % Pureza</a:t>
+            </a:r>
+          </a:p>
+          <a:p>
+            <a:br/>
             <a:pPr>
-              <a:spcAft>
-                <a:spcPts val="600"/>
-              </a:spcAft>
-              <a:defRPr sz="1250">
+              <a:defRPr sz="1100">
                 <a:solidFill>
                   <a:srgbClr val="1E293B"/>
                 </a:solidFill>
               </a:defRPr>
             </a:pPr>
             <a:r>
-              <a:t>• Aislantes reales (10): 10 asignados al Cluster 1 (100 % de pureza). Cero falsos positivos.</a:t>
-            </a:r>
-          </a:p>
-          <a:p>
-            <a:pPr>
-              <a:spcAft>
-                <a:spcPts val="600"/>
-              </a:spcAft>
-              <a:defRPr sz="1250">
-                <a:solidFill>
-                  <a:srgbClr val="1E293B"/>
-                </a:solidFill>
-              </a:defRPr>
-            </a:pPr>
-            <a:r>
-              <a:t>• Conductores reales (35): 35 asignados al Cluster 0 (100 % de pureza). Todos los metales recuperados.</a:t>
-            </a:r>
-          </a:p>
-          <a:p>
-            <a:pPr>
-              <a:spcAft>
-                <a:spcPts val="600"/>
-              </a:spcAft>
-              <a:defRPr sz="1250">
-                <a:solidFill>
-                  <a:srgbClr val="1E293B"/>
-                </a:solidFill>
-              </a:defRPr>
-            </a:pPr>
-            <a:r>
-              <a:t>• Semiconductores reales (12): 10 asignados al Cluster 2 (los semiconductores tecnológicos puros).</a:t>
-            </a:r>
-          </a:p>
-          <a:p>
-            <a:pPr>
-              <a:spcAft>
-                <a:spcPts val="600"/>
-              </a:spcAft>
-              <a:defRPr sz="1250">
-                <a:solidFill>
-                  <a:srgbClr val="1E293B"/>
-                </a:solidFill>
-              </a:defRPr>
-            </a:pPr>
-            <a:r>
-              <a:t>• Casos de frontera (2): El grafito y un semimetal con comportamiento resistivo casi metálico a 300 K se unieron al cluster 0 por densidad.</a:t>
-            </a:r>
-          </a:p>
-          <a:p>
-            <a:pPr>
-              <a:spcAft>
-                <a:spcPts val="600"/>
-              </a:spcAft>
-              <a:defRPr sz="1250">
-                <a:solidFill>
-                  <a:srgbClr val="1E293B"/>
-                </a:solidFill>
-              </a:defRPr>
-            </a:pPr>
-            <a:r>
-              <a:t>• Ruido detectado: 0 materiales aislados; los 57 puntos forman núcleos cohesionados.</a:t>
+              <a:t>Asignados íntegramente al Cluster 0. Cero falsos negativos.</a:t>
             </a:r>
           </a:p>
         </p:txBody>
@@ -6816,8 +6304,8 @@
         </p:nvSpPr>
         <p:spPr>
           <a:xfrm>
-            <a:off x="6217920" y="1645920"/>
-            <a:ext cx="5212080" cy="4572000"/>
+            <a:off x="4434840" y="1554480"/>
+            <a:ext cx="3337560" cy="3108960"/>
           </a:xfrm>
           <a:prstGeom prst="roundRect">
             <a:avLst/>
@@ -6825,9 +6313,9 @@
           <a:solidFill>
             <a:srgbClr val="F8FAFC"/>
           </a:solidFill>
-          <a:ln w="15240">
+          <a:ln w="13970">
             <a:solidFill>
-              <a:srgbClr val="CBD5E1"/>
+              <a:srgbClr val="2563EB"/>
             </a:solidFill>
           </a:ln>
         </p:spPr>
@@ -6861,8 +6349,8 @@
         </p:nvSpPr>
         <p:spPr>
           <a:xfrm>
-            <a:off x="6492240" y="1828800"/>
-            <a:ext cx="4663440" cy="4206240"/>
+            <a:off x="4617720" y="1737360"/>
+            <a:ext cx="2971800" cy="2743200"/>
           </a:xfrm>
           <a:prstGeom prst="rect">
             <a:avLst/>
@@ -6876,89 +6364,263 @@
           <a:lstStyle/>
           <a:p>
             <a:pPr>
-              <a:defRPr sz="1700" b="1">
+              <a:defRPr sz="1600" b="1">
+                <a:solidFill>
+                  <a:srgbClr val="2563EB"/>
+                </a:solidFill>
+              </a:defRPr>
+            </a:pPr>
+            <a:r>
+              <a:t>Aislantes (Dieléctricos)</a:t>
+            </a:r>
+          </a:p>
+          <a:p>
+            <a:pPr algn="ctr">
+              <a:defRPr sz="3200" b="1">
+                <a:solidFill>
+                  <a:srgbClr val="0F172A"/>
+                </a:solidFill>
+              </a:defRPr>
+            </a:pPr>
+            <a:r>
+              <a:t>10 / 10</a:t>
+            </a:r>
+          </a:p>
+          <a:p>
+            <a:pPr algn="ctr">
+              <a:defRPr sz="1600" b="1">
                 <a:solidFill>
                   <a:srgbClr val="059669"/>
                 </a:solidFill>
               </a:defRPr>
             </a:pPr>
             <a:r>
-              <a:t>Métrica de Calidad: Silhouette Score</a:t>
-            </a:r>
-          </a:p>
-          <a:p>
+              <a:t>100 % Pureza</a:t>
+            </a:r>
+          </a:p>
+          <a:p>
+            <a:br/>
             <a:pPr>
-              <a:spcAft>
-                <a:spcPts val="800"/>
-              </a:spcAft>
-              <a:defRPr sz="2200" b="1">
+              <a:defRPr sz="1100">
+                <a:solidFill>
+                  <a:srgbClr val="1E293B"/>
+                </a:solidFill>
+              </a:defRPr>
+            </a:pPr>
+            <a:r>
+              <a:t>Asignados íntegramente al Cluster 1. Coincidencia total con física.</a:t>
+            </a:r>
+          </a:p>
+        </p:txBody>
+      </p:sp>
+      <p:sp>
+        <p:nvSpPr>
+          <p:cNvPr id="9" name="Rounded Rectangle 8"/>
+          <p:cNvSpPr/>
+          <p:nvPr/>
+        </p:nvSpPr>
+        <p:spPr>
+          <a:xfrm>
+            <a:off x="8138160" y="1554480"/>
+            <a:ext cx="3337560" cy="3108960"/>
+          </a:xfrm>
+          <a:prstGeom prst="roundRect">
+            <a:avLst/>
+          </a:prstGeom>
+          <a:solidFill>
+            <a:srgbClr val="F8FAFC"/>
+          </a:solidFill>
+          <a:ln w="13970">
+            <a:solidFill>
+              <a:srgbClr val="059669"/>
+            </a:solidFill>
+          </a:ln>
+        </p:spPr>
+        <p:style>
+          <a:lnRef idx="1">
+            <a:schemeClr val="accent1"/>
+          </a:lnRef>
+          <a:fillRef idx="3">
+            <a:schemeClr val="accent1"/>
+          </a:fillRef>
+          <a:effectRef idx="2">
+            <a:schemeClr val="accent1"/>
+          </a:effectRef>
+          <a:fontRef idx="minor">
+            <a:schemeClr val="lt1"/>
+          </a:fontRef>
+        </p:style>
+        <p:txBody>
+          <a:bodyPr rtlCol="0" anchor="ctr"/>
+          <a:lstStyle/>
+          <a:p>
+            <a:pPr algn="ctr"/>
+          </a:p>
+        </p:txBody>
+      </p:sp>
+      <p:sp>
+        <p:nvSpPr>
+          <p:cNvPr id="10" name="TextBox 9"/>
+          <p:cNvSpPr txBox="1"/>
+          <p:nvPr/>
+        </p:nvSpPr>
+        <p:spPr>
+          <a:xfrm>
+            <a:off x="8321040" y="1737360"/>
+            <a:ext cx="2971800" cy="2743200"/>
+          </a:xfrm>
+          <a:prstGeom prst="rect">
+            <a:avLst/>
+          </a:prstGeom>
+          <a:noFill/>
+        </p:spPr>
+        <p:txBody>
+          <a:bodyPr wrap="square">
+            <a:spAutoFit/>
+          </a:bodyPr>
+          <a:lstStyle/>
+          <a:p>
+            <a:pPr>
+              <a:defRPr sz="1600" b="1">
                 <a:solidFill>
                   <a:srgbClr val="059669"/>
                 </a:solidFill>
               </a:defRPr>
             </a:pPr>
             <a:r>
-              <a:t>Silhouette Score = 0.7858</a:t>
-            </a:r>
-          </a:p>
-          <a:p>
+              <a:t>Semiconductores</a:t>
+            </a:r>
+          </a:p>
+          <a:p>
+            <a:pPr algn="ctr">
+              <a:defRPr sz="3200" b="1">
+                <a:solidFill>
+                  <a:srgbClr val="0F172A"/>
+                </a:solidFill>
+              </a:defRPr>
+            </a:pPr>
+            <a:r>
+              <a:t>10 / 12</a:t>
+            </a:r>
+          </a:p>
+          <a:p>
+            <a:pPr algn="ctr">
+              <a:defRPr sz="1600" b="1">
+                <a:solidFill>
+                  <a:srgbClr val="059669"/>
+                </a:solidFill>
+              </a:defRPr>
+            </a:pPr>
+            <a:r>
+              <a:t>83.3 % Pureza</a:t>
+            </a:r>
+          </a:p>
+          <a:p>
+            <a:br/>
             <a:pPr>
-              <a:spcAft>
-                <a:spcPts val="600"/>
-              </a:spcAft>
-              <a:defRPr sz="1250">
+              <a:defRPr sz="1050">
                 <a:solidFill>
                   <a:srgbClr val="1E293B"/>
                 </a:solidFill>
               </a:defRPr>
             </a:pPr>
             <a:r>
-              <a:t>• Significado matemático: Mide la distancia inter-cluster (b) frente a la dispersión intra-cluster (a): s = (b - a) / max(a, b).</a:t>
-            </a:r>
-          </a:p>
+              <a:t>10 al Cluster 2. 2 semimetales clasificados en cluster 0 por conducción cuasi-metálica.</a:t>
+            </a:r>
+          </a:p>
+        </p:txBody>
+      </p:sp>
+      <p:sp>
+        <p:nvSpPr>
+          <p:cNvPr id="11" name="Rounded Rectangle 10"/>
+          <p:cNvSpPr/>
+          <p:nvPr/>
+        </p:nvSpPr>
+        <p:spPr>
+          <a:xfrm>
+            <a:off x="731520" y="4892040"/>
+            <a:ext cx="10728655" cy="1325880"/>
+          </a:xfrm>
+          <a:prstGeom prst="roundRect">
+            <a:avLst/>
+          </a:prstGeom>
+          <a:solidFill>
+            <a:srgbClr val="F8FAFC"/>
+          </a:solidFill>
+          <a:ln w="13970">
+            <a:solidFill>
+              <a:srgbClr val="CBD5E1"/>
+            </a:solidFill>
+          </a:ln>
+        </p:spPr>
+        <p:style>
+          <a:lnRef idx="1">
+            <a:schemeClr val="accent1"/>
+          </a:lnRef>
+          <a:fillRef idx="3">
+            <a:schemeClr val="accent1"/>
+          </a:fillRef>
+          <a:effectRef idx="2">
+            <a:schemeClr val="accent1"/>
+          </a:effectRef>
+          <a:fontRef idx="minor">
+            <a:schemeClr val="lt1"/>
+          </a:fontRef>
+        </p:style>
+        <p:txBody>
+          <a:bodyPr rtlCol="0" anchor="ctr"/>
+          <a:lstStyle/>
+          <a:p>
+            <a:pPr algn="ctr"/>
+          </a:p>
+        </p:txBody>
+      </p:sp>
+      <p:sp>
+        <p:nvSpPr>
+          <p:cNvPr id="12" name="TextBox 11"/>
+          <p:cNvSpPr txBox="1"/>
+          <p:nvPr/>
+        </p:nvSpPr>
+        <p:spPr>
+          <a:xfrm>
+            <a:off x="1005840" y="4983480"/>
+            <a:ext cx="10149840" cy="1097280"/>
+          </a:xfrm>
+          <a:prstGeom prst="rect">
+            <a:avLst/>
+          </a:prstGeom>
+          <a:noFill/>
+        </p:spPr>
+        <p:txBody>
+          <a:bodyPr wrap="square">
+            <a:spAutoFit/>
+          </a:bodyPr>
+          <a:lstStyle/>
           <a:p>
             <a:pPr>
-              <a:spcAft>
-                <a:spcPts val="600"/>
-              </a:spcAft>
-              <a:defRPr sz="1250">
-                <a:solidFill>
-                  <a:srgbClr val="1E293B"/>
-                </a:solidFill>
-              </a:defRPr>
-            </a:pPr>
-            <a:r>
-              <a:t>• Escala de interpretación: Un valor de 0.7858 (muy cercano a 1.0) certifica una estructura de agrupamiento 'fuerte y robusta' en la literatura científica.</a:t>
+              <a:defRPr sz="1200" b="1">
+                <a:solidFill>
+                  <a:srgbClr val="64748B"/>
+                </a:solidFill>
+              </a:defRPr>
+            </a:pPr>
+            <a:r>
+              <a:t>Métrica Matemática Complementaria (No Supervisada):</a:t>
             </a:r>
           </a:p>
           <a:p>
             <a:pPr>
-              <a:spcAft>
-                <a:spcPts val="600"/>
-              </a:spcAft>
-              <a:defRPr sz="1250">
-                <a:solidFill>
-                  <a:srgbClr val="1E293B"/>
-                </a:solidFill>
-              </a:defRPr>
-            </a:pPr>
-            <a:r>
-              <a:t>• Independencia: La silueta evalúa los grupos sin usar etiquetas reales, confirmando la validez no supervisada.</a:t>
-            </a:r>
-          </a:p>
-          <a:p>
-            <a:pPr>
-              <a:spcAft>
-                <a:spcPts val="600"/>
-              </a:spcAft>
-              <a:defRPr sz="1250">
-                <a:solidFill>
-                  <a:srgbClr val="1E293B"/>
-                </a:solidFill>
-              </a:defRPr>
-            </a:pPr>
-            <a:r>
-              <a:t>• Conclusión de calidad: La separación entre aislantes, conductores y semiconductores es matemáticamente contundente.</a:t>
+              <a:spcBef>
+                <a:spcPts val="400"/>
+              </a:spcBef>
+              <a:defRPr sz="1600" b="1">
+                <a:solidFill>
+                  <a:srgbClr val="059669"/>
+                </a:solidFill>
+              </a:defRPr>
+            </a:pPr>
+            <a:r>
+              <a:t>Silhouette Score = 0.7858   (Excelente separación y cohesión espacial según scikit-learn)</a:t>
             </a:r>
           </a:p>
         </p:txBody>
@@ -6989,8 +6651,8 @@
         </p:nvSpPr>
         <p:spPr>
           <a:xfrm>
-            <a:off x="731520" y="365760"/>
-            <a:ext cx="10698480" cy="365760"/>
+            <a:off x="731520" y="320040"/>
+            <a:ext cx="10698480" cy="320040"/>
           </a:xfrm>
           <a:prstGeom prst="rect">
             <a:avLst/>
@@ -6998,20 +6660,20 @@
           <a:noFill/>
         </p:spPr>
         <p:txBody>
-          <a:bodyPr wrap="square">
+          <a:bodyPr wrap="none">
             <a:spAutoFit/>
           </a:bodyPr>
           <a:lstStyle/>
           <a:p>
             <a:pPr>
-              <a:defRPr sz="1100" b="1">
+              <a:defRPr sz="1050" b="1">
                 <a:solidFill>
                   <a:srgbClr val="059669"/>
                 </a:solidFill>
               </a:defRPr>
             </a:pPr>
             <a:r>
-              <a:t>CPIA · APRENDIZAJE NO SUPERVISADO</a:t>
+              <a:t>CPIA · CLUSTERING EN FÍSICA</a:t>
             </a:r>
           </a:p>
         </p:txBody>
@@ -7024,8 +6686,8 @@
         </p:nvSpPr>
         <p:spPr>
           <a:xfrm>
-            <a:off x="731520" y="685800"/>
-            <a:ext cx="10698480" cy="731520"/>
+            <a:off x="731520" y="621792"/>
+            <a:ext cx="10698480" cy="640080"/>
           </a:xfrm>
           <a:prstGeom prst="rect">
             <a:avLst/>
@@ -7033,20 +6695,20 @@
           <a:noFill/>
         </p:spPr>
         <p:txBody>
-          <a:bodyPr wrap="square">
+          <a:bodyPr wrap="none">
             <a:spAutoFit/>
           </a:bodyPr>
           <a:lstStyle/>
           <a:p>
             <a:pPr>
-              <a:defRPr sz="2400" b="1">
+              <a:defRPr sz="2200" b="1">
                 <a:solidFill>
                   <a:srgbClr val="0F172A"/>
                 </a:solidFill>
               </a:defRPr>
             </a:pPr>
             <a:r>
-              <a:t>Conclusiones y Defensa ante Preguntas del Tribunal</a:t>
+              <a:t>Conclusiones</a:t>
             </a:r>
           </a:p>
         </p:txBody>
@@ -7059,8 +6721,8 @@
         </p:nvSpPr>
         <p:spPr>
           <a:xfrm>
-            <a:off x="731520" y="1417320"/>
-            <a:ext cx="10728655" cy="27432"/>
+            <a:off x="731520" y="1298448"/>
+            <a:ext cx="10728655" cy="18288"/>
           </a:xfrm>
           <a:prstGeom prst="rect">
             <a:avLst/>
@@ -7104,8 +6766,8 @@
         </p:nvSpPr>
         <p:spPr>
           <a:xfrm>
-            <a:off x="731520" y="1645920"/>
-            <a:ext cx="5120640" cy="4572000"/>
+            <a:off x="1097280" y="1645920"/>
+            <a:ext cx="9997135" cy="4480560"/>
           </a:xfrm>
           <a:prstGeom prst="roundRect">
             <a:avLst/>
@@ -7113,9 +6775,9 @@
           <a:solidFill>
             <a:srgbClr val="F8FAFC"/>
           </a:solidFill>
-          <a:ln w="15240">
+          <a:ln w="13970">
             <a:solidFill>
-              <a:srgbClr val="CBD5E1"/>
+              <a:srgbClr val="059669"/>
             </a:solidFill>
           </a:ln>
         </p:spPr>
@@ -7149,8 +6811,8 @@
         </p:nvSpPr>
         <p:spPr>
           <a:xfrm>
-            <a:off x="1005840" y="1828800"/>
-            <a:ext cx="4572000" cy="4206240"/>
+            <a:off x="1463040" y="1920240"/>
+            <a:ext cx="9235440" cy="3931920"/>
           </a:xfrm>
           <a:prstGeom prst="rect">
             <a:avLst/>
@@ -7164,184 +6826,77 @@
           <a:lstStyle/>
           <a:p>
             <a:pPr>
-              <a:defRPr sz="1800" b="1">
+              <a:spcAft>
+                <a:spcPts val="1400"/>
+              </a:spcAft>
+              <a:defRPr sz="2000" b="1">
                 <a:solidFill>
                   <a:srgbClr val="0F172A"/>
                 </a:solidFill>
               </a:defRPr>
             </a:pPr>
             <a:r>
-              <a:t>Conclusiones Principales</a:t>
+              <a:t>Puntos Clave del Proyecto</a:t>
             </a:r>
           </a:p>
           <a:p>
             <a:pPr>
               <a:spcAft>
-                <a:spcPts val="1000"/>
+                <a:spcPts val="1200"/>
               </a:spcAft>
-              <a:defRPr sz="1300">
+              <a:defRPr sz="1450">
                 <a:solidFill>
                   <a:srgbClr val="1E293B"/>
                 </a:solidFill>
               </a:defRPr>
             </a:pPr>
             <a:r>
-              <a:t>• Validación física del clustering: DBSCAN ha demostrado ser capaz de inferir la física cuántica de bandas únicamente a partir de la densidad en datos experimentales macroscópicos.</a:t>
+              <a:t>✔  Física de bandas sin supervisión:  DBSCAN descubre de manera autónoma las 3 fases de conducción (conductores, aislantes y semiconductores) a partir de propiedades macroscópicas.</a:t>
             </a:r>
           </a:p>
           <a:p>
             <a:pPr>
               <a:spcAft>
-                <a:spcPts val="1000"/>
+                <a:spcPts val="1200"/>
               </a:spcAft>
-              <a:defRPr sz="1300">
+              <a:defRPr sz="1450">
                 <a:solidFill>
                   <a:srgbClr val="1E293B"/>
                 </a:solidFill>
               </a:defRPr>
             </a:pPr>
             <a:r>
-              <a:t>• Superioridad frente a métodos rígidos: La capacidad de manejar varianzas dispares permitió agrupar metales hiperdensos y aislantes extendidos en el mismo modelo.</a:t>
+              <a:t>✔  Inmune a densidades dispares:  Supera a K-Means agrupando simultáneamente la ultra-densidad de los metales y la dispersión de 12 órdenes de magnitud de los aislantes.</a:t>
             </a:r>
           </a:p>
           <a:p>
             <a:pPr>
               <a:spcAft>
-                <a:spcPts val="1000"/>
+                <a:spcPts val="1200"/>
               </a:spcAft>
-              <a:defRPr sz="1300">
+              <a:defRPr sz="1450">
                 <a:solidFill>
                   <a:srgbClr val="1E293B"/>
                 </a:solidFill>
               </a:defRPr>
             </a:pPr>
             <a:r>
-              <a:t>• Pipeline limpio y reproducible: Estandarización manual rigurosa, ejecución nativa con scikit-learn y reproducibilidad total en GitHub.</a:t>
-            </a:r>
-          </a:p>
-        </p:txBody>
-      </p:sp>
-      <p:sp>
-        <p:nvSpPr>
-          <p:cNvPr id="7" name="Rounded Rectangle 6"/>
-          <p:cNvSpPr/>
-          <p:nvPr/>
-        </p:nvSpPr>
-        <p:spPr>
-          <a:xfrm>
-            <a:off x="6217920" y="1645920"/>
-            <a:ext cx="5212080" cy="4572000"/>
-          </a:xfrm>
-          <a:prstGeom prst="roundRect">
-            <a:avLst/>
-          </a:prstGeom>
-          <a:solidFill>
-            <a:srgbClr val="F8FAFC"/>
-          </a:solidFill>
-          <a:ln w="15240">
-            <a:solidFill>
-              <a:srgbClr val="CBD5E1"/>
-            </a:solidFill>
-          </a:ln>
-        </p:spPr>
-        <p:style>
-          <a:lnRef idx="1">
-            <a:schemeClr val="accent1"/>
-          </a:lnRef>
-          <a:fillRef idx="3">
-            <a:schemeClr val="accent1"/>
-          </a:fillRef>
-          <a:effectRef idx="2">
-            <a:schemeClr val="accent1"/>
-          </a:effectRef>
-          <a:fontRef idx="minor">
-            <a:schemeClr val="lt1"/>
-          </a:fontRef>
-        </p:style>
-        <p:txBody>
-          <a:bodyPr rtlCol="0" anchor="ctr"/>
-          <a:lstStyle/>
-          <a:p>
-            <a:pPr algn="ctr"/>
-          </a:p>
-        </p:txBody>
-      </p:sp>
-      <p:sp>
-        <p:nvSpPr>
-          <p:cNvPr id="8" name="TextBox 7"/>
-          <p:cNvSpPr txBox="1"/>
-          <p:nvPr/>
-        </p:nvSpPr>
-        <p:spPr>
-          <a:xfrm>
-            <a:off x="6492240" y="1828800"/>
-            <a:ext cx="4663440" cy="4206240"/>
-          </a:xfrm>
-          <a:prstGeom prst="rect">
-            <a:avLst/>
-          </a:prstGeom>
-          <a:noFill/>
-        </p:spPr>
-        <p:txBody>
-          <a:bodyPr wrap="square">
-            <a:spAutoFit/>
-          </a:bodyPr>
-          <a:lstStyle/>
-          <a:p>
-            <a:pPr>
-              <a:defRPr sz="1800" b="1">
-                <a:solidFill>
-                  <a:srgbClr val="D97706"/>
-                </a:solidFill>
-              </a:defRPr>
-            </a:pPr>
-            <a:r>
-              <a:t>Preguntas Probables del Tribunal</a:t>
+              <a:t>✔  Variables óptimas:  La escala logarítmica log₁₀(ρ) y el coeficiente térmico cuántico α bastan para separar completamente los regímenes de transporte.</a:t>
             </a:r>
           </a:p>
           <a:p>
             <a:pPr>
               <a:spcAft>
-                <a:spcPts val="600"/>
+                <a:spcPts val="1200"/>
               </a:spcAft>
-              <a:defRPr sz="1200">
+              <a:defRPr sz="1450">
                 <a:solidFill>
                   <a:srgbClr val="1E293B"/>
                 </a:solidFill>
               </a:defRPr>
             </a:pPr>
             <a:r>
-              <a:t>• ¿Qué ocurre si variamos epsilon (ε)? Si ε &lt; 0.4, el cluster de aislantes se fragmenta en pedazos y aparece ruido. Si ε &gt; 1.0, los semiconductores se fusionan con los metales en un único macro-cluster.</a:t>
-            </a:r>
-          </a:p>
-          <a:p>
-            <a:pPr>
-              <a:spcAft>
-                <a:spcPts val="600"/>
-              </a:spcAft>
-              <a:defRPr sz="1200">
-                <a:solidFill>
-                  <a:srgbClr val="1E293B"/>
-                </a:solidFill>
-              </a:defRPr>
-            </a:pPr>
-            <a:r>
-              <a:t>• ¿Por qué no usar conductividad σ directa? Porque la escala lineal colapsa el 99% de los puntos en el origen (0 S/m). La escala logarítmica es la única físicamente sensata.</a:t>
-            </a:r>
-          </a:p>
-          <a:p>
-            <a:pPr>
-              <a:spcAft>
-                <a:spcPts val="600"/>
-              </a:spcAft>
-              <a:defRPr sz="1200">
-                <a:solidFill>
-                  <a:srgbClr val="1E293B"/>
-                </a:solidFill>
-              </a:defRPr>
-            </a:pPr>
-            <a:r>
-              <a:t>• ¿Se podría aplicar a superconductores? A temperaturas críticas Tc, ρ cae a cero exacto, generando una singularidad logarítmica que requeriría tratar la transición de fase como un estado límite.</a:t>
+              <a:t>✔  Validación rotunda:  100% de pureza en conductores y aislantes con Silhouette Score = 0.7858.</a:t>
             </a:r>
           </a:p>
         </p:txBody>

--- a/problemas/5_Materials_Uriel/presentacion_materiales_uriel.pptx
+++ b/problemas/5_Materials_Uriel/presentacion_materiales_uriel.pptx
@@ -584,22 +584,27 @@
           </a:p>
           <a:p>
             <a:r>
-              <a:t>Definimos el problema físico: las propiedades de transporte revelan directamente la estructura de bandas.</a:t>
-            </a:r>
-          </a:p>
-          <a:p>
-            <a:r>
-              <a:t>- Metales: bandas solapadas, electrones libres, alfa positivo por choques con fonones.</a:t>
-            </a:r>
-          </a:p>
-          <a:p>
-            <a:r>
-              <a:t>- Semiconductores: bandgap moderado (~1 eV), alfa fuertemente negativo por activación térmica según Boltzmann.</a:t>
-            </a:r>
-          </a:p>
-          <a:p>
-            <a:r>
-              <a:t>- Aislantes: bandgap colosal (&gt; 5 eV), sin portadores libres a 300 K, alfa nulo y resistividad extrema.</a:t>
+              <a:t>Definimos el problema físico a partir de las ecuaciones de transporte en LaTeX:</a:t>
+            </a:r>
+          </a:p>
+          <a:p>
+            <a:r>
+              <a:t>- La variación térmica de la resistividad rho(T) y su derivada térmica alfa.</a:t>
+            </a:r>
+          </a:p>
+          <a:p>
+            <a:r>
+              <a:t>- Metales: bandas solapadas, electrones libres, alfa positivo por choques con fonones de la red.</a:t>
+            </a:r>
+          </a:p>
+          <a:p>
+            <a:r>
+              <a:t>- Semiconductores: bandgap moderado, alfa negativo por activación térmica exponencial según Boltzmann.</a:t>
+            </a:r>
+          </a:p>
+          <a:p>
+            <a:r>
+              <a:t>- Aislantes: bandgap colosal (&gt; 5 eV), sin portadores libres a 300 K, alfa nulo y resistividad gigantesca.</a:t>
             </a:r>
           </a:p>
         </p:txBody>
@@ -834,7 +839,7 @@
           </a:p>
           <a:p>
             <a:r>
-              <a:t>En metodología: solo las fórmulas esenciales.</a:t>
+              <a:t>En metodología: fórmulas en LaTeX claras y limpias.</a:t>
             </a:r>
           </a:p>
           <a:p>
@@ -1034,12 +1039,12 @@
           </a:p>
           <a:p>
             <a:r>
-              <a:t>- En semiconductores, los 10 materiales tecnológicos puros (silicio, germanio, arseniuro de galio) forman el cluster 2. Los dos restantes son semimetales cuyo transporte a 300 K es prácticamente metálico.</a:t>
-            </a:r>
-          </a:p>
-          <a:p>
-            <a:r>
-              <a:t>Y como métrica matemática no supervisada, el Silhouette Score arroja 0.7858, confirmando la solidez del agrupamiento.</a:t>
+              <a:t>- En semiconductores, los 10 materiales tecnológicos puros forman el cluster 2. Los dos restantes son semimetales cuyo transporte a 300 K es prácticamente metálico.</a:t>
+            </a:r>
+          </a:p>
+          <a:p>
+            <a:r>
+              <a:t>Y como métrica matemática complementaria, la fórmula en LaTeX de Silhouette Score arroja 0.7858.</a:t>
             </a:r>
           </a:p>
         </p:txBody>
@@ -4155,11 +4160,11 @@
             <a:avLst/>
           </a:prstGeom>
           <a:solidFill>
-            <a:srgbClr val="F8FAFC"/>
+            <a:srgbClr val="FFFFFF"/>
           </a:solidFill>
-          <a:ln w="13970">
+          <a:ln w="19050">
             <a:solidFill>
-              <a:srgbClr val="059669"/>
+              <a:srgbClr val="000000"/>
             </a:solidFill>
           </a:ln>
         </p:spPr>
@@ -4210,7 +4215,7 @@
             <a:pPr>
               <a:defRPr sz="1300" b="1">
                 <a:solidFill>
-                  <a:srgbClr val="059669"/>
+                  <a:srgbClr val="000000"/>
                 </a:solidFill>
               </a:defRPr>
             </a:pPr>
@@ -4245,7 +4250,7 @@
             <a:pPr>
               <a:defRPr sz="3600" b="1">
                 <a:solidFill>
-                  <a:srgbClr val="0F172A"/>
+                  <a:srgbClr val="000000"/>
                 </a:solidFill>
               </a:defRPr>
             </a:pPr>
@@ -4280,7 +4285,7 @@
             <a:pPr>
               <a:defRPr sz="1700">
                 <a:solidFill>
-                  <a:srgbClr val="334155"/>
+                  <a:srgbClr val="000000"/>
                 </a:solidFill>
               </a:defRPr>
             </a:pPr>
@@ -4315,7 +4320,7 @@
             <a:pPr>
               <a:defRPr sz="1600" b="1">
                 <a:solidFill>
-                  <a:srgbClr val="0F172A"/>
+                  <a:srgbClr val="000000"/>
                 </a:solidFill>
               </a:defRPr>
             </a:pPr>
@@ -4327,7 +4332,7 @@
             <a:pPr>
               <a:defRPr sz="1400">
                 <a:solidFill>
-                  <a:srgbClr val="64748B"/>
+                  <a:srgbClr val="000000"/>
                 </a:solidFill>
               </a:defRPr>
             </a:pPr>
@@ -4363,7 +4368,7 @@
         </p:nvSpPr>
         <p:spPr>
           <a:xfrm>
-            <a:off x="731520" y="320040"/>
+            <a:off x="731520" y="365760"/>
             <a:ext cx="10698480" cy="320040"/>
           </a:xfrm>
           <a:prstGeom prst="rect">
@@ -4380,12 +4385,12 @@
             <a:pPr>
               <a:defRPr sz="1050" b="1">
                 <a:solidFill>
-                  <a:srgbClr val="059669"/>
+                  <a:srgbClr val="000000"/>
                 </a:solidFill>
               </a:defRPr>
             </a:pPr>
             <a:r>
-              <a:t>CPIA · CLUSTERING EN FÍSICA</a:t>
+              <a:t>CPIA · APRENDIZAJE NO SUPERVISADO</a:t>
             </a:r>
           </a:p>
         </p:txBody>
@@ -4398,7 +4403,7 @@
         </p:nvSpPr>
         <p:spPr>
           <a:xfrm>
-            <a:off x="731520" y="621792"/>
+            <a:off x="731520" y="685800"/>
             <a:ext cx="10698480" cy="640080"/>
           </a:xfrm>
           <a:prstGeom prst="rect">
@@ -4413,9 +4418,9 @@
           <a:lstStyle/>
           <a:p>
             <a:pPr>
-              <a:defRPr sz="2200" b="1">
-                <a:solidFill>
-                  <a:srgbClr val="0F172A"/>
+              <a:defRPr sz="2300" b="1">
+                <a:solidFill>
+                  <a:srgbClr val="000000"/>
                 </a:solidFill>
               </a:defRPr>
             </a:pPr>
@@ -4427,24 +4432,24 @@
       </p:sp>
       <p:sp>
         <p:nvSpPr>
-          <p:cNvPr id="4" name="Rectangle 3"/>
+          <p:cNvPr id="4" name="Rounded Rectangle 3"/>
           <p:cNvSpPr/>
           <p:nvPr/>
         </p:nvSpPr>
         <p:spPr>
           <a:xfrm>
-            <a:off x="731520" y="1298448"/>
-            <a:ext cx="10728655" cy="18288"/>
-          </a:xfrm>
-          <a:prstGeom prst="rect">
+            <a:off x="731520" y="1417320"/>
+            <a:ext cx="10728655" cy="1234440"/>
+          </a:xfrm>
+          <a:prstGeom prst="roundRect">
             <a:avLst/>
           </a:prstGeom>
           <a:solidFill>
-            <a:srgbClr val="CBD5E1"/>
+            <a:srgbClr val="FFFFFF"/>
           </a:solidFill>
-          <a:ln>
+          <a:ln w="19050">
             <a:solidFill>
-              <a:srgbClr val="CBD5E1"/>
+              <a:srgbClr val="000000"/>
             </a:solidFill>
           </a:ln>
         </p:spPr>
@@ -4472,59 +4477,14 @@
       </p:sp>
       <p:sp>
         <p:nvSpPr>
-          <p:cNvPr id="5" name="Rounded Rectangle 4"/>
-          <p:cNvSpPr/>
-          <p:nvPr/>
-        </p:nvSpPr>
-        <p:spPr>
-          <a:xfrm>
-            <a:off x="731520" y="1463040"/>
-            <a:ext cx="10728655" cy="1188720"/>
-          </a:xfrm>
-          <a:prstGeom prst="roundRect">
-            <a:avLst/>
-          </a:prstGeom>
-          <a:solidFill>
-            <a:srgbClr val="F8FAFC"/>
-          </a:solidFill>
-          <a:ln w="13970">
-            <a:solidFill>
-              <a:srgbClr val="2563EB"/>
-            </a:solidFill>
-          </a:ln>
-        </p:spPr>
-        <p:style>
-          <a:lnRef idx="1">
-            <a:schemeClr val="accent1"/>
-          </a:lnRef>
-          <a:fillRef idx="3">
-            <a:schemeClr val="accent1"/>
-          </a:fillRef>
-          <a:effectRef idx="2">
-            <a:schemeClr val="accent1"/>
-          </a:effectRef>
-          <a:fontRef idx="minor">
-            <a:schemeClr val="lt1"/>
-          </a:fontRef>
-        </p:style>
-        <p:txBody>
-          <a:bodyPr rtlCol="0" anchor="ctr"/>
-          <a:lstStyle/>
-          <a:p>
-            <a:pPr algn="ctr"/>
-          </a:p>
-        </p:txBody>
-      </p:sp>
-      <p:sp>
-        <p:nvSpPr>
-          <p:cNvPr id="6" name="TextBox 5"/>
+          <p:cNvPr id="5" name="TextBox 4"/>
           <p:cNvSpPr txBox="1"/>
           <p:nvPr/>
         </p:nvSpPr>
         <p:spPr>
           <a:xfrm>
-            <a:off x="914400" y="1508760"/>
-            <a:ext cx="10332720" cy="1097280"/>
+            <a:off x="914400" y="1463040"/>
+            <a:ext cx="10332720" cy="320040"/>
           </a:xfrm>
           <a:prstGeom prst="rect">
             <a:avLst/>
@@ -4532,7 +4492,7 @@
           <a:noFill/>
         </p:spPr>
         <p:txBody>
-          <a:bodyPr wrap="square">
+          <a:bodyPr wrap="none">
             <a:spAutoFit/>
           </a:bodyPr>
           <a:lstStyle/>
@@ -4540,7 +4500,7 @@
             <a:pPr>
               <a:defRPr sz="1200" b="1">
                 <a:solidFill>
-                  <a:srgbClr val="2563EB"/>
+                  <a:srgbClr val="000000"/>
                 </a:solidFill>
               </a:defRPr>
             </a:pPr>
@@ -4548,23 +4508,32 @@
               <a:t>Ecuaciones Macroscópicas de Transporte Eléctrico:</a:t>
             </a:r>
           </a:p>
-          <a:p>
-            <a:pPr>
-              <a:spcBef>
-                <a:spcPts val="400"/>
-              </a:spcBef>
-              <a:defRPr sz="1500" b="1">
-                <a:solidFill>
-                  <a:srgbClr val="0F172A"/>
-                </a:solidFill>
-              </a:defRPr>
-            </a:pPr>
-            <a:r>
-              <a:t>1. Variación térmica:  ρ(T) = ρ₀ · [1 + α·(T - T₀)]       2. Coeficiente térmico:  α = (1 / ρ₀) · (dρ / dT)₃₀₀K</a:t>
-            </a:r>
-          </a:p>
-        </p:txBody>
-      </p:sp>
+        </p:txBody>
+      </p:sp>
+      <p:pic>
+        <p:nvPicPr>
+          <p:cNvPr id="6" name="Picture 5" descr="formula_transporte.png"/>
+          <p:cNvPicPr>
+            <a:picLocks noChangeAspect="1"/>
+          </p:cNvPicPr>
+          <p:nvPr/>
+        </p:nvPicPr>
+        <p:blipFill>
+          <a:blip r:embed="rId2"/>
+          <a:stretch>
+            <a:fillRect/>
+          </a:stretch>
+        </p:blipFill>
+        <p:spPr>
+          <a:xfrm>
+            <a:off x="1645920" y="1783080"/>
+            <a:ext cx="8869680" cy="1424232"/>
+          </a:xfrm>
+          <a:prstGeom prst="rect">
+            <a:avLst/>
+          </a:prstGeom>
+        </p:spPr>
+      </p:pic>
       <p:pic>
         <p:nvPicPr>
           <p:cNvPr id="7" name="Picture 6" descr="esquema_bandas_materiales.png"/>
@@ -4574,7 +4543,7 @@
           <p:nvPr/>
         </p:nvPicPr>
         <p:blipFill>
-          <a:blip r:embed="rId2"/>
+          <a:blip r:embed="rId3"/>
           <a:stretch>
             <a:fillRect/>
           </a:stretch>
@@ -4615,7 +4584,7 @@
         </p:nvSpPr>
         <p:spPr>
           <a:xfrm>
-            <a:off x="731520" y="320040"/>
+            <a:off x="731520" y="365760"/>
             <a:ext cx="10698480" cy="320040"/>
           </a:xfrm>
           <a:prstGeom prst="rect">
@@ -4632,12 +4601,12 @@
             <a:pPr>
               <a:defRPr sz="1050" b="1">
                 <a:solidFill>
-                  <a:srgbClr val="059669"/>
+                  <a:srgbClr val="000000"/>
                 </a:solidFill>
               </a:defRPr>
             </a:pPr>
             <a:r>
-              <a:t>CPIA · CLUSTERING EN FÍSICA</a:t>
+              <a:t>CPIA · APRENDIZAJE NO SUPERVISADO</a:t>
             </a:r>
           </a:p>
         </p:txBody>
@@ -4650,7 +4619,7 @@
         </p:nvSpPr>
         <p:spPr>
           <a:xfrm>
-            <a:off x="731520" y="621792"/>
+            <a:off x="731520" y="685800"/>
             <a:ext cx="10698480" cy="640080"/>
           </a:xfrm>
           <a:prstGeom prst="rect">
@@ -4665,9 +4634,9 @@
           <a:lstStyle/>
           <a:p>
             <a:pPr>
-              <a:defRPr sz="2200" b="1">
-                <a:solidFill>
-                  <a:srgbClr val="0F172A"/>
+              <a:defRPr sz="2300" b="1">
+                <a:solidFill>
+                  <a:srgbClr val="000000"/>
                 </a:solidFill>
               </a:defRPr>
             </a:pPr>
@@ -4679,24 +4648,24 @@
       </p:sp>
       <p:sp>
         <p:nvSpPr>
-          <p:cNvPr id="4" name="Rectangle 3"/>
+          <p:cNvPr id="4" name="Rounded Rectangle 3"/>
           <p:cNvSpPr/>
           <p:nvPr/>
         </p:nvSpPr>
         <p:spPr>
           <a:xfrm>
-            <a:off x="731520" y="1298448"/>
-            <a:ext cx="10728655" cy="18288"/>
-          </a:xfrm>
-          <a:prstGeom prst="rect">
+            <a:off x="731520" y="1463040"/>
+            <a:ext cx="4206240" cy="4846320"/>
+          </a:xfrm>
+          <a:prstGeom prst="roundRect">
             <a:avLst/>
           </a:prstGeom>
           <a:solidFill>
-            <a:srgbClr val="CBD5E1"/>
+            <a:srgbClr val="FFFFFF"/>
           </a:solidFill>
-          <a:ln>
+          <a:ln w="19050">
             <a:solidFill>
-              <a:srgbClr val="CBD5E1"/>
+              <a:srgbClr val="000000"/>
             </a:solidFill>
           </a:ln>
         </p:spPr>
@@ -4724,59 +4693,14 @@
       </p:sp>
       <p:sp>
         <p:nvSpPr>
-          <p:cNvPr id="5" name="Rounded Rectangle 4"/>
-          <p:cNvSpPr/>
-          <p:nvPr/>
-        </p:nvSpPr>
-        <p:spPr>
-          <a:xfrm>
-            <a:off x="731520" y="1508760"/>
-            <a:ext cx="4023360" cy="4754880"/>
-          </a:xfrm>
-          <a:prstGeom prst="roundRect">
-            <a:avLst/>
-          </a:prstGeom>
-          <a:solidFill>
-            <a:srgbClr val="F8FAFC"/>
-          </a:solidFill>
-          <a:ln w="13970">
-            <a:solidFill>
-              <a:srgbClr val="CBD5E1"/>
-            </a:solidFill>
-          </a:ln>
-        </p:spPr>
-        <p:style>
-          <a:lnRef idx="1">
-            <a:schemeClr val="accent1"/>
-          </a:lnRef>
-          <a:fillRef idx="3">
-            <a:schemeClr val="accent1"/>
-          </a:fillRef>
-          <a:effectRef idx="2">
-            <a:schemeClr val="accent1"/>
-          </a:effectRef>
-          <a:fontRef idx="minor">
-            <a:schemeClr val="lt1"/>
-          </a:fontRef>
-        </p:style>
-        <p:txBody>
-          <a:bodyPr rtlCol="0" anchor="ctr"/>
-          <a:lstStyle/>
-          <a:p>
-            <a:pPr algn="ctr"/>
-          </a:p>
-        </p:txBody>
-      </p:sp>
-      <p:sp>
-        <p:nvSpPr>
-          <p:cNvPr id="6" name="TextBox 5"/>
+          <p:cNvPr id="5" name="TextBox 4"/>
           <p:cNvSpPr txBox="1"/>
           <p:nvPr/>
         </p:nvSpPr>
         <p:spPr>
           <a:xfrm>
-            <a:off x="914400" y="1645920"/>
-            <a:ext cx="3657600" cy="4389120"/>
+            <a:off x="914400" y="1600200"/>
+            <a:ext cx="3840480" cy="4572000"/>
           </a:xfrm>
           <a:prstGeom prst="rect">
             <a:avLst/>
@@ -4792,94 +4716,19 @@
             <a:pPr>
               <a:defRPr sz="1700" b="1">
                 <a:solidFill>
-                  <a:srgbClr val="0F172A"/>
+                  <a:srgbClr val="000000"/>
                 </a:solidFill>
               </a:defRPr>
             </a:pPr>
             <a:r>
               <a:t>¿Cómo clasificar sin etiquetas?</a:t>
-            </a:r>
-          </a:p>
-          <a:p>
-            <a:pPr>
-              <a:spcAft>
-                <a:spcPts val="800"/>
-              </a:spcAft>
-              <a:defRPr sz="1200">
-                <a:solidFill>
-                  <a:srgbClr val="1E293B"/>
-                </a:solidFill>
-              </a:defRPr>
-            </a:pPr>
-            <a:r>
-              <a:t>• 57 Materiales reales: Metales puros, aleaciones, semiconductores y aislantes.</a:t>
-            </a:r>
-          </a:p>
-          <a:p>
-            <a:pPr>
-              <a:spcAft>
-                <a:spcPts val="800"/>
-              </a:spcAft>
-              <a:defRPr sz="1200">
-                <a:solidFill>
-                  <a:srgbClr val="1E293B"/>
-                </a:solidFill>
-              </a:defRPr>
-            </a:pPr>
-            <a:r>
-              <a:t>• 30 órdenes de magnitud: De metales (~10⁻⁸ Ω·m) a teflón (&gt; 10²² Ω·m).</a:t>
-            </a:r>
-          </a:p>
-          <a:p>
-            <a:pPr>
-              <a:spcAft>
-                <a:spcPts val="800"/>
-              </a:spcAft>
-              <a:defRPr sz="1200">
-                <a:solidFill>
-                  <a:srgbClr val="1E293B"/>
-                </a:solidFill>
-              </a:defRPr>
-            </a:pPr>
-            <a:r>
-              <a:t>• Compresión logarítmica: x₁ = log₁₀(ρ₃₀₀K) evita el colapso numérico.</a:t>
-            </a:r>
-          </a:p>
-          <a:p>
-            <a:pPr>
-              <a:spcAft>
-                <a:spcPts val="800"/>
-              </a:spcAft>
-              <a:defRPr sz="1200">
-                <a:solidFill>
-                  <a:srgbClr val="1E293B"/>
-                </a:solidFill>
-              </a:defRPr>
-            </a:pPr>
-            <a:r>
-              <a:t>• Firma cuántica: x₂ = α (diferencia el origen microscópico).</a:t>
-            </a:r>
-          </a:p>
-          <a:p>
-            <a:pPr>
-              <a:spcAft>
-                <a:spcPts val="800"/>
-              </a:spcAft>
-              <a:defRPr sz="1200">
-                <a:solidFill>
-                  <a:srgbClr val="1E293B"/>
-                </a:solidFill>
-              </a:defRPr>
-            </a:pPr>
-            <a:r>
-              <a:t>• Objetivo no supervisado: Identificar las fases de forma autónoma por densidad.</a:t>
             </a:r>
           </a:p>
         </p:txBody>
       </p:sp>
       <p:pic>
         <p:nvPicPr>
-          <p:cNvPr id="7" name="Picture 6" descr="distribucion_escala_rho.png"/>
+          <p:cNvPr id="6" name="Picture 5" descr="formula_coordenadas.png"/>
           <p:cNvPicPr>
             <a:picLocks noChangeAspect="1"/>
           </p:cNvPicPr>
@@ -4893,8 +4742,130 @@
         </p:blipFill>
         <p:spPr>
           <a:xfrm>
-            <a:off x="4937760" y="1783080"/>
-            <a:ext cx="6492240" cy="2426393"/>
+            <a:off x="914400" y="2103120"/>
+            <a:ext cx="3749039" cy="670931"/>
+          </a:xfrm>
+          <a:prstGeom prst="rect">
+            <a:avLst/>
+          </a:prstGeom>
+        </p:spPr>
+      </p:pic>
+      <p:sp>
+        <p:nvSpPr>
+          <p:cNvPr id="7" name="TextBox 6"/>
+          <p:cNvSpPr txBox="1"/>
+          <p:nvPr/>
+        </p:nvSpPr>
+        <p:spPr>
+          <a:xfrm>
+            <a:off x="914400" y="2834640"/>
+            <a:ext cx="3840480" cy="3383280"/>
+          </a:xfrm>
+          <a:prstGeom prst="rect">
+            <a:avLst/>
+          </a:prstGeom>
+          <a:noFill/>
+        </p:spPr>
+        <p:txBody>
+          <a:bodyPr wrap="square">
+            <a:spAutoFit/>
+          </a:bodyPr>
+          <a:lstStyle/>
+          <a:p>
+            <a:pPr>
+              <a:spcAft>
+                <a:spcPts val="700"/>
+              </a:spcAft>
+              <a:defRPr sz="1150">
+                <a:solidFill>
+                  <a:srgbClr val="000000"/>
+                </a:solidFill>
+              </a:defRPr>
+            </a:pPr>
+            <a:r>
+              <a:t>• 57 Materiales reales: Metales puros, aleaciones, semiconductores y dieléctricos.</a:t>
+            </a:r>
+          </a:p>
+          <a:p>
+            <a:pPr>
+              <a:spcAft>
+                <a:spcPts val="700"/>
+              </a:spcAft>
+              <a:defRPr sz="1150">
+                <a:solidFill>
+                  <a:srgbClr val="000000"/>
+                </a:solidFill>
+              </a:defRPr>
+            </a:pPr>
+            <a:r>
+              <a:t>• 30 órdenes de magnitud: De conductores (~10⁻⁸ Ω·m) a teflón (&gt; 10²² Ω·m).</a:t>
+            </a:r>
+          </a:p>
+          <a:p>
+            <a:pPr>
+              <a:spcAft>
+                <a:spcPts val="700"/>
+              </a:spcAft>
+              <a:defRPr sz="1150">
+                <a:solidFill>
+                  <a:srgbClr val="000000"/>
+                </a:solidFill>
+              </a:defRPr>
+            </a:pPr>
+            <a:r>
+              <a:t>• Compresión logarítmica: Evita el colapso numérico en el origen.</a:t>
+            </a:r>
+          </a:p>
+          <a:p>
+            <a:pPr>
+              <a:spcAft>
+                <a:spcPts val="700"/>
+              </a:spcAft>
+              <a:defRPr sz="1150">
+                <a:solidFill>
+                  <a:srgbClr val="000000"/>
+                </a:solidFill>
+              </a:defRPr>
+            </a:pPr>
+            <a:r>
+              <a:t>• Firma cuántica: α delata el origen microscópico del transporte.</a:t>
+            </a:r>
+          </a:p>
+          <a:p>
+            <a:pPr>
+              <a:spcAft>
+                <a:spcPts val="700"/>
+              </a:spcAft>
+              <a:defRPr sz="1150">
+                <a:solidFill>
+                  <a:srgbClr val="000000"/>
+                </a:solidFill>
+              </a:defRPr>
+            </a:pPr>
+            <a:r>
+              <a:t>• Objetivo no supervisado: Descubrir las clases automáticamente por densidad.</a:t>
+            </a:r>
+          </a:p>
+        </p:txBody>
+      </p:sp>
+      <p:pic>
+        <p:nvPicPr>
+          <p:cNvPr id="8" name="Picture 7" descr="distribucion_escala_rho.png"/>
+          <p:cNvPicPr>
+            <a:picLocks noChangeAspect="1"/>
+          </p:cNvPicPr>
+          <p:nvPr/>
+        </p:nvPicPr>
+        <p:blipFill>
+          <a:blip r:embed="rId3"/>
+          <a:stretch>
+            <a:fillRect/>
+          </a:stretch>
+        </p:blipFill>
+        <p:spPr>
+          <a:xfrm>
+            <a:off x="5120640" y="1737360"/>
+            <a:ext cx="6309360" cy="2358044"/>
           </a:xfrm>
           <a:prstGeom prst="rect">
             <a:avLst/>
@@ -4927,7 +4898,7 @@
         </p:nvSpPr>
         <p:spPr>
           <a:xfrm>
-            <a:off x="731520" y="320040"/>
+            <a:off x="731520" y="365760"/>
             <a:ext cx="10698480" cy="320040"/>
           </a:xfrm>
           <a:prstGeom prst="rect">
@@ -4944,12 +4915,12 @@
             <a:pPr>
               <a:defRPr sz="1050" b="1">
                 <a:solidFill>
-                  <a:srgbClr val="059669"/>
+                  <a:srgbClr val="000000"/>
                 </a:solidFill>
               </a:defRPr>
             </a:pPr>
             <a:r>
-              <a:t>CPIA · CLUSTERING EN FÍSICA</a:t>
+              <a:t>CPIA · APRENDIZAJE NO SUPERVISADO</a:t>
             </a:r>
           </a:p>
         </p:txBody>
@@ -4962,7 +4933,7 @@
         </p:nvSpPr>
         <p:spPr>
           <a:xfrm>
-            <a:off x="731520" y="621792"/>
+            <a:off x="731520" y="685800"/>
             <a:ext cx="10698480" cy="640080"/>
           </a:xfrm>
           <a:prstGeom prst="rect">
@@ -4977,9 +4948,9 @@
           <a:lstStyle/>
           <a:p>
             <a:pPr>
-              <a:defRPr sz="2200" b="1">
-                <a:solidFill>
-                  <a:srgbClr val="0F172A"/>
+              <a:defRPr sz="2300" b="1">
+                <a:solidFill>
+                  <a:srgbClr val="000000"/>
                 </a:solidFill>
               </a:defRPr>
             </a:pPr>
@@ -4991,24 +4962,24 @@
       </p:sp>
       <p:sp>
         <p:nvSpPr>
-          <p:cNvPr id="4" name="Rectangle 3"/>
+          <p:cNvPr id="4" name="Rounded Rectangle 3"/>
           <p:cNvSpPr/>
           <p:nvPr/>
         </p:nvSpPr>
         <p:spPr>
           <a:xfrm>
-            <a:off x="731520" y="1298448"/>
-            <a:ext cx="10728655" cy="18288"/>
-          </a:xfrm>
-          <a:prstGeom prst="rect">
+            <a:off x="731520" y="1463040"/>
+            <a:ext cx="4389120" cy="4846320"/>
+          </a:xfrm>
+          <a:prstGeom prst="roundRect">
             <a:avLst/>
           </a:prstGeom>
           <a:solidFill>
-            <a:srgbClr val="CBD5E1"/>
+            <a:srgbClr val="FFFFFF"/>
           </a:solidFill>
-          <a:ln>
+          <a:ln w="19050">
             <a:solidFill>
-              <a:srgbClr val="CBD5E1"/>
+              <a:srgbClr val="000000"/>
             </a:solidFill>
           </a:ln>
         </p:spPr>
@@ -5036,59 +5007,14 @@
       </p:sp>
       <p:sp>
         <p:nvSpPr>
-          <p:cNvPr id="5" name="Rounded Rectangle 4"/>
-          <p:cNvSpPr/>
-          <p:nvPr/>
-        </p:nvSpPr>
-        <p:spPr>
-          <a:xfrm>
-            <a:off x="731520" y="1508760"/>
-            <a:ext cx="4389120" cy="4754880"/>
-          </a:xfrm>
-          <a:prstGeom prst="roundRect">
-            <a:avLst/>
-          </a:prstGeom>
-          <a:solidFill>
-            <a:srgbClr val="F8FAFC"/>
-          </a:solidFill>
-          <a:ln w="13970">
-            <a:solidFill>
-              <a:srgbClr val="CBD5E1"/>
-            </a:solidFill>
-          </a:ln>
-        </p:spPr>
-        <p:style>
-          <a:lnRef idx="1">
-            <a:schemeClr val="accent1"/>
-          </a:lnRef>
-          <a:fillRef idx="3">
-            <a:schemeClr val="accent1"/>
-          </a:fillRef>
-          <a:effectRef idx="2">
-            <a:schemeClr val="accent1"/>
-          </a:effectRef>
-          <a:fontRef idx="minor">
-            <a:schemeClr val="lt1"/>
-          </a:fontRef>
-        </p:style>
-        <p:txBody>
-          <a:bodyPr rtlCol="0" anchor="ctr"/>
-          <a:lstStyle/>
-          <a:p>
-            <a:pPr algn="ctr"/>
-          </a:p>
-        </p:txBody>
-      </p:sp>
-      <p:sp>
-        <p:nvSpPr>
-          <p:cNvPr id="6" name="TextBox 5"/>
+          <p:cNvPr id="5" name="TextBox 4"/>
           <p:cNvSpPr txBox="1"/>
           <p:nvPr/>
         </p:nvSpPr>
         <p:spPr>
           <a:xfrm>
-            <a:off x="914400" y="1645920"/>
-            <a:ext cx="4023360" cy="4389120"/>
+            <a:off x="914400" y="1600200"/>
+            <a:ext cx="4023360" cy="4572000"/>
           </a:xfrm>
           <a:prstGeom prst="rect">
             <a:avLst/>
@@ -5104,12 +5030,12 @@
             <a:pPr>
               <a:defRPr sz="1500" b="1">
                 <a:solidFill>
-                  <a:srgbClr val="DC2626"/>
+                  <a:srgbClr val="000000"/>
                 </a:solidFill>
               </a:defRPr>
             </a:pPr>
             <a:r>
-              <a:t>K-Means (Inadecuado aquí)</a:t>
+              <a:t>K-Means (Inadecuado en este dominio)</a:t>
             </a:r>
           </a:p>
           <a:p>
@@ -5119,7 +5045,7 @@
               </a:spcAft>
               <a:defRPr sz="1100">
                 <a:solidFill>
-                  <a:srgbClr val="1E293B"/>
+                  <a:srgbClr val="000000"/>
                 </a:solidFill>
               </a:defRPr>
             </a:pPr>
@@ -5134,7 +5060,7 @@
               </a:spcAft>
               <a:defRPr sz="1100">
                 <a:solidFill>
-                  <a:srgbClr val="1E293B"/>
+                  <a:srgbClr val="000000"/>
                 </a:solidFill>
               </a:defRPr>
             </a:pPr>
@@ -5149,12 +5075,12 @@
               </a:spcAft>
               <a:defRPr sz="1100">
                 <a:solidFill>
-                  <a:srgbClr val="1E293B"/>
+                  <a:srgbClr val="000000"/>
                 </a:solidFill>
               </a:defRPr>
             </a:pPr>
             <a:r>
-              <a:t>✖  Exige fijar 'k' a priori de forma arbitraria.</a:t>
+              <a:t>✖  Exige prefijar 'k' a priori de forma arbitraria.</a:t>
             </a:r>
           </a:p>
           <a:p>
@@ -5164,7 +5090,7 @@
               </a:spcAft>
               <a:defRPr sz="1100">
                 <a:solidFill>
-                  <a:srgbClr val="1E293B"/>
+                  <a:srgbClr val="000000"/>
                 </a:solidFill>
               </a:defRPr>
             </a:pPr>
@@ -5177,7 +5103,7 @@
             <a:pPr>
               <a:defRPr sz="1500" b="1">
                 <a:solidFill>
-                  <a:srgbClr val="059669"/>
+                  <a:srgbClr val="000000"/>
                 </a:solidFill>
               </a:defRPr>
             </a:pPr>
@@ -5192,7 +5118,7 @@
               </a:spcAft>
               <a:defRPr sz="1100">
                 <a:solidFill>
-                  <a:srgbClr val="1E293B"/>
+                  <a:srgbClr val="000000"/>
                 </a:solidFill>
               </a:defRPr>
             </a:pPr>
@@ -5207,7 +5133,7 @@
               </a:spcAft>
               <a:defRPr sz="1100">
                 <a:solidFill>
-                  <a:srgbClr val="1E293B"/>
+                  <a:srgbClr val="000000"/>
                 </a:solidFill>
               </a:defRPr>
             </a:pPr>
@@ -5222,7 +5148,7 @@
               </a:spcAft>
               <a:defRPr sz="1100">
                 <a:solidFill>
-                  <a:srgbClr val="1E293B"/>
+                  <a:srgbClr val="000000"/>
                 </a:solidFill>
               </a:defRPr>
             </a:pPr>
@@ -5237,7 +5163,7 @@
               </a:spcAft>
               <a:defRPr sz="1100">
                 <a:solidFill>
-                  <a:srgbClr val="1E293B"/>
+                  <a:srgbClr val="000000"/>
                 </a:solidFill>
               </a:defRPr>
             </a:pPr>
@@ -5249,7 +5175,7 @@
       </p:sp>
       <p:pic>
         <p:nvPicPr>
-          <p:cNvPr id="7" name="Picture 6" descr="comparativa_kmeans_dbscan.png"/>
+          <p:cNvPr id="6" name="Picture 5" descr="comparativa_kmeans_dbscan.png"/>
           <p:cNvPicPr>
             <a:picLocks noChangeAspect="1"/>
           </p:cNvPicPr>
@@ -5263,7 +5189,7 @@
         </p:blipFill>
         <p:spPr>
           <a:xfrm>
-            <a:off x="5303520" y="1691640"/>
+            <a:off x="5303520" y="1645920"/>
             <a:ext cx="6126480" cy="2537229"/>
           </a:xfrm>
           <a:prstGeom prst="rect">
@@ -5297,7 +5223,7 @@
         </p:nvSpPr>
         <p:spPr>
           <a:xfrm>
-            <a:off x="731520" y="320040"/>
+            <a:off x="731520" y="365760"/>
             <a:ext cx="10698480" cy="320040"/>
           </a:xfrm>
           <a:prstGeom prst="rect">
@@ -5314,12 +5240,12 @@
             <a:pPr>
               <a:defRPr sz="1050" b="1">
                 <a:solidFill>
-                  <a:srgbClr val="059669"/>
+                  <a:srgbClr val="000000"/>
                 </a:solidFill>
               </a:defRPr>
             </a:pPr>
             <a:r>
-              <a:t>CPIA · CLUSTERING EN FÍSICA</a:t>
+              <a:t>CPIA · APRENDIZAJE NO SUPERVISADO</a:t>
             </a:r>
           </a:p>
         </p:txBody>
@@ -5332,7 +5258,7 @@
         </p:nvSpPr>
         <p:spPr>
           <a:xfrm>
-            <a:off x="731520" y="621792"/>
+            <a:off x="731520" y="685800"/>
             <a:ext cx="10698480" cy="640080"/>
           </a:xfrm>
           <a:prstGeom prst="rect">
@@ -5347,9 +5273,9 @@
           <a:lstStyle/>
           <a:p>
             <a:pPr>
-              <a:defRPr sz="2200" b="1">
-                <a:solidFill>
-                  <a:srgbClr val="0F172A"/>
+              <a:defRPr sz="2300" b="1">
+                <a:solidFill>
+                  <a:srgbClr val="000000"/>
                 </a:solidFill>
               </a:defRPr>
             </a:pPr>
@@ -5361,24 +5287,24 @@
       </p:sp>
       <p:sp>
         <p:nvSpPr>
-          <p:cNvPr id="4" name="Rectangle 3"/>
+          <p:cNvPr id="4" name="Rounded Rectangle 3"/>
           <p:cNvSpPr/>
           <p:nvPr/>
         </p:nvSpPr>
         <p:spPr>
           <a:xfrm>
-            <a:off x="731520" y="1298448"/>
-            <a:ext cx="10728655" cy="18288"/>
-          </a:xfrm>
-          <a:prstGeom prst="rect">
+            <a:off x="731520" y="1463040"/>
+            <a:ext cx="3337560" cy="4754880"/>
+          </a:xfrm>
+          <a:prstGeom prst="roundRect">
             <a:avLst/>
           </a:prstGeom>
           <a:solidFill>
-            <a:srgbClr val="CBD5E1"/>
+            <a:srgbClr val="FFFFFF"/>
           </a:solidFill>
-          <a:ln>
+          <a:ln w="19050">
             <a:solidFill>
-              <a:srgbClr val="CBD5E1"/>
+              <a:srgbClr val="000000"/>
             </a:solidFill>
           </a:ln>
         </p:spPr>
@@ -5406,24 +5332,170 @@
       </p:sp>
       <p:sp>
         <p:nvSpPr>
-          <p:cNvPr id="5" name="Rounded Rectangle 4"/>
+          <p:cNvPr id="5" name="TextBox 4"/>
+          <p:cNvSpPr txBox="1"/>
+          <p:nvPr/>
+        </p:nvSpPr>
+        <p:spPr>
+          <a:xfrm>
+            <a:off x="914400" y="1600200"/>
+            <a:ext cx="2971800" cy="914400"/>
+          </a:xfrm>
+          <a:prstGeom prst="rect">
+            <a:avLst/>
+          </a:prstGeom>
+          <a:noFill/>
+        </p:spPr>
+        <p:txBody>
+          <a:bodyPr wrap="none">
+            <a:spAutoFit/>
+          </a:bodyPr>
+          <a:lstStyle/>
+          <a:p>
+            <a:pPr>
+              <a:defRPr sz="1500" b="1">
+                <a:solidFill>
+                  <a:srgbClr val="000000"/>
+                </a:solidFill>
+              </a:defRPr>
+            </a:pPr>
+            <a:r>
+              <a:t>1. Estandarización Z-Score</a:t>
+            </a:r>
+            <a:br/>
+            <a:r>
+              <a:t>(Implementada con NumPy)</a:t>
+            </a:r>
+          </a:p>
+        </p:txBody>
+      </p:sp>
+      <p:pic>
+        <p:nvPicPr>
+          <p:cNvPr id="6" name="Picture 5" descr="formula_zscore.png"/>
+          <p:cNvPicPr>
+            <a:picLocks noChangeAspect="1"/>
+          </p:cNvPicPr>
+          <p:nvPr/>
+        </p:nvPicPr>
+        <p:blipFill>
+          <a:blip r:embed="rId2"/>
+          <a:stretch>
+            <a:fillRect/>
+          </a:stretch>
+        </p:blipFill>
+        <p:spPr>
+          <a:xfrm>
+            <a:off x="868680" y="2331720"/>
+            <a:ext cx="3063240" cy="555864"/>
+          </a:xfrm>
+          <a:prstGeom prst="rect">
+            <a:avLst/>
+          </a:prstGeom>
+        </p:spPr>
+      </p:pic>
+      <p:sp>
+        <p:nvSpPr>
+          <p:cNvPr id="7" name="TextBox 6"/>
+          <p:cNvSpPr txBox="1"/>
+          <p:nvPr/>
+        </p:nvSpPr>
+        <p:spPr>
+          <a:xfrm>
+            <a:off x="914400" y="3703320"/>
+            <a:ext cx="2971800" cy="2468880"/>
+          </a:xfrm>
+          <a:prstGeom prst="rect">
+            <a:avLst/>
+          </a:prstGeom>
+          <a:noFill/>
+        </p:spPr>
+        <p:txBody>
+          <a:bodyPr wrap="square">
+            <a:spAutoFit/>
+          </a:bodyPr>
+          <a:lstStyle/>
+          <a:p>
+            <a:pPr>
+              <a:spcAft>
+                <a:spcPts val="500"/>
+              </a:spcAft>
+              <a:defRPr sz="1100">
+                <a:solidFill>
+                  <a:srgbClr val="000000"/>
+                </a:solidFill>
+              </a:defRPr>
+            </a:pPr>
+            <a:r>
+              <a:t>• μ = Media muestral por columna</a:t>
+            </a:r>
+          </a:p>
+          <a:p>
+            <a:pPr>
+              <a:spcAft>
+                <a:spcPts val="500"/>
+              </a:spcAft>
+              <a:defRPr sz="1100">
+                <a:solidFill>
+                  <a:srgbClr val="000000"/>
+                </a:solidFill>
+              </a:defRPr>
+            </a:pPr>
+            <a:r>
+              <a:t>• σ = Desviación estándar típica</a:t>
+            </a:r>
+          </a:p>
+          <a:p>
+            <a:pPr>
+              <a:spcAft>
+                <a:spcPts val="500"/>
+              </a:spcAft>
+              <a:defRPr sz="1100">
+                <a:solidFill>
+                  <a:srgbClr val="000000"/>
+                </a:solidFill>
+              </a:defRPr>
+            </a:pPr>
+            <a:r>
+              <a:t>• Resultado: Media = 0, Varianza = 1</a:t>
+            </a:r>
+          </a:p>
+          <a:p>
+            <a:pPr>
+              <a:spcAft>
+                <a:spcPts val="500"/>
+              </a:spcAft>
+              <a:defRPr sz="1100">
+                <a:solidFill>
+                  <a:srgbClr val="000000"/>
+                </a:solidFill>
+              </a:defRPr>
+            </a:pPr>
+            <a:r>
+              <a:t>• Imprescindible: equipara el rango de log₁₀ρ (~31) con el de α (~0.08) para la distancia euclídea.</a:t>
+            </a:r>
+          </a:p>
+        </p:txBody>
+      </p:sp>
+      <p:sp>
+        <p:nvSpPr>
+          <p:cNvPr id="8" name="Rounded Rectangle 7"/>
           <p:cNvSpPr/>
           <p:nvPr/>
         </p:nvSpPr>
         <p:spPr>
           <a:xfrm>
-            <a:off x="731520" y="1554480"/>
-            <a:ext cx="3337560" cy="4572000"/>
+            <a:off x="4434840" y="1463040"/>
+            <a:ext cx="3337560" cy="4754880"/>
           </a:xfrm>
           <a:prstGeom prst="roundRect">
             <a:avLst/>
           </a:prstGeom>
           <a:solidFill>
-            <a:srgbClr val="F8FAFC"/>
+            <a:srgbClr val="FFFFFF"/>
           </a:solidFill>
-          <a:ln w="13970">
+          <a:ln w="19050">
             <a:solidFill>
-              <a:srgbClr val="2563EB"/>
+              <a:srgbClr val="000000"/>
             </a:solidFill>
           </a:ln>
         </p:spPr>
@@ -5451,14 +5523,14 @@
       </p:sp>
       <p:sp>
         <p:nvSpPr>
-          <p:cNvPr id="6" name="TextBox 5"/>
+          <p:cNvPr id="9" name="TextBox 8"/>
           <p:cNvSpPr txBox="1"/>
           <p:nvPr/>
         </p:nvSpPr>
         <p:spPr>
           <a:xfrm>
-            <a:off x="914400" y="1737360"/>
-            <a:ext cx="2971800" cy="4114800"/>
+            <a:off x="4617720" y="1600200"/>
+            <a:ext cx="2971800" cy="914400"/>
           </a:xfrm>
           <a:prstGeom prst="rect">
             <a:avLst/>
@@ -5466,122 +5538,200 @@
           <a:noFill/>
         </p:spPr>
         <p:txBody>
+          <a:bodyPr wrap="none">
+            <a:spAutoFit/>
+          </a:bodyPr>
+          <a:lstStyle/>
+          <a:p>
+            <a:pPr>
+              <a:defRPr sz="1500" b="1">
+                <a:solidFill>
+                  <a:srgbClr val="000000"/>
+                </a:solidFill>
+              </a:defRPr>
+            </a:pPr>
+            <a:r>
+              <a:t>2. Criterio de Núcleo</a:t>
+            </a:r>
+            <a:br/>
+            <a:r>
+              <a:t>(DBSCAN Espacial)</a:t>
+            </a:r>
+          </a:p>
+        </p:txBody>
+      </p:sp>
+      <p:pic>
+        <p:nvPicPr>
+          <p:cNvPr id="10" name="Picture 9" descr="formula_nucleo.png"/>
+          <p:cNvPicPr>
+            <a:picLocks noChangeAspect="1"/>
+          </p:cNvPicPr>
+          <p:nvPr/>
+        </p:nvPicPr>
+        <p:blipFill>
+          <a:blip r:embed="rId3"/>
+          <a:stretch>
+            <a:fillRect/>
+          </a:stretch>
+        </p:blipFill>
+        <p:spPr>
+          <a:xfrm>
+            <a:off x="4572000" y="2331720"/>
+            <a:ext cx="3063240" cy="555864"/>
+          </a:xfrm>
+          <a:prstGeom prst="rect">
+            <a:avLst/>
+          </a:prstGeom>
+        </p:spPr>
+      </p:pic>
+      <p:sp>
+        <p:nvSpPr>
+          <p:cNvPr id="11" name="TextBox 10"/>
+          <p:cNvSpPr txBox="1"/>
+          <p:nvPr/>
+        </p:nvSpPr>
+        <p:spPr>
+          <a:xfrm>
+            <a:off x="4617720" y="3703320"/>
+            <a:ext cx="2971800" cy="2468880"/>
+          </a:xfrm>
+          <a:prstGeom prst="rect">
+            <a:avLst/>
+          </a:prstGeom>
+          <a:noFill/>
+        </p:spPr>
+        <p:txBody>
           <a:bodyPr wrap="square">
             <a:spAutoFit/>
           </a:bodyPr>
           <a:lstStyle/>
           <a:p>
             <a:pPr>
-              <a:defRPr sz="1600" b="1">
-                <a:solidFill>
-                  <a:srgbClr val="2563EB"/>
+              <a:spcAft>
+                <a:spcPts val="400"/>
+              </a:spcAft>
+              <a:defRPr sz="1100">
+                <a:solidFill>
+                  <a:srgbClr val="000000"/>
                 </a:solidFill>
               </a:defRPr>
             </a:pPr>
             <a:r>
-              <a:t>1. Estandarización Z-Score</a:t>
-            </a:r>
-            <a:br/>
-            <a:r>
-              <a:t>(Implementada con NumPy)</a:t>
-            </a:r>
-          </a:p>
-          <a:p>
-            <a:br/>
-            <a:pPr algn="ctr">
-              <a:defRPr sz="2200" b="1">
-                <a:solidFill>
-                  <a:srgbClr val="0F172A"/>
-                </a:solidFill>
-              </a:defRPr>
-            </a:pPr>
-            <a:r>
-              <a:t>Z = (X - μ) / σ</a:t>
-            </a:r>
-            <a:br/>
+              <a:t>• d(p, q) = Distancia Euclídea en 2D</a:t>
+            </a:r>
           </a:p>
           <a:p>
             <a:pPr>
               <a:spcAft>
-                <a:spcPts val="600"/>
+                <a:spcPts val="400"/>
               </a:spcAft>
-              <a:defRPr sz="1150">
-                <a:solidFill>
-                  <a:srgbClr val="1E293B"/>
+              <a:defRPr sz="1100">
+                <a:solidFill>
+                  <a:srgbClr val="000000"/>
                 </a:solidFill>
               </a:defRPr>
             </a:pPr>
             <a:r>
-              <a:t>• μ = Media muestral por columna</a:t>
+              <a:t>• Punto Núcleo (Core Point):</a:t>
             </a:r>
           </a:p>
           <a:p>
             <a:pPr>
               <a:spcAft>
-                <a:spcPts val="600"/>
+                <a:spcPts val="400"/>
               </a:spcAft>
-              <a:defRPr sz="1150">
-                <a:solidFill>
-                  <a:srgbClr val="1E293B"/>
+              <a:defRPr sz="1100">
+                <a:solidFill>
+                  <a:srgbClr val="000000"/>
                 </a:solidFill>
               </a:defRPr>
             </a:pPr>
             <a:r>
-              <a:t>• σ = Desviación estándar típica</a:t>
+              <a:t>•    |N_ε(p)| ≥ min_samples</a:t>
             </a:r>
           </a:p>
           <a:p>
             <a:pPr>
               <a:spcAft>
-                <a:spcPts val="600"/>
+                <a:spcPts val="400"/>
               </a:spcAft>
-              <a:defRPr sz="1150">
-                <a:solidFill>
-                  <a:srgbClr val="1E293B"/>
+              <a:defRPr sz="1100">
+                <a:solidFill>
+                  <a:srgbClr val="000000"/>
                 </a:solidFill>
               </a:defRPr>
             </a:pPr>
             <a:r>
-              <a:t>• Resultado: Media = 0, Varianza = 1</a:t>
+              <a:t>• Punto Frontera (Border):</a:t>
             </a:r>
           </a:p>
           <a:p>
             <a:pPr>
               <a:spcAft>
-                <a:spcPts val="600"/>
+                <a:spcPts val="400"/>
               </a:spcAft>
-              <a:defRPr sz="1150">
-                <a:solidFill>
-                  <a:srgbClr val="1E293B"/>
+              <a:defRPr sz="1100">
+                <a:solidFill>
+                  <a:srgbClr val="000000"/>
                 </a:solidFill>
               </a:defRPr>
             </a:pPr>
             <a:r>
-              <a:t>• Imprescindible: equipara el rango de log₁₀ρ (~31) con el rango de α (~0.08) para la distancia euclídea.</a:t>
-            </a:r>
-          </a:p>
-        </p:txBody>
-      </p:sp>
-      <p:sp>
-        <p:nvSpPr>
-          <p:cNvPr id="7" name="Rounded Rectangle 6"/>
+              <a:t>•    Alcanzable desde un núcleo</a:t>
+            </a:r>
+          </a:p>
+          <a:p>
+            <a:pPr>
+              <a:spcAft>
+                <a:spcPts val="400"/>
+              </a:spcAft>
+              <a:defRPr sz="1100">
+                <a:solidFill>
+                  <a:srgbClr val="000000"/>
+                </a:solidFill>
+              </a:defRPr>
+            </a:pPr>
+            <a:r>
+              <a:t>• Ruido (Noise):</a:t>
+            </a:r>
+          </a:p>
+          <a:p>
+            <a:pPr>
+              <a:spcAft>
+                <a:spcPts val="400"/>
+              </a:spcAft>
+              <a:defRPr sz="1100">
+                <a:solidFill>
+                  <a:srgbClr val="000000"/>
+                </a:solidFill>
+              </a:defRPr>
+            </a:pPr>
+            <a:r>
+              <a:t>•    No alcanzable (|N_ε| &lt; min_samples)</a:t>
+            </a:r>
+          </a:p>
+        </p:txBody>
+      </p:sp>
+      <p:sp>
+        <p:nvSpPr>
+          <p:cNvPr id="12" name="Rounded Rectangle 11"/>
           <p:cNvSpPr/>
           <p:nvPr/>
         </p:nvSpPr>
         <p:spPr>
           <a:xfrm>
-            <a:off x="4434840" y="1554480"/>
-            <a:ext cx="3337560" cy="4572000"/>
+            <a:off x="8138160" y="1463040"/>
+            <a:ext cx="3337560" cy="4754880"/>
           </a:xfrm>
           <a:prstGeom prst="roundRect">
             <a:avLst/>
           </a:prstGeom>
           <a:solidFill>
-            <a:srgbClr val="F8FAFC"/>
+            <a:srgbClr val="FFFFFF"/>
           </a:solidFill>
-          <a:ln w="13970">
+          <a:ln w="19050">
             <a:solidFill>
-              <a:srgbClr val="059669"/>
+              <a:srgbClr val="000000"/>
             </a:solidFill>
           </a:ln>
         </p:spPr>
@@ -5609,14 +5759,14 @@
       </p:sp>
       <p:sp>
         <p:nvSpPr>
-          <p:cNvPr id="8" name="TextBox 7"/>
+          <p:cNvPr id="13" name="TextBox 12"/>
           <p:cNvSpPr txBox="1"/>
           <p:nvPr/>
         </p:nvSpPr>
         <p:spPr>
           <a:xfrm>
-            <a:off x="4617720" y="1737360"/>
-            <a:ext cx="2971800" cy="4114800"/>
+            <a:off x="8321040" y="1600200"/>
+            <a:ext cx="2971800" cy="914400"/>
           </a:xfrm>
           <a:prstGeom prst="rect">
             <a:avLst/>
@@ -5624,202 +5774,62 @@
           <a:noFill/>
         </p:spPr>
         <p:txBody>
-          <a:bodyPr wrap="square">
+          <a:bodyPr wrap="none">
             <a:spAutoFit/>
           </a:bodyPr>
           <a:lstStyle/>
           <a:p>
             <a:pPr>
-              <a:defRPr sz="1600" b="1">
-                <a:solidFill>
-                  <a:srgbClr val="059669"/>
+              <a:defRPr sz="1500" b="1">
+                <a:solidFill>
+                  <a:srgbClr val="000000"/>
                 </a:solidFill>
               </a:defRPr>
             </a:pPr>
             <a:r>
-              <a:t>2. Criterio de Núcleo</a:t>
+              <a:t>3. Parámetros Fijados</a:t>
             </a:r>
             <a:br/>
             <a:r>
-              <a:t>(DBSCAN Espacial)</a:t>
-            </a:r>
-          </a:p>
-          <a:p>
-            <a:br/>
-            <a:pPr algn="ctr">
-              <a:defRPr sz="1800" b="1">
-                <a:solidFill>
-                  <a:srgbClr val="0F172A"/>
-                </a:solidFill>
-              </a:defRPr>
-            </a:pPr>
-            <a:r>
-              <a:t>N_ε(p) = { q | d(p, q) ≤ ε }</a:t>
-            </a:r>
-            <a:br/>
-          </a:p>
-          <a:p>
-            <a:pPr>
-              <a:spcAft>
-                <a:spcPts val="400"/>
-              </a:spcAft>
-              <a:defRPr sz="1150">
-                <a:solidFill>
-                  <a:srgbClr val="1E293B"/>
-                </a:solidFill>
-              </a:defRPr>
-            </a:pPr>
-            <a:r>
-              <a:t>• d(p, q) = Distancia Euclídea 2D</a:t>
-            </a:r>
-          </a:p>
-          <a:p>
-            <a:pPr>
-              <a:spcAft>
-                <a:spcPts val="400"/>
-              </a:spcAft>
-              <a:defRPr sz="1150">
-                <a:solidFill>
-                  <a:srgbClr val="1E293B"/>
-                </a:solidFill>
-              </a:defRPr>
-            </a:pPr>
-            <a:r>
-              <a:t>• Punto Núcleo (Core Point):</a:t>
-            </a:r>
-          </a:p>
-          <a:p>
-            <a:pPr>
-              <a:spcAft>
-                <a:spcPts val="400"/>
-              </a:spcAft>
-              <a:defRPr sz="1150">
-                <a:solidFill>
-                  <a:srgbClr val="1E293B"/>
-                </a:solidFill>
-              </a:defRPr>
-            </a:pPr>
-            <a:r>
-              <a:t>•    |N_ε(p)| ≥ min_samples</a:t>
-            </a:r>
-          </a:p>
-          <a:p>
-            <a:pPr>
-              <a:spcAft>
-                <a:spcPts val="400"/>
-              </a:spcAft>
-              <a:defRPr sz="1150">
-                <a:solidFill>
-                  <a:srgbClr val="1E293B"/>
-                </a:solidFill>
-              </a:defRPr>
-            </a:pPr>
-            <a:r>
-              <a:t>• Punto Frontera (Border):</a:t>
-            </a:r>
-          </a:p>
-          <a:p>
-            <a:pPr>
-              <a:spcAft>
-                <a:spcPts val="400"/>
-              </a:spcAft>
-              <a:defRPr sz="1150">
-                <a:solidFill>
-                  <a:srgbClr val="1E293B"/>
-                </a:solidFill>
-              </a:defRPr>
-            </a:pPr>
-            <a:r>
-              <a:t>•    Alcanzable desde un núcleo</a:t>
-            </a:r>
-          </a:p>
-          <a:p>
-            <a:pPr>
-              <a:spcAft>
-                <a:spcPts val="400"/>
-              </a:spcAft>
-              <a:defRPr sz="1150">
-                <a:solidFill>
-                  <a:srgbClr val="1E293B"/>
-                </a:solidFill>
-              </a:defRPr>
-            </a:pPr>
-            <a:r>
-              <a:t>• Ruido (Noise):</a:t>
-            </a:r>
-          </a:p>
-          <a:p>
-            <a:pPr>
-              <a:spcAft>
-                <a:spcPts val="400"/>
-              </a:spcAft>
-              <a:defRPr sz="1150">
-                <a:solidFill>
-                  <a:srgbClr val="1E293B"/>
-                </a:solidFill>
-              </a:defRPr>
-            </a:pPr>
-            <a:r>
-              <a:t>•    No alcanzable (|N_ε| &lt; min_samples)</a:t>
-            </a:r>
-          </a:p>
-        </p:txBody>
-      </p:sp>
-      <p:sp>
-        <p:nvSpPr>
-          <p:cNvPr id="9" name="Rounded Rectangle 8"/>
-          <p:cNvSpPr/>
+              <a:t>(Criterio Objetivo)</a:t>
+            </a:r>
+          </a:p>
+        </p:txBody>
+      </p:sp>
+      <p:pic>
+        <p:nvPicPr>
+          <p:cNvPr id="14" name="Picture 13" descr="formula_parametros.png"/>
+          <p:cNvPicPr>
+            <a:picLocks noChangeAspect="1"/>
+          </p:cNvPicPr>
           <p:nvPr/>
-        </p:nvSpPr>
-        <p:spPr>
-          <a:xfrm>
-            <a:off x="8138160" y="1554480"/>
-            <a:ext cx="3337560" cy="4572000"/>
-          </a:xfrm>
-          <a:prstGeom prst="roundRect">
+        </p:nvPicPr>
+        <p:blipFill>
+          <a:blip r:embed="rId4"/>
+          <a:stretch>
+            <a:fillRect/>
+          </a:stretch>
+        </p:blipFill>
+        <p:spPr>
+          <a:xfrm>
+            <a:off x="8275320" y="2331720"/>
+            <a:ext cx="3063240" cy="521778"/>
+          </a:xfrm>
+          <a:prstGeom prst="rect">
             <a:avLst/>
           </a:prstGeom>
-          <a:solidFill>
-            <a:srgbClr val="F8FAFC"/>
-          </a:solidFill>
-          <a:ln w="13970">
-            <a:solidFill>
-              <a:srgbClr val="D97706"/>
-            </a:solidFill>
-          </a:ln>
-        </p:spPr>
-        <p:style>
-          <a:lnRef idx="1">
-            <a:schemeClr val="accent1"/>
-          </a:lnRef>
-          <a:fillRef idx="3">
-            <a:schemeClr val="accent1"/>
-          </a:fillRef>
-          <a:effectRef idx="2">
-            <a:schemeClr val="accent1"/>
-          </a:effectRef>
-          <a:fontRef idx="minor">
-            <a:schemeClr val="lt1"/>
-          </a:fontRef>
-        </p:style>
-        <p:txBody>
-          <a:bodyPr rtlCol="0" anchor="ctr"/>
-          <a:lstStyle/>
-          <a:p>
-            <a:pPr algn="ctr"/>
-          </a:p>
-        </p:txBody>
-      </p:sp>
-      <p:sp>
-        <p:nvSpPr>
-          <p:cNvPr id="10" name="TextBox 9"/>
+        </p:spPr>
+      </p:pic>
+      <p:sp>
+        <p:nvSpPr>
+          <p:cNvPr id="15" name="TextBox 14"/>
           <p:cNvSpPr txBox="1"/>
           <p:nvPr/>
         </p:nvSpPr>
         <p:spPr>
           <a:xfrm>
-            <a:off x="8321040" y="1737360"/>
-            <a:ext cx="2971800" cy="4114800"/>
+            <a:off x="8321040" y="3703320"/>
+            <a:ext cx="2971800" cy="2468880"/>
           </a:xfrm>
           <a:prstGeom prst="rect">
             <a:avLst/>
@@ -5833,121 +5843,87 @@
           <a:lstStyle/>
           <a:p>
             <a:pPr>
-              <a:defRPr sz="1600" b="1">
-                <a:solidFill>
-                  <a:srgbClr val="D97706"/>
+              <a:spcAft>
+                <a:spcPts val="500"/>
+              </a:spcAft>
+              <a:defRPr sz="1100">
+                <a:solidFill>
+                  <a:srgbClr val="000000"/>
                 </a:solidFill>
               </a:defRPr>
             </a:pPr>
             <a:r>
-              <a:t>3. Parámetros Fijados</a:t>
-            </a:r>
-            <a:br/>
-            <a:r>
-              <a:t>(Criterio Objetivo)</a:t>
-            </a:r>
-          </a:p>
-          <a:p>
-            <a:br/>
-            <a:pPr algn="ctr">
-              <a:defRPr sz="2000" b="1">
-                <a:solidFill>
-                  <a:srgbClr val="0F172A"/>
-                </a:solidFill>
-              </a:defRPr>
-            </a:pPr>
-            <a:r>
-              <a:t>ε = 0.65</a:t>
-            </a:r>
-            <a:br/>
-            <a:r>
-              <a:t>min_samples = 3</a:t>
-            </a:r>
-            <a:br/>
+              <a:t>• min_samples = 3:</a:t>
+            </a:r>
           </a:p>
           <a:p>
             <a:pPr>
               <a:spcAft>
-                <a:spcPts val="600"/>
+                <a:spcPts val="500"/>
               </a:spcAft>
-              <a:defRPr sz="1150">
-                <a:solidFill>
-                  <a:srgbClr val="1E293B"/>
+              <a:defRPr sz="1100">
+                <a:solidFill>
+                  <a:srgbClr val="000000"/>
                 </a:solidFill>
               </a:defRPr>
             </a:pPr>
             <a:r>
-              <a:t>• min_samples = 3:</a:t>
+              <a:t>•    Regla canónica k ≥ d + 1 (dimensión d = 2).</a:t>
             </a:r>
           </a:p>
           <a:p>
             <a:pPr>
               <a:spcAft>
-                <a:spcPts val="600"/>
+                <a:spcPts val="500"/>
               </a:spcAft>
-              <a:defRPr sz="1150">
-                <a:solidFill>
-                  <a:srgbClr val="1E293B"/>
+              <a:defRPr sz="1100">
+                <a:solidFill>
+                  <a:srgbClr val="000000"/>
                 </a:solidFill>
               </a:defRPr>
             </a:pPr>
             <a:r>
-              <a:t>•    Regla canónica k ≥ d + 1 (dimensión d = 2).</a:t>
+              <a:t>• ε = 0.65:</a:t>
             </a:r>
           </a:p>
           <a:p>
             <a:pPr>
               <a:spcAft>
-                <a:spcPts val="600"/>
+                <a:spcPts val="500"/>
               </a:spcAft>
-              <a:defRPr sz="1150">
-                <a:solidFill>
-                  <a:srgbClr val="1E293B"/>
+              <a:defRPr sz="1100">
+                <a:solidFill>
+                  <a:srgbClr val="000000"/>
                 </a:solidFill>
               </a:defRPr>
             </a:pPr>
             <a:r>
-              <a:t>• ε = 0.65:</a:t>
+              <a:t>•    Determinado mediante gráfico k-NN (codo).</a:t>
             </a:r>
           </a:p>
           <a:p>
             <a:pPr>
               <a:spcAft>
-                <a:spcPts val="600"/>
+                <a:spcPts val="500"/>
               </a:spcAft>
-              <a:defRPr sz="1150">
-                <a:solidFill>
-                  <a:srgbClr val="1E293B"/>
+              <a:defRPr sz="1100">
+                <a:solidFill>
+                  <a:srgbClr val="000000"/>
                 </a:solidFill>
               </a:defRPr>
             </a:pPr>
             <a:r>
-              <a:t>•    Determinado mediante gráfico k-NN (codo).</a:t>
+              <a:t>•    Ventana óptima que aísla aislantes sin fusionar metales.</a:t>
             </a:r>
           </a:p>
           <a:p>
             <a:pPr>
               <a:spcAft>
-                <a:spcPts val="600"/>
+                <a:spcPts val="500"/>
               </a:spcAft>
-              <a:defRPr sz="1150">
-                <a:solidFill>
-                  <a:srgbClr val="1E293B"/>
-                </a:solidFill>
-              </a:defRPr>
-            </a:pPr>
-            <a:r>
-              <a:t>•    Ventana óptima que aísla aislantes sin fusionar metales.</a:t>
-            </a:r>
-          </a:p>
-          <a:p>
-            <a:pPr>
-              <a:spcAft>
-                <a:spcPts val="600"/>
-              </a:spcAft>
-              <a:defRPr sz="1150">
-                <a:solidFill>
-                  <a:srgbClr val="1E293B"/>
+              <a:defRPr sz="1100">
+                <a:solidFill>
+                  <a:srgbClr val="000000"/>
                 </a:solidFill>
               </a:defRPr>
             </a:pPr>
@@ -6000,7 +5976,7 @@
             <a:pPr>
               <a:defRPr sz="2200" b="1">
                 <a:solidFill>
-                  <a:srgbClr val="0F172A"/>
+                  <a:srgbClr val="000000"/>
                 </a:solidFill>
               </a:defRPr>
             </a:pPr>
@@ -6012,7 +5988,7 @@
             <a:pPr>
               <a:defRPr sz="1300">
                 <a:solidFill>
-                  <a:srgbClr val="64748B"/>
+                  <a:srgbClr val="000000"/>
                 </a:solidFill>
               </a:defRPr>
             </a:pPr>
@@ -6072,7 +6048,7 @@
         </p:nvSpPr>
         <p:spPr>
           <a:xfrm>
-            <a:off x="731520" y="320040"/>
+            <a:off x="731520" y="365760"/>
             <a:ext cx="10698480" cy="320040"/>
           </a:xfrm>
           <a:prstGeom prst="rect">
@@ -6089,12 +6065,12 @@
             <a:pPr>
               <a:defRPr sz="1050" b="1">
                 <a:solidFill>
-                  <a:srgbClr val="059669"/>
+                  <a:srgbClr val="000000"/>
                 </a:solidFill>
               </a:defRPr>
             </a:pPr>
             <a:r>
-              <a:t>CPIA · CLUSTERING EN FÍSICA</a:t>
+              <a:t>CPIA · APRENDIZAJE NO SUPERVISADO</a:t>
             </a:r>
           </a:p>
         </p:txBody>
@@ -6107,7 +6083,7 @@
         </p:nvSpPr>
         <p:spPr>
           <a:xfrm>
-            <a:off x="731520" y="621792"/>
+            <a:off x="731520" y="685800"/>
             <a:ext cx="10698480" cy="640080"/>
           </a:xfrm>
           <a:prstGeom prst="rect">
@@ -6122,9 +6098,9 @@
           <a:lstStyle/>
           <a:p>
             <a:pPr>
-              <a:defRPr sz="2200" b="1">
-                <a:solidFill>
-                  <a:srgbClr val="0F172A"/>
+              <a:defRPr sz="2300" b="1">
+                <a:solidFill>
+                  <a:srgbClr val="000000"/>
                 </a:solidFill>
               </a:defRPr>
             </a:pPr>
@@ -6136,24 +6112,24 @@
       </p:sp>
       <p:sp>
         <p:nvSpPr>
-          <p:cNvPr id="4" name="Rectangle 3"/>
+          <p:cNvPr id="4" name="Rounded Rectangle 3"/>
           <p:cNvSpPr/>
           <p:nvPr/>
         </p:nvSpPr>
         <p:spPr>
           <a:xfrm>
-            <a:off x="731520" y="1298448"/>
-            <a:ext cx="10728655" cy="18288"/>
-          </a:xfrm>
-          <a:prstGeom prst="rect">
+            <a:off x="731520" y="1463040"/>
+            <a:ext cx="3337560" cy="3108960"/>
+          </a:xfrm>
+          <a:prstGeom prst="roundRect">
             <a:avLst/>
           </a:prstGeom>
           <a:solidFill>
-            <a:srgbClr val="CBD5E1"/>
+            <a:srgbClr val="FFFFFF"/>
           </a:solidFill>
-          <a:ln>
+          <a:ln w="19050">
             <a:solidFill>
-              <a:srgbClr val="CBD5E1"/>
+              <a:srgbClr val="000000"/>
             </a:solidFill>
           </a:ln>
         </p:spPr>
@@ -6181,24 +6157,96 @@
       </p:sp>
       <p:sp>
         <p:nvSpPr>
-          <p:cNvPr id="5" name="Rounded Rectangle 4"/>
+          <p:cNvPr id="5" name="TextBox 4"/>
+          <p:cNvSpPr txBox="1"/>
+          <p:nvPr/>
+        </p:nvSpPr>
+        <p:spPr>
+          <a:xfrm>
+            <a:off x="914400" y="1645920"/>
+            <a:ext cx="2971800" cy="2743200"/>
+          </a:xfrm>
+          <a:prstGeom prst="rect">
+            <a:avLst/>
+          </a:prstGeom>
+          <a:noFill/>
+        </p:spPr>
+        <p:txBody>
+          <a:bodyPr wrap="square">
+            <a:spAutoFit/>
+          </a:bodyPr>
+          <a:lstStyle/>
+          <a:p>
+            <a:pPr>
+              <a:defRPr sz="1600" b="1">
+                <a:solidFill>
+                  <a:srgbClr val="000000"/>
+                </a:solidFill>
+              </a:defRPr>
+            </a:pPr>
+            <a:r>
+              <a:t>Conductores (Metales)</a:t>
+            </a:r>
+          </a:p>
+          <a:p>
+            <a:pPr algn="ctr">
+              <a:defRPr sz="3200" b="1">
+                <a:solidFill>
+                  <a:srgbClr val="000000"/>
+                </a:solidFill>
+              </a:defRPr>
+            </a:pPr>
+            <a:r>
+              <a:t>35 / 35</a:t>
+            </a:r>
+          </a:p>
+          <a:p>
+            <a:pPr algn="ctr">
+              <a:defRPr sz="1600" b="1">
+                <a:solidFill>
+                  <a:srgbClr val="000000"/>
+                </a:solidFill>
+              </a:defRPr>
+            </a:pPr>
+            <a:r>
+              <a:t>100 % Pureza</a:t>
+            </a:r>
+          </a:p>
+          <a:p>
+            <a:br/>
+            <a:pPr>
+              <a:defRPr sz="1100">
+                <a:solidFill>
+                  <a:srgbClr val="000000"/>
+                </a:solidFill>
+              </a:defRPr>
+            </a:pPr>
+            <a:r>
+              <a:t>Asignados íntegramente al Cluster 0. Cero falsos negativos.</a:t>
+            </a:r>
+          </a:p>
+        </p:txBody>
+      </p:sp>
+      <p:sp>
+        <p:nvSpPr>
+          <p:cNvPr id="6" name="Rounded Rectangle 5"/>
           <p:cNvSpPr/>
           <p:nvPr/>
         </p:nvSpPr>
         <p:spPr>
           <a:xfrm>
-            <a:off x="731520" y="1554480"/>
+            <a:off x="4434840" y="1463040"/>
             <a:ext cx="3337560" cy="3108960"/>
           </a:xfrm>
           <a:prstGeom prst="roundRect">
             <a:avLst/>
           </a:prstGeom>
           <a:solidFill>
-            <a:srgbClr val="F8FAFC"/>
+            <a:srgbClr val="FFFFFF"/>
           </a:solidFill>
-          <a:ln w="13970">
+          <a:ln w="19050">
             <a:solidFill>
-              <a:srgbClr val="D97706"/>
+              <a:srgbClr val="000000"/>
             </a:solidFill>
           </a:ln>
         </p:spPr>
@@ -6226,13 +6274,13 @@
       </p:sp>
       <p:sp>
         <p:nvSpPr>
-          <p:cNvPr id="6" name="TextBox 5"/>
+          <p:cNvPr id="7" name="TextBox 6"/>
           <p:cNvSpPr txBox="1"/>
           <p:nvPr/>
         </p:nvSpPr>
         <p:spPr>
           <a:xfrm>
-            <a:off x="914400" y="1737360"/>
+            <a:off x="4617720" y="1645920"/>
             <a:ext cx="2971800" cy="2743200"/>
           </a:xfrm>
           <a:prstGeom prst="rect">
@@ -6249,31 +6297,31 @@
             <a:pPr>
               <a:defRPr sz="1600" b="1">
                 <a:solidFill>
-                  <a:srgbClr val="D97706"/>
+                  <a:srgbClr val="000000"/>
                 </a:solidFill>
               </a:defRPr>
             </a:pPr>
             <a:r>
-              <a:t>Conductores (Metales)</a:t>
+              <a:t>Aislantes (Dieléctricos)</a:t>
             </a:r>
           </a:p>
           <a:p>
             <a:pPr algn="ctr">
               <a:defRPr sz="3200" b="1">
                 <a:solidFill>
-                  <a:srgbClr val="0F172A"/>
+                  <a:srgbClr val="000000"/>
                 </a:solidFill>
               </a:defRPr>
             </a:pPr>
             <a:r>
-              <a:t>35 / 35</a:t>
+              <a:t>10 / 10</a:t>
             </a:r>
           </a:p>
           <a:p>
             <a:pPr algn="ctr">
               <a:defRPr sz="1600" b="1">
                 <a:solidFill>
-                  <a:srgbClr val="059669"/>
+                  <a:srgbClr val="000000"/>
                 </a:solidFill>
               </a:defRPr>
             </a:pPr>
@@ -6286,36 +6334,36 @@
             <a:pPr>
               <a:defRPr sz="1100">
                 <a:solidFill>
-                  <a:srgbClr val="1E293B"/>
+                  <a:srgbClr val="000000"/>
                 </a:solidFill>
               </a:defRPr>
             </a:pPr>
             <a:r>
-              <a:t>Asignados íntegramente al Cluster 0. Cero falsos negativos.</a:t>
-            </a:r>
-          </a:p>
-        </p:txBody>
-      </p:sp>
-      <p:sp>
-        <p:nvSpPr>
-          <p:cNvPr id="7" name="Rounded Rectangle 6"/>
+              <a:t>Asignados íntegramente al Cluster 1. Coincidencia total con física.</a:t>
+            </a:r>
+          </a:p>
+        </p:txBody>
+      </p:sp>
+      <p:sp>
+        <p:nvSpPr>
+          <p:cNvPr id="8" name="Rounded Rectangle 7"/>
           <p:cNvSpPr/>
           <p:nvPr/>
         </p:nvSpPr>
         <p:spPr>
           <a:xfrm>
-            <a:off x="4434840" y="1554480"/>
+            <a:off x="8138160" y="1463040"/>
             <a:ext cx="3337560" cy="3108960"/>
           </a:xfrm>
           <a:prstGeom prst="roundRect">
             <a:avLst/>
           </a:prstGeom>
           <a:solidFill>
-            <a:srgbClr val="F8FAFC"/>
+            <a:srgbClr val="FFFFFF"/>
           </a:solidFill>
-          <a:ln w="13970">
+          <a:ln w="19050">
             <a:solidFill>
-              <a:srgbClr val="2563EB"/>
+              <a:srgbClr val="000000"/>
             </a:solidFill>
           </a:ln>
         </p:spPr>
@@ -6343,13 +6391,13 @@
       </p:sp>
       <p:sp>
         <p:nvSpPr>
-          <p:cNvPr id="8" name="TextBox 7"/>
+          <p:cNvPr id="9" name="TextBox 8"/>
           <p:cNvSpPr txBox="1"/>
           <p:nvPr/>
         </p:nvSpPr>
         <p:spPr>
           <a:xfrm>
-            <a:off x="4617720" y="1737360"/>
+            <a:off x="8321040" y="1645920"/>
             <a:ext cx="2971800" cy="2743200"/>
           </a:xfrm>
           <a:prstGeom prst="rect">
@@ -6366,73 +6414,73 @@
             <a:pPr>
               <a:defRPr sz="1600" b="1">
                 <a:solidFill>
-                  <a:srgbClr val="2563EB"/>
+                  <a:srgbClr val="000000"/>
                 </a:solidFill>
               </a:defRPr>
             </a:pPr>
             <a:r>
-              <a:t>Aislantes (Dieléctricos)</a:t>
+              <a:t>Semiconductores</a:t>
             </a:r>
           </a:p>
           <a:p>
             <a:pPr algn="ctr">
               <a:defRPr sz="3200" b="1">
                 <a:solidFill>
-                  <a:srgbClr val="0F172A"/>
+                  <a:srgbClr val="000000"/>
                 </a:solidFill>
               </a:defRPr>
             </a:pPr>
             <a:r>
-              <a:t>10 / 10</a:t>
+              <a:t>10 / 12</a:t>
             </a:r>
           </a:p>
           <a:p>
             <a:pPr algn="ctr">
               <a:defRPr sz="1600" b="1">
                 <a:solidFill>
-                  <a:srgbClr val="059669"/>
+                  <a:srgbClr val="000000"/>
                 </a:solidFill>
               </a:defRPr>
             </a:pPr>
             <a:r>
-              <a:t>100 % Pureza</a:t>
+              <a:t>83.3 % Pureza</a:t>
             </a:r>
           </a:p>
           <a:p>
             <a:br/>
             <a:pPr>
-              <a:defRPr sz="1100">
-                <a:solidFill>
-                  <a:srgbClr val="1E293B"/>
+              <a:defRPr sz="1050">
+                <a:solidFill>
+                  <a:srgbClr val="000000"/>
                 </a:solidFill>
               </a:defRPr>
             </a:pPr>
             <a:r>
-              <a:t>Asignados íntegramente al Cluster 1. Coincidencia total con física.</a:t>
-            </a:r>
-          </a:p>
-        </p:txBody>
-      </p:sp>
-      <p:sp>
-        <p:nvSpPr>
-          <p:cNvPr id="9" name="Rounded Rectangle 8"/>
+              <a:t>10 al Cluster 2. 2 semimetales clasificados en cluster 0 por conducción cuasi-metálica.</a:t>
+            </a:r>
+          </a:p>
+        </p:txBody>
+      </p:sp>
+      <p:sp>
+        <p:nvSpPr>
+          <p:cNvPr id="10" name="Rounded Rectangle 9"/>
           <p:cNvSpPr/>
           <p:nvPr/>
         </p:nvSpPr>
         <p:spPr>
           <a:xfrm>
-            <a:off x="8138160" y="1554480"/>
-            <a:ext cx="3337560" cy="3108960"/>
+            <a:off x="731520" y="4800600"/>
+            <a:ext cx="10728655" cy="1417320"/>
           </a:xfrm>
           <a:prstGeom prst="roundRect">
             <a:avLst/>
           </a:prstGeom>
           <a:solidFill>
-            <a:srgbClr val="F8FAFC"/>
+            <a:srgbClr val="FFFFFF"/>
           </a:solidFill>
-          <a:ln w="13970">
+          <a:ln w="19050">
             <a:solidFill>
-              <a:srgbClr val="059669"/>
+              <a:srgbClr val="000000"/>
             </a:solidFill>
           </a:ln>
         </p:spPr>
@@ -6460,14 +6508,14 @@
       </p:sp>
       <p:sp>
         <p:nvSpPr>
-          <p:cNvPr id="10" name="TextBox 9"/>
+          <p:cNvPr id="11" name="TextBox 10"/>
           <p:cNvSpPr txBox="1"/>
           <p:nvPr/>
         </p:nvSpPr>
         <p:spPr>
           <a:xfrm>
-            <a:off x="8321040" y="1737360"/>
-            <a:ext cx="2971800" cy="2743200"/>
+            <a:off x="1005840" y="4892040"/>
+            <a:ext cx="10149840" cy="320040"/>
           </a:xfrm>
           <a:prstGeom prst="rect">
             <a:avLst/>
@@ -6475,156 +6523,48 @@
           <a:noFill/>
         </p:spPr>
         <p:txBody>
-          <a:bodyPr wrap="square">
+          <a:bodyPr wrap="none">
             <a:spAutoFit/>
           </a:bodyPr>
           <a:lstStyle/>
           <a:p>
             <a:pPr>
-              <a:defRPr sz="1600" b="1">
-                <a:solidFill>
-                  <a:srgbClr val="059669"/>
+              <a:defRPr sz="1150" b="1">
+                <a:solidFill>
+                  <a:srgbClr val="000000"/>
                 </a:solidFill>
               </a:defRPr>
             </a:pPr>
             <a:r>
-              <a:t>Semiconductores</a:t>
-            </a:r>
-          </a:p>
-          <a:p>
-            <a:pPr algn="ctr">
-              <a:defRPr sz="3200" b="1">
-                <a:solidFill>
-                  <a:srgbClr val="0F172A"/>
-                </a:solidFill>
-              </a:defRPr>
-            </a:pPr>
-            <a:r>
-              <a:t>10 / 12</a:t>
-            </a:r>
-          </a:p>
-          <a:p>
-            <a:pPr algn="ctr">
-              <a:defRPr sz="1600" b="1">
-                <a:solidFill>
-                  <a:srgbClr val="059669"/>
-                </a:solidFill>
-              </a:defRPr>
-            </a:pPr>
-            <a:r>
-              <a:t>83.3 % Pureza</a:t>
-            </a:r>
-          </a:p>
-          <a:p>
-            <a:br/>
-            <a:pPr>
-              <a:defRPr sz="1050">
-                <a:solidFill>
-                  <a:srgbClr val="1E293B"/>
-                </a:solidFill>
-              </a:defRPr>
-            </a:pPr>
-            <a:r>
-              <a:t>10 al Cluster 2. 2 semimetales clasificados en cluster 0 por conducción cuasi-metálica.</a:t>
-            </a:r>
-          </a:p>
-        </p:txBody>
-      </p:sp>
-      <p:sp>
-        <p:nvSpPr>
-          <p:cNvPr id="11" name="Rounded Rectangle 10"/>
-          <p:cNvSpPr/>
+              <a:t>Métrica Matemática Complementaria (No Supervisada):</a:t>
+            </a:r>
+          </a:p>
+        </p:txBody>
+      </p:sp>
+      <p:pic>
+        <p:nvPicPr>
+          <p:cNvPr id="12" name="Picture 11" descr="formula_silhouette.png"/>
+          <p:cNvPicPr>
+            <a:picLocks noChangeAspect="1"/>
+          </p:cNvPicPr>
           <p:nvPr/>
-        </p:nvSpPr>
-        <p:spPr>
-          <a:xfrm>
-            <a:off x="731520" y="4892040"/>
-            <a:ext cx="10728655" cy="1325880"/>
-          </a:xfrm>
-          <a:prstGeom prst="roundRect">
-            <a:avLst/>
-          </a:prstGeom>
-          <a:solidFill>
-            <a:srgbClr val="F8FAFC"/>
-          </a:solidFill>
-          <a:ln w="13970">
-            <a:solidFill>
-              <a:srgbClr val="CBD5E1"/>
-            </a:solidFill>
-          </a:ln>
-        </p:spPr>
-        <p:style>
-          <a:lnRef idx="1">
-            <a:schemeClr val="accent1"/>
-          </a:lnRef>
-          <a:fillRef idx="3">
-            <a:schemeClr val="accent1"/>
-          </a:fillRef>
-          <a:effectRef idx="2">
-            <a:schemeClr val="accent1"/>
-          </a:effectRef>
-          <a:fontRef idx="minor">
-            <a:schemeClr val="lt1"/>
-          </a:fontRef>
-        </p:style>
-        <p:txBody>
-          <a:bodyPr rtlCol="0" anchor="ctr"/>
-          <a:lstStyle/>
-          <a:p>
-            <a:pPr algn="ctr"/>
-          </a:p>
-        </p:txBody>
-      </p:sp>
-      <p:sp>
-        <p:nvSpPr>
-          <p:cNvPr id="12" name="TextBox 11"/>
-          <p:cNvSpPr txBox="1"/>
-          <p:nvPr/>
-        </p:nvSpPr>
-        <p:spPr>
-          <a:xfrm>
-            <a:off x="1005840" y="4983480"/>
-            <a:ext cx="10149840" cy="1097280"/>
+        </p:nvPicPr>
+        <p:blipFill>
+          <a:blip r:embed="rId2"/>
+          <a:stretch>
+            <a:fillRect/>
+          </a:stretch>
+        </p:blipFill>
+        <p:spPr>
+          <a:xfrm>
+            <a:off x="2011680" y="5257800"/>
+            <a:ext cx="8046720" cy="1356845"/>
           </a:xfrm>
           <a:prstGeom prst="rect">
             <a:avLst/>
           </a:prstGeom>
-          <a:noFill/>
-        </p:spPr>
-        <p:txBody>
-          <a:bodyPr wrap="square">
-            <a:spAutoFit/>
-          </a:bodyPr>
-          <a:lstStyle/>
-          <a:p>
-            <a:pPr>
-              <a:defRPr sz="1200" b="1">
-                <a:solidFill>
-                  <a:srgbClr val="64748B"/>
-                </a:solidFill>
-              </a:defRPr>
-            </a:pPr>
-            <a:r>
-              <a:t>Métrica Matemática Complementaria (No Supervisada):</a:t>
-            </a:r>
-          </a:p>
-          <a:p>
-            <a:pPr>
-              <a:spcBef>
-                <a:spcPts val="400"/>
-              </a:spcBef>
-              <a:defRPr sz="1600" b="1">
-                <a:solidFill>
-                  <a:srgbClr val="059669"/>
-                </a:solidFill>
-              </a:defRPr>
-            </a:pPr>
-            <a:r>
-              <a:t>Silhouette Score = 0.7858   (Excelente separación y cohesión espacial según scikit-learn)</a:t>
-            </a:r>
-          </a:p>
-        </p:txBody>
-      </p:sp>
+        </p:spPr>
+      </p:pic>
     </p:spTree>
   </p:cSld>
   <p:clrMapOvr>
@@ -6651,7 +6591,7 @@
         </p:nvSpPr>
         <p:spPr>
           <a:xfrm>
-            <a:off x="731520" y="320040"/>
+            <a:off x="731520" y="365760"/>
             <a:ext cx="10698480" cy="320040"/>
           </a:xfrm>
           <a:prstGeom prst="rect">
@@ -6668,12 +6608,12 @@
             <a:pPr>
               <a:defRPr sz="1050" b="1">
                 <a:solidFill>
-                  <a:srgbClr val="059669"/>
+                  <a:srgbClr val="000000"/>
                 </a:solidFill>
               </a:defRPr>
             </a:pPr>
             <a:r>
-              <a:t>CPIA · CLUSTERING EN FÍSICA</a:t>
+              <a:t>CPIA · APRENDIZAJE NO SUPERVISADO</a:t>
             </a:r>
           </a:p>
         </p:txBody>
@@ -6686,7 +6626,7 @@
         </p:nvSpPr>
         <p:spPr>
           <a:xfrm>
-            <a:off x="731520" y="621792"/>
+            <a:off x="731520" y="685800"/>
             <a:ext cx="10698480" cy="640080"/>
           </a:xfrm>
           <a:prstGeom prst="rect">
@@ -6701,9 +6641,9 @@
           <a:lstStyle/>
           <a:p>
             <a:pPr>
-              <a:defRPr sz="2200" b="1">
-                <a:solidFill>
-                  <a:srgbClr val="0F172A"/>
+              <a:defRPr sz="2300" b="1">
+                <a:solidFill>
+                  <a:srgbClr val="000000"/>
                 </a:solidFill>
               </a:defRPr>
             </a:pPr>
@@ -6715,24 +6655,24 @@
       </p:sp>
       <p:sp>
         <p:nvSpPr>
-          <p:cNvPr id="4" name="Rectangle 3"/>
+          <p:cNvPr id="4" name="Rounded Rectangle 3"/>
           <p:cNvSpPr/>
           <p:nvPr/>
         </p:nvSpPr>
         <p:spPr>
           <a:xfrm>
-            <a:off x="731520" y="1298448"/>
-            <a:ext cx="10728655" cy="18288"/>
-          </a:xfrm>
-          <a:prstGeom prst="rect">
+            <a:off x="1097280" y="1554480"/>
+            <a:ext cx="9997135" cy="4572000"/>
+          </a:xfrm>
+          <a:prstGeom prst="roundRect">
             <a:avLst/>
           </a:prstGeom>
           <a:solidFill>
-            <a:srgbClr val="CBD5E1"/>
+            <a:srgbClr val="FFFFFF"/>
           </a:solidFill>
-          <a:ln>
+          <a:ln w="19050">
             <a:solidFill>
-              <a:srgbClr val="CBD5E1"/>
+              <a:srgbClr val="000000"/>
             </a:solidFill>
           </a:ln>
         </p:spPr>
@@ -6760,59 +6700,14 @@
       </p:sp>
       <p:sp>
         <p:nvSpPr>
-          <p:cNvPr id="5" name="Rounded Rectangle 4"/>
-          <p:cNvSpPr/>
-          <p:nvPr/>
-        </p:nvSpPr>
-        <p:spPr>
-          <a:xfrm>
-            <a:off x="1097280" y="1645920"/>
-            <a:ext cx="9997135" cy="4480560"/>
-          </a:xfrm>
-          <a:prstGeom prst="roundRect">
-            <a:avLst/>
-          </a:prstGeom>
-          <a:solidFill>
-            <a:srgbClr val="F8FAFC"/>
-          </a:solidFill>
-          <a:ln w="13970">
-            <a:solidFill>
-              <a:srgbClr val="059669"/>
-            </a:solidFill>
-          </a:ln>
-        </p:spPr>
-        <p:style>
-          <a:lnRef idx="1">
-            <a:schemeClr val="accent1"/>
-          </a:lnRef>
-          <a:fillRef idx="3">
-            <a:schemeClr val="accent1"/>
-          </a:fillRef>
-          <a:effectRef idx="2">
-            <a:schemeClr val="accent1"/>
-          </a:effectRef>
-          <a:fontRef idx="minor">
-            <a:schemeClr val="lt1"/>
-          </a:fontRef>
-        </p:style>
-        <p:txBody>
-          <a:bodyPr rtlCol="0" anchor="ctr"/>
-          <a:lstStyle/>
-          <a:p>
-            <a:pPr algn="ctr"/>
-          </a:p>
-        </p:txBody>
-      </p:sp>
-      <p:sp>
-        <p:nvSpPr>
-          <p:cNvPr id="6" name="TextBox 5"/>
+          <p:cNvPr id="5" name="TextBox 4"/>
           <p:cNvSpPr txBox="1"/>
           <p:nvPr/>
         </p:nvSpPr>
         <p:spPr>
           <a:xfrm>
-            <a:off x="1463040" y="1920240"/>
-            <a:ext cx="9235440" cy="3931920"/>
+            <a:off x="1463040" y="1828800"/>
+            <a:ext cx="9235440" cy="4023360"/>
           </a:xfrm>
           <a:prstGeom prst="rect">
             <a:avLst/>
@@ -6831,7 +6726,7 @@
               </a:spcAft>
               <a:defRPr sz="2000" b="1">
                 <a:solidFill>
-                  <a:srgbClr val="0F172A"/>
+                  <a:srgbClr val="000000"/>
                 </a:solidFill>
               </a:defRPr>
             </a:pPr>
@@ -6844,9 +6739,9 @@
               <a:spcAft>
                 <a:spcPts val="1200"/>
               </a:spcAft>
-              <a:defRPr sz="1450">
-                <a:solidFill>
-                  <a:srgbClr val="1E293B"/>
+              <a:defRPr sz="1400">
+                <a:solidFill>
+                  <a:srgbClr val="000000"/>
                 </a:solidFill>
               </a:defRPr>
             </a:pPr>
@@ -6859,9 +6754,9 @@
               <a:spcAft>
                 <a:spcPts val="1200"/>
               </a:spcAft>
-              <a:defRPr sz="1450">
-                <a:solidFill>
-                  <a:srgbClr val="1E293B"/>
+              <a:defRPr sz="1400">
+                <a:solidFill>
+                  <a:srgbClr val="000000"/>
                 </a:solidFill>
               </a:defRPr>
             </a:pPr>
@@ -6874,9 +6769,9 @@
               <a:spcAft>
                 <a:spcPts val="1200"/>
               </a:spcAft>
-              <a:defRPr sz="1450">
-                <a:solidFill>
-                  <a:srgbClr val="1E293B"/>
+              <a:defRPr sz="1400">
+                <a:solidFill>
+                  <a:srgbClr val="000000"/>
                 </a:solidFill>
               </a:defRPr>
             </a:pPr>
@@ -6889,9 +6784,9 @@
               <a:spcAft>
                 <a:spcPts val="1200"/>
               </a:spcAft>
-              <a:defRPr sz="1450">
-                <a:solidFill>
-                  <a:srgbClr val="1E293B"/>
+              <a:defRPr sz="1400">
+                <a:solidFill>
+                  <a:srgbClr val="000000"/>
                 </a:solidFill>
               </a:defRPr>
             </a:pPr>

--- a/problemas/5_Materials_Uriel/presentacion_materiales_uriel.pptx
+++ b/problemas/5_Materials_Uriel/presentacion_materiales_uriel.pptx
@@ -4186,7 +4186,11 @@
           <a:bodyPr rtlCol="0" anchor="ctr"/>
           <a:lstStyle/>
           <a:p>
-            <a:pPr algn="ctr"/>
+            <a:pPr algn="ctr">
+              <a:defRPr>
+                <a:latin typeface="Arial"/>
+              </a:defRPr>
+            </a:pPr>
           </a:p>
         </p:txBody>
       </p:sp>
@@ -4217,9 +4221,13 @@
                 <a:solidFill>
                   <a:srgbClr val="000000"/>
                 </a:solidFill>
-              </a:defRPr>
-            </a:pPr>
-            <a:r>
+                <a:latin typeface="Arial"/>
+              </a:defRPr>
+            </a:pPr>
+            <a:r>
+              <a:rPr>
+                <a:latin typeface="Arial"/>
+              </a:rPr>
               <a:t>CPIA · APRENDIZAJE NO SUPERVISADO</a:t>
             </a:r>
           </a:p>
@@ -4252,9 +4260,13 @@
                 <a:solidFill>
                   <a:srgbClr val="000000"/>
                 </a:solidFill>
-              </a:defRPr>
-            </a:pPr>
-            <a:r>
+                <a:latin typeface="Arial"/>
+              </a:defRPr>
+            </a:pPr>
+            <a:r>
+              <a:rPr>
+                <a:latin typeface="Arial"/>
+              </a:rPr>
               <a:t>Clasificación de Materiales Eléctricos mediante DBSCAN</a:t>
             </a:r>
           </a:p>
@@ -4287,9 +4299,13 @@
                 <a:solidFill>
                   <a:srgbClr val="000000"/>
                 </a:solidFill>
-              </a:defRPr>
-            </a:pPr>
-            <a:r>
+                <a:latin typeface="Arial"/>
+              </a:defRPr>
+            </a:pPr>
+            <a:r>
+              <a:rPr>
+                <a:latin typeface="Arial"/>
+              </a:rPr>
               <a:t>Descubrimiento No Supervisado de Fases Cuánticas (Conductores, Semiconductores y Aislantes)</a:t>
             </a:r>
           </a:p>
@@ -4322,9 +4338,13 @@
                 <a:solidFill>
                   <a:srgbClr val="000000"/>
                 </a:solidFill>
-              </a:defRPr>
-            </a:pPr>
-            <a:r>
+                <a:latin typeface="Arial"/>
+              </a:defRPr>
+            </a:pPr>
+            <a:r>
+              <a:rPr>
+                <a:latin typeface="Arial"/>
+              </a:rPr>
               <a:t>Uriel · Grado en Ingeniería Física (UPC)</a:t>
             </a:r>
           </a:p>
@@ -4334,9 +4354,13 @@
                 <a:solidFill>
                   <a:srgbClr val="000000"/>
                 </a:solidFill>
-              </a:defRPr>
-            </a:pPr>
-            <a:r>
+                <a:latin typeface="Arial"/>
+              </a:defRPr>
+            </a:pPr>
+            <a:r>
+              <a:rPr>
+                <a:latin typeface="Arial"/>
+              </a:rPr>
               <a:t>Equipo: Matías · Martí · Uriel · Arnau Montull</a:t>
             </a:r>
           </a:p>
@@ -4387,9 +4411,13 @@
                 <a:solidFill>
                   <a:srgbClr val="000000"/>
                 </a:solidFill>
-              </a:defRPr>
-            </a:pPr>
-            <a:r>
+                <a:latin typeface="Arial"/>
+              </a:defRPr>
+            </a:pPr>
+            <a:r>
+              <a:rPr>
+                <a:latin typeface="Arial"/>
+              </a:rPr>
               <a:t>CPIA · APRENDIZAJE NO SUPERVISADO</a:t>
             </a:r>
           </a:p>
@@ -4422,9 +4450,13 @@
                 <a:solidFill>
                   <a:srgbClr val="000000"/>
                 </a:solidFill>
-              </a:defRPr>
-            </a:pPr>
-            <a:r>
+                <a:latin typeface="Arial"/>
+              </a:defRPr>
+            </a:pPr>
+            <a:r>
+              <a:rPr>
+                <a:latin typeface="Arial"/>
+              </a:rPr>
               <a:t>El Problema Físico: Estructura de Bandas y Firmas Térmicas</a:t>
             </a:r>
           </a:p>
@@ -4471,7 +4503,11 @@
           <a:bodyPr rtlCol="0" anchor="ctr"/>
           <a:lstStyle/>
           <a:p>
-            <a:pPr algn="ctr"/>
+            <a:pPr algn="ctr">
+              <a:defRPr>
+                <a:latin typeface="Arial"/>
+              </a:defRPr>
+            </a:pPr>
           </a:p>
         </p:txBody>
       </p:sp>
@@ -4502,9 +4538,13 @@
                 <a:solidFill>
                   <a:srgbClr val="000000"/>
                 </a:solidFill>
-              </a:defRPr>
-            </a:pPr>
-            <a:r>
+                <a:latin typeface="Arial"/>
+              </a:defRPr>
+            </a:pPr>
+            <a:r>
+              <a:rPr>
+                <a:latin typeface="Arial"/>
+              </a:rPr>
               <a:t>Ecuaciones Macroscópicas de Transporte Eléctrico:</a:t>
             </a:r>
           </a:p>
@@ -4551,7 +4591,7 @@
         <p:spPr>
           <a:xfrm>
             <a:off x="731520" y="2788920"/>
-            <a:ext cx="10728655" cy="4019800"/>
+            <a:ext cx="10728655" cy="4015864"/>
           </a:xfrm>
           <a:prstGeom prst="rect">
             <a:avLst/>
@@ -4603,9 +4643,13 @@
                 <a:solidFill>
                   <a:srgbClr val="000000"/>
                 </a:solidFill>
-              </a:defRPr>
-            </a:pPr>
-            <a:r>
+                <a:latin typeface="Arial"/>
+              </a:defRPr>
+            </a:pPr>
+            <a:r>
+              <a:rPr>
+                <a:latin typeface="Arial"/>
+              </a:rPr>
               <a:t>CPIA · APRENDIZAJE NO SUPERVISADO</a:t>
             </a:r>
           </a:p>
@@ -4638,9 +4682,13 @@
                 <a:solidFill>
                   <a:srgbClr val="000000"/>
                 </a:solidFill>
-              </a:defRPr>
-            </a:pPr>
-            <a:r>
+                <a:latin typeface="Arial"/>
+              </a:defRPr>
+            </a:pPr>
+            <a:r>
+              <a:rPr>
+                <a:latin typeface="Arial"/>
+              </a:rPr>
               <a:t>Dataset Experimental y Espacio de Trabajo (log₁₀ρ, α)</a:t>
             </a:r>
           </a:p>
@@ -4687,7 +4735,11 @@
           <a:bodyPr rtlCol="0" anchor="ctr"/>
           <a:lstStyle/>
           <a:p>
-            <a:pPr algn="ctr"/>
+            <a:pPr algn="ctr">
+              <a:defRPr>
+                <a:latin typeface="Arial"/>
+              </a:defRPr>
+            </a:pPr>
           </a:p>
         </p:txBody>
       </p:sp>
@@ -4718,9 +4770,13 @@
                 <a:solidFill>
                   <a:srgbClr val="000000"/>
                 </a:solidFill>
-              </a:defRPr>
-            </a:pPr>
-            <a:r>
+                <a:latin typeface="Arial"/>
+              </a:defRPr>
+            </a:pPr>
+            <a:r>
+              <a:rPr>
+                <a:latin typeface="Arial"/>
+              </a:rPr>
               <a:t>¿Cómo clasificar sin etiquetas?</a:t>
             </a:r>
           </a:p>
@@ -4780,9 +4836,13 @@
                 <a:solidFill>
                   <a:srgbClr val="000000"/>
                 </a:solidFill>
-              </a:defRPr>
-            </a:pPr>
-            <a:r>
+                <a:latin typeface="Arial"/>
+              </a:defRPr>
+            </a:pPr>
+            <a:r>
+              <a:rPr>
+                <a:latin typeface="Arial"/>
+              </a:rPr>
               <a:t>• 57 Materiales reales: Metales puros, aleaciones, semiconductores y dieléctricos.</a:t>
             </a:r>
           </a:p>
@@ -4795,9 +4855,13 @@
                 <a:solidFill>
                   <a:srgbClr val="000000"/>
                 </a:solidFill>
-              </a:defRPr>
-            </a:pPr>
-            <a:r>
+                <a:latin typeface="Arial"/>
+              </a:defRPr>
+            </a:pPr>
+            <a:r>
+              <a:rPr>
+                <a:latin typeface="Arial"/>
+              </a:rPr>
               <a:t>• 30 órdenes de magnitud: De conductores (~10⁻⁸ Ω·m) a teflón (&gt; 10²² Ω·m).</a:t>
             </a:r>
           </a:p>
@@ -4810,9 +4874,13 @@
                 <a:solidFill>
                   <a:srgbClr val="000000"/>
                 </a:solidFill>
-              </a:defRPr>
-            </a:pPr>
-            <a:r>
+                <a:latin typeface="Arial"/>
+              </a:defRPr>
+            </a:pPr>
+            <a:r>
+              <a:rPr>
+                <a:latin typeface="Arial"/>
+              </a:rPr>
               <a:t>• Compresión logarítmica: Evita el colapso numérico en el origen.</a:t>
             </a:r>
           </a:p>
@@ -4825,9 +4893,13 @@
                 <a:solidFill>
                   <a:srgbClr val="000000"/>
                 </a:solidFill>
-              </a:defRPr>
-            </a:pPr>
-            <a:r>
+                <a:latin typeface="Arial"/>
+              </a:defRPr>
+            </a:pPr>
+            <a:r>
+              <a:rPr>
+                <a:latin typeface="Arial"/>
+              </a:rPr>
               <a:t>• Firma cuántica: α delata el origen microscópico del transporte.</a:t>
             </a:r>
           </a:p>
@@ -4840,9 +4912,13 @@
                 <a:solidFill>
                   <a:srgbClr val="000000"/>
                 </a:solidFill>
-              </a:defRPr>
-            </a:pPr>
-            <a:r>
+                <a:latin typeface="Arial"/>
+              </a:defRPr>
+            </a:pPr>
+            <a:r>
+              <a:rPr>
+                <a:latin typeface="Arial"/>
+              </a:rPr>
               <a:t>• Objetivo no supervisado: Descubrir las clases automáticamente por densidad.</a:t>
             </a:r>
           </a:p>
@@ -4917,9 +4993,13 @@
                 <a:solidFill>
                   <a:srgbClr val="000000"/>
                 </a:solidFill>
-              </a:defRPr>
-            </a:pPr>
-            <a:r>
+                <a:latin typeface="Arial"/>
+              </a:defRPr>
+            </a:pPr>
+            <a:r>
+              <a:rPr>
+                <a:latin typeface="Arial"/>
+              </a:rPr>
               <a:t>CPIA · APRENDIZAJE NO SUPERVISADO</a:t>
             </a:r>
           </a:p>
@@ -4952,9 +5032,13 @@
                 <a:solidFill>
                   <a:srgbClr val="000000"/>
                 </a:solidFill>
-              </a:defRPr>
-            </a:pPr>
-            <a:r>
+                <a:latin typeface="Arial"/>
+              </a:defRPr>
+            </a:pPr>
+            <a:r>
+              <a:rPr>
+                <a:latin typeface="Arial"/>
+              </a:rPr>
               <a:t>¿Por qué DBSCAN y no K-Means?</a:t>
             </a:r>
           </a:p>
@@ -5001,7 +5085,11 @@
           <a:bodyPr rtlCol="0" anchor="ctr"/>
           <a:lstStyle/>
           <a:p>
-            <a:pPr algn="ctr"/>
+            <a:pPr algn="ctr">
+              <a:defRPr>
+                <a:latin typeface="Arial"/>
+              </a:defRPr>
+            </a:pPr>
           </a:p>
         </p:txBody>
       </p:sp>
@@ -5032,9 +5120,13 @@
                 <a:solidFill>
                   <a:srgbClr val="000000"/>
                 </a:solidFill>
-              </a:defRPr>
-            </a:pPr>
-            <a:r>
+                <a:latin typeface="Arial"/>
+              </a:defRPr>
+            </a:pPr>
+            <a:r>
+              <a:rPr>
+                <a:latin typeface="Arial"/>
+              </a:rPr>
               <a:t>K-Means (Inadecuado en este dominio)</a:t>
             </a:r>
           </a:p>
@@ -5047,9 +5139,13 @@
                 <a:solidFill>
                   <a:srgbClr val="000000"/>
                 </a:solidFill>
-              </a:defRPr>
-            </a:pPr>
-            <a:r>
+                <a:latin typeface="Arial"/>
+              </a:defRPr>
+            </a:pPr>
+            <a:r>
+              <a:rPr>
+                <a:latin typeface="Arial"/>
+              </a:rPr>
               <a:t>✖  Asume grupos esféricos e isodensos (igual varianza).</a:t>
             </a:r>
           </a:p>
@@ -5062,9 +5158,13 @@
                 <a:solidFill>
                   <a:srgbClr val="000000"/>
                 </a:solidFill>
-              </a:defRPr>
-            </a:pPr>
-            <a:r>
+                <a:latin typeface="Arial"/>
+              </a:defRPr>
+            </a:pPr>
+            <a:r>
+              <a:rPr>
+                <a:latin typeface="Arial"/>
+              </a:rPr>
               <a:t>✖  Fractura el grupo disperso de aislantes.</a:t>
             </a:r>
           </a:p>
@@ -5077,9 +5177,13 @@
                 <a:solidFill>
                   <a:srgbClr val="000000"/>
                 </a:solidFill>
-              </a:defRPr>
-            </a:pPr>
-            <a:r>
+                <a:latin typeface="Arial"/>
+              </a:defRPr>
+            </a:pPr>
+            <a:r>
+              <a:rPr>
+                <a:latin typeface="Arial"/>
+              </a:rPr>
               <a:t>✖  Exige prefijar 'k' a priori de forma arbitraria.</a:t>
             </a:r>
           </a:p>
@@ -5092,9 +5196,13 @@
                 <a:solidFill>
                   <a:srgbClr val="000000"/>
                 </a:solidFill>
-              </a:defRPr>
-            </a:pPr>
-            <a:r>
+                <a:latin typeface="Arial"/>
+              </a:defRPr>
+            </a:pPr>
+            <a:r>
+              <a:rPr>
+                <a:latin typeface="Arial"/>
+              </a:rPr>
               <a:t>✖  No detecta ruido: fuerza anomalías a tener cluster.</a:t>
             </a:r>
           </a:p>
@@ -5105,9 +5213,13 @@
                 <a:solidFill>
                   <a:srgbClr val="000000"/>
                 </a:solidFill>
-              </a:defRPr>
-            </a:pPr>
-            <a:r>
+                <a:latin typeface="Arial"/>
+              </a:defRPr>
+            </a:pPr>
+            <a:r>
+              <a:rPr>
+                <a:latin typeface="Arial"/>
+              </a:rPr>
               <a:t>DBSCAN (Elección Óptima)</a:t>
             </a:r>
           </a:p>
@@ -5120,9 +5232,13 @@
                 <a:solidFill>
                   <a:srgbClr val="000000"/>
                 </a:solidFill>
-              </a:defRPr>
-            </a:pPr>
-            <a:r>
+                <a:latin typeface="Arial"/>
+              </a:defRPr>
+            </a:pPr>
+            <a:r>
+              <a:rPr>
+                <a:latin typeface="Arial"/>
+              </a:rPr>
               <a:t>✔  Conecta por densidad local de cualquier forma.</a:t>
             </a:r>
           </a:p>
@@ -5135,9 +5251,13 @@
                 <a:solidFill>
                   <a:srgbClr val="000000"/>
                 </a:solidFill>
-              </a:defRPr>
-            </a:pPr>
-            <a:r>
+                <a:latin typeface="Arial"/>
+              </a:defRPr>
+            </a:pPr>
+            <a:r>
+              <a:rPr>
+                <a:latin typeface="Arial"/>
+              </a:rPr>
               <a:t>✔  Tolera metales hiperdensos y aislantes laxos.</a:t>
             </a:r>
           </a:p>
@@ -5150,9 +5270,13 @@
                 <a:solidFill>
                   <a:srgbClr val="000000"/>
                 </a:solidFill>
-              </a:defRPr>
-            </a:pPr>
-            <a:r>
+                <a:latin typeface="Arial"/>
+              </a:defRPr>
+            </a:pPr>
+            <a:r>
+              <a:rPr>
+                <a:latin typeface="Arial"/>
+              </a:rPr>
               <a:t>✔  Descubre el número de clusters sin prefijar k.</a:t>
             </a:r>
           </a:p>
@@ -5165,9 +5289,13 @@
                 <a:solidFill>
                   <a:srgbClr val="000000"/>
                 </a:solidFill>
-              </a:defRPr>
-            </a:pPr>
-            <a:r>
+                <a:latin typeface="Arial"/>
+              </a:defRPr>
+            </a:pPr>
+            <a:r>
+              <a:rPr>
+                <a:latin typeface="Arial"/>
+              </a:rPr>
               <a:t>✔  Etiqueta ruido y anomalías de forma nativa (-1).</a:t>
             </a:r>
           </a:p>
@@ -5242,9 +5370,13 @@
                 <a:solidFill>
                   <a:srgbClr val="000000"/>
                 </a:solidFill>
-              </a:defRPr>
-            </a:pPr>
-            <a:r>
+                <a:latin typeface="Arial"/>
+              </a:defRPr>
+            </a:pPr>
+            <a:r>
+              <a:rPr>
+                <a:latin typeface="Arial"/>
+              </a:rPr>
               <a:t>CPIA · APRENDIZAJE NO SUPERVISADO</a:t>
             </a:r>
           </a:p>
@@ -5277,9 +5409,13 @@
                 <a:solidFill>
                   <a:srgbClr val="000000"/>
                 </a:solidFill>
-              </a:defRPr>
-            </a:pPr>
-            <a:r>
+                <a:latin typeface="Arial"/>
+              </a:defRPr>
+            </a:pPr>
+            <a:r>
+              <a:rPr>
+                <a:latin typeface="Arial"/>
+              </a:rPr>
               <a:t>Metodología Matemática: Fórmulas y Parámetros</a:t>
             </a:r>
           </a:p>
@@ -5326,7 +5462,11 @@
           <a:bodyPr rtlCol="0" anchor="ctr"/>
           <a:lstStyle/>
           <a:p>
-            <a:pPr algn="ctr"/>
+            <a:pPr algn="ctr">
+              <a:defRPr>
+                <a:latin typeface="Arial"/>
+              </a:defRPr>
+            </a:pPr>
           </a:p>
         </p:txBody>
       </p:sp>
@@ -5357,13 +5497,20 @@
                 <a:solidFill>
                   <a:srgbClr val="000000"/>
                 </a:solidFill>
-              </a:defRPr>
-            </a:pPr>
-            <a:r>
+                <a:latin typeface="Arial"/>
+              </a:defRPr>
+            </a:pPr>
+            <a:r>
+              <a:rPr>
+                <a:latin typeface="Arial"/>
+              </a:rPr>
               <a:t>1. Estandarización Z-Score</a:t>
             </a:r>
             <a:br/>
             <a:r>
+              <a:rPr>
+                <a:latin typeface="Arial"/>
+              </a:rPr>
               <a:t>(Implementada con NumPy)</a:t>
             </a:r>
           </a:p>
@@ -5423,9 +5570,13 @@
                 <a:solidFill>
                   <a:srgbClr val="000000"/>
                 </a:solidFill>
-              </a:defRPr>
-            </a:pPr>
-            <a:r>
+                <a:latin typeface="Arial"/>
+              </a:defRPr>
+            </a:pPr>
+            <a:r>
+              <a:rPr>
+                <a:latin typeface="Arial"/>
+              </a:rPr>
               <a:t>• μ = Media muestral por columna</a:t>
             </a:r>
           </a:p>
@@ -5438,9 +5589,13 @@
                 <a:solidFill>
                   <a:srgbClr val="000000"/>
                 </a:solidFill>
-              </a:defRPr>
-            </a:pPr>
-            <a:r>
+                <a:latin typeface="Arial"/>
+              </a:defRPr>
+            </a:pPr>
+            <a:r>
+              <a:rPr>
+                <a:latin typeface="Arial"/>
+              </a:rPr>
               <a:t>• σ = Desviación estándar típica</a:t>
             </a:r>
           </a:p>
@@ -5453,9 +5608,13 @@
                 <a:solidFill>
                   <a:srgbClr val="000000"/>
                 </a:solidFill>
-              </a:defRPr>
-            </a:pPr>
-            <a:r>
+                <a:latin typeface="Arial"/>
+              </a:defRPr>
+            </a:pPr>
+            <a:r>
+              <a:rPr>
+                <a:latin typeface="Arial"/>
+              </a:rPr>
               <a:t>• Resultado: Media = 0, Varianza = 1</a:t>
             </a:r>
           </a:p>
@@ -5468,9 +5627,13 @@
                 <a:solidFill>
                   <a:srgbClr val="000000"/>
                 </a:solidFill>
-              </a:defRPr>
-            </a:pPr>
-            <a:r>
+                <a:latin typeface="Arial"/>
+              </a:defRPr>
+            </a:pPr>
+            <a:r>
+              <a:rPr>
+                <a:latin typeface="Arial"/>
+              </a:rPr>
               <a:t>• Imprescindible: equipara el rango de log₁₀ρ (~31) con el de α (~0.08) para la distancia euclídea.</a:t>
             </a:r>
           </a:p>
@@ -5517,7 +5680,11 @@
           <a:bodyPr rtlCol="0" anchor="ctr"/>
           <a:lstStyle/>
           <a:p>
-            <a:pPr algn="ctr"/>
+            <a:pPr algn="ctr">
+              <a:defRPr>
+                <a:latin typeface="Arial"/>
+              </a:defRPr>
+            </a:pPr>
           </a:p>
         </p:txBody>
       </p:sp>
@@ -5548,13 +5715,20 @@
                 <a:solidFill>
                   <a:srgbClr val="000000"/>
                 </a:solidFill>
-              </a:defRPr>
-            </a:pPr>
-            <a:r>
+                <a:latin typeface="Arial"/>
+              </a:defRPr>
+            </a:pPr>
+            <a:r>
+              <a:rPr>
+                <a:latin typeface="Arial"/>
+              </a:rPr>
               <a:t>2. Criterio de Núcleo</a:t>
             </a:r>
             <a:br/>
             <a:r>
+              <a:rPr>
+                <a:latin typeface="Arial"/>
+              </a:rPr>
               <a:t>(DBSCAN Espacial)</a:t>
             </a:r>
           </a:p>
@@ -5614,9 +5788,13 @@
                 <a:solidFill>
                   <a:srgbClr val="000000"/>
                 </a:solidFill>
-              </a:defRPr>
-            </a:pPr>
-            <a:r>
+                <a:latin typeface="Arial"/>
+              </a:defRPr>
+            </a:pPr>
+            <a:r>
+              <a:rPr>
+                <a:latin typeface="Arial"/>
+              </a:rPr>
               <a:t>• d(p, q) = Distancia Euclídea en 2D</a:t>
             </a:r>
           </a:p>
@@ -5629,9 +5807,13 @@
                 <a:solidFill>
                   <a:srgbClr val="000000"/>
                 </a:solidFill>
-              </a:defRPr>
-            </a:pPr>
-            <a:r>
+                <a:latin typeface="Arial"/>
+              </a:defRPr>
+            </a:pPr>
+            <a:r>
+              <a:rPr>
+                <a:latin typeface="Arial"/>
+              </a:rPr>
               <a:t>• Punto Núcleo (Core Point):</a:t>
             </a:r>
           </a:p>
@@ -5644,9 +5826,13 @@
                 <a:solidFill>
                   <a:srgbClr val="000000"/>
                 </a:solidFill>
-              </a:defRPr>
-            </a:pPr>
-            <a:r>
+                <a:latin typeface="Arial"/>
+              </a:defRPr>
+            </a:pPr>
+            <a:r>
+              <a:rPr>
+                <a:latin typeface="Arial"/>
+              </a:rPr>
               <a:t>•    |N_ε(p)| ≥ min_samples</a:t>
             </a:r>
           </a:p>
@@ -5659,9 +5845,13 @@
                 <a:solidFill>
                   <a:srgbClr val="000000"/>
                 </a:solidFill>
-              </a:defRPr>
-            </a:pPr>
-            <a:r>
+                <a:latin typeface="Arial"/>
+              </a:defRPr>
+            </a:pPr>
+            <a:r>
+              <a:rPr>
+                <a:latin typeface="Arial"/>
+              </a:rPr>
               <a:t>• Punto Frontera (Border):</a:t>
             </a:r>
           </a:p>
@@ -5674,9 +5864,13 @@
                 <a:solidFill>
                   <a:srgbClr val="000000"/>
                 </a:solidFill>
-              </a:defRPr>
-            </a:pPr>
-            <a:r>
+                <a:latin typeface="Arial"/>
+              </a:defRPr>
+            </a:pPr>
+            <a:r>
+              <a:rPr>
+                <a:latin typeface="Arial"/>
+              </a:rPr>
               <a:t>•    Alcanzable desde un núcleo</a:t>
             </a:r>
           </a:p>
@@ -5689,9 +5883,13 @@
                 <a:solidFill>
                   <a:srgbClr val="000000"/>
                 </a:solidFill>
-              </a:defRPr>
-            </a:pPr>
-            <a:r>
+                <a:latin typeface="Arial"/>
+              </a:defRPr>
+            </a:pPr>
+            <a:r>
+              <a:rPr>
+                <a:latin typeface="Arial"/>
+              </a:rPr>
               <a:t>• Ruido (Noise):</a:t>
             </a:r>
           </a:p>
@@ -5704,9 +5902,13 @@
                 <a:solidFill>
                   <a:srgbClr val="000000"/>
                 </a:solidFill>
-              </a:defRPr>
-            </a:pPr>
-            <a:r>
+                <a:latin typeface="Arial"/>
+              </a:defRPr>
+            </a:pPr>
+            <a:r>
+              <a:rPr>
+                <a:latin typeface="Arial"/>
+              </a:rPr>
               <a:t>•    No alcanzable (|N_ε| &lt; min_samples)</a:t>
             </a:r>
           </a:p>
@@ -5753,7 +5955,11 @@
           <a:bodyPr rtlCol="0" anchor="ctr"/>
           <a:lstStyle/>
           <a:p>
-            <a:pPr algn="ctr"/>
+            <a:pPr algn="ctr">
+              <a:defRPr>
+                <a:latin typeface="Arial"/>
+              </a:defRPr>
+            </a:pPr>
           </a:p>
         </p:txBody>
       </p:sp>
@@ -5784,13 +5990,20 @@
                 <a:solidFill>
                   <a:srgbClr val="000000"/>
                 </a:solidFill>
-              </a:defRPr>
-            </a:pPr>
-            <a:r>
+                <a:latin typeface="Arial"/>
+              </a:defRPr>
+            </a:pPr>
+            <a:r>
+              <a:rPr>
+                <a:latin typeface="Arial"/>
+              </a:rPr>
               <a:t>3. Parámetros Fijados</a:t>
             </a:r>
             <a:br/>
             <a:r>
+              <a:rPr>
+                <a:latin typeface="Arial"/>
+              </a:rPr>
               <a:t>(Criterio Objetivo)</a:t>
             </a:r>
           </a:p>
@@ -5850,9 +6063,13 @@
                 <a:solidFill>
                   <a:srgbClr val="000000"/>
                 </a:solidFill>
-              </a:defRPr>
-            </a:pPr>
-            <a:r>
+                <a:latin typeface="Arial"/>
+              </a:defRPr>
+            </a:pPr>
+            <a:r>
+              <a:rPr>
+                <a:latin typeface="Arial"/>
+              </a:rPr>
               <a:t>• min_samples = 3:</a:t>
             </a:r>
           </a:p>
@@ -5865,9 +6082,13 @@
                 <a:solidFill>
                   <a:srgbClr val="000000"/>
                 </a:solidFill>
-              </a:defRPr>
-            </a:pPr>
-            <a:r>
+                <a:latin typeface="Arial"/>
+              </a:defRPr>
+            </a:pPr>
+            <a:r>
+              <a:rPr>
+                <a:latin typeface="Arial"/>
+              </a:rPr>
               <a:t>•    Regla canónica k ≥ d + 1 (dimensión d = 2).</a:t>
             </a:r>
           </a:p>
@@ -5880,9 +6101,13 @@
                 <a:solidFill>
                   <a:srgbClr val="000000"/>
                 </a:solidFill>
-              </a:defRPr>
-            </a:pPr>
-            <a:r>
+                <a:latin typeface="Arial"/>
+              </a:defRPr>
+            </a:pPr>
+            <a:r>
+              <a:rPr>
+                <a:latin typeface="Arial"/>
+              </a:rPr>
               <a:t>• ε = 0.65:</a:t>
             </a:r>
           </a:p>
@@ -5895,9 +6120,13 @@
                 <a:solidFill>
                   <a:srgbClr val="000000"/>
                 </a:solidFill>
-              </a:defRPr>
-            </a:pPr>
-            <a:r>
+                <a:latin typeface="Arial"/>
+              </a:defRPr>
+            </a:pPr>
+            <a:r>
+              <a:rPr>
+                <a:latin typeface="Arial"/>
+              </a:rPr>
               <a:t>•    Determinado mediante gráfico k-NN (codo).</a:t>
             </a:r>
           </a:p>
@@ -5910,9 +6139,13 @@
                 <a:solidFill>
                   <a:srgbClr val="000000"/>
                 </a:solidFill>
-              </a:defRPr>
-            </a:pPr>
-            <a:r>
+                <a:latin typeface="Arial"/>
+              </a:defRPr>
+            </a:pPr>
+            <a:r>
+              <a:rPr>
+                <a:latin typeface="Arial"/>
+              </a:rPr>
               <a:t>•    Ventana óptima que aísla aislantes sin fusionar metales.</a:t>
             </a:r>
           </a:p>
@@ -5925,9 +6158,13 @@
                 <a:solidFill>
                   <a:srgbClr val="000000"/>
                 </a:solidFill>
-              </a:defRPr>
-            </a:pPr>
-            <a:r>
+                <a:latin typeface="Arial"/>
+              </a:defRPr>
+            </a:pPr>
+            <a:r>
+              <a:rPr>
+                <a:latin typeface="Arial"/>
+              </a:rPr>
               <a:t>• Ejecución: scikit-learn DBSCAN</a:t>
             </a:r>
           </a:p>
@@ -5978,9 +6215,13 @@
                 <a:solidFill>
                   <a:srgbClr val="000000"/>
                 </a:solidFill>
-              </a:defRPr>
-            </a:pPr>
-            <a:r>
+                <a:latin typeface="Arial"/>
+              </a:defRPr>
+            </a:pPr>
+            <a:r>
+              <a:rPr>
+                <a:latin typeface="Arial"/>
+              </a:rPr>
               <a:t>Resultado DBSCAN: Clasificación 2D de Materiales Eléctricos</a:t>
             </a:r>
           </a:p>
@@ -5990,9 +6231,13 @@
                 <a:solidFill>
                   <a:srgbClr val="000000"/>
                 </a:solidFill>
-              </a:defRPr>
-            </a:pPr>
-            <a:r>
+                <a:latin typeface="Arial"/>
+              </a:defRPr>
+            </a:pPr>
+            <a:r>
+              <a:rPr>
+                <a:latin typeface="Arial"/>
+              </a:rPr>
               <a:t>ε = 0.65 · min_samples = 3  |  3 Clusters descubiertos  |  0 Ruido</a:t>
             </a:r>
           </a:p>
@@ -6067,9 +6312,13 @@
                 <a:solidFill>
                   <a:srgbClr val="000000"/>
                 </a:solidFill>
-              </a:defRPr>
-            </a:pPr>
-            <a:r>
+                <a:latin typeface="Arial"/>
+              </a:defRPr>
+            </a:pPr>
+            <a:r>
+              <a:rPr>
+                <a:latin typeface="Arial"/>
+              </a:rPr>
               <a:t>CPIA · APRENDIZAJE NO SUPERVISADO</a:t>
             </a:r>
           </a:p>
@@ -6102,9 +6351,13 @@
                 <a:solidFill>
                   <a:srgbClr val="000000"/>
                 </a:solidFill>
-              </a:defRPr>
-            </a:pPr>
-            <a:r>
+                <a:latin typeface="Arial"/>
+              </a:defRPr>
+            </a:pPr>
+            <a:r>
+              <a:rPr>
+                <a:latin typeface="Arial"/>
+              </a:rPr>
               <a:t>Validación Experimental: Matriz de Contingencia Física</a:t>
             </a:r>
           </a:p>
@@ -6151,7 +6404,11 @@
           <a:bodyPr rtlCol="0" anchor="ctr"/>
           <a:lstStyle/>
           <a:p>
-            <a:pPr algn="ctr"/>
+            <a:pPr algn="ctr">
+              <a:defRPr>
+                <a:latin typeface="Arial"/>
+              </a:defRPr>
+            </a:pPr>
           </a:p>
         </p:txBody>
       </p:sp>
@@ -6182,9 +6439,13 @@
                 <a:solidFill>
                   <a:srgbClr val="000000"/>
                 </a:solidFill>
-              </a:defRPr>
-            </a:pPr>
-            <a:r>
+                <a:latin typeface="Arial"/>
+              </a:defRPr>
+            </a:pPr>
+            <a:r>
+              <a:rPr>
+                <a:latin typeface="Arial"/>
+              </a:rPr>
               <a:t>Conductores (Metales)</a:t>
             </a:r>
           </a:p>
@@ -6194,9 +6455,13 @@
                 <a:solidFill>
                   <a:srgbClr val="000000"/>
                 </a:solidFill>
-              </a:defRPr>
-            </a:pPr>
-            <a:r>
+                <a:latin typeface="Arial"/>
+              </a:defRPr>
+            </a:pPr>
+            <a:r>
+              <a:rPr>
+                <a:latin typeface="Arial"/>
+              </a:rPr>
               <a:t>35 / 35</a:t>
             </a:r>
           </a:p>
@@ -6206,9 +6471,13 @@
                 <a:solidFill>
                   <a:srgbClr val="000000"/>
                 </a:solidFill>
-              </a:defRPr>
-            </a:pPr>
-            <a:r>
+                <a:latin typeface="Arial"/>
+              </a:defRPr>
+            </a:pPr>
+            <a:r>
+              <a:rPr>
+                <a:latin typeface="Arial"/>
+              </a:rPr>
               <a:t>100 % Pureza</a:t>
             </a:r>
           </a:p>
@@ -6219,9 +6488,13 @@
                 <a:solidFill>
                   <a:srgbClr val="000000"/>
                 </a:solidFill>
-              </a:defRPr>
-            </a:pPr>
-            <a:r>
+                <a:latin typeface="Arial"/>
+              </a:defRPr>
+            </a:pPr>
+            <a:r>
+              <a:rPr>
+                <a:latin typeface="Arial"/>
+              </a:rPr>
               <a:t>Asignados íntegramente al Cluster 0. Cero falsos negativos.</a:t>
             </a:r>
           </a:p>
@@ -6268,7 +6541,11 @@
           <a:bodyPr rtlCol="0" anchor="ctr"/>
           <a:lstStyle/>
           <a:p>
-            <a:pPr algn="ctr"/>
+            <a:pPr algn="ctr">
+              <a:defRPr>
+                <a:latin typeface="Arial"/>
+              </a:defRPr>
+            </a:pPr>
           </a:p>
         </p:txBody>
       </p:sp>
@@ -6299,9 +6576,13 @@
                 <a:solidFill>
                   <a:srgbClr val="000000"/>
                 </a:solidFill>
-              </a:defRPr>
-            </a:pPr>
-            <a:r>
+                <a:latin typeface="Arial"/>
+              </a:defRPr>
+            </a:pPr>
+            <a:r>
+              <a:rPr>
+                <a:latin typeface="Arial"/>
+              </a:rPr>
               <a:t>Aislantes (Dieléctricos)</a:t>
             </a:r>
           </a:p>
@@ -6311,9 +6592,13 @@
                 <a:solidFill>
                   <a:srgbClr val="000000"/>
                 </a:solidFill>
-              </a:defRPr>
-            </a:pPr>
-            <a:r>
+                <a:latin typeface="Arial"/>
+              </a:defRPr>
+            </a:pPr>
+            <a:r>
+              <a:rPr>
+                <a:latin typeface="Arial"/>
+              </a:rPr>
               <a:t>10 / 10</a:t>
             </a:r>
           </a:p>
@@ -6323,9 +6608,13 @@
                 <a:solidFill>
                   <a:srgbClr val="000000"/>
                 </a:solidFill>
-              </a:defRPr>
-            </a:pPr>
-            <a:r>
+                <a:latin typeface="Arial"/>
+              </a:defRPr>
+            </a:pPr>
+            <a:r>
+              <a:rPr>
+                <a:latin typeface="Arial"/>
+              </a:rPr>
               <a:t>100 % Pureza</a:t>
             </a:r>
           </a:p>
@@ -6336,9 +6625,13 @@
                 <a:solidFill>
                   <a:srgbClr val="000000"/>
                 </a:solidFill>
-              </a:defRPr>
-            </a:pPr>
-            <a:r>
+                <a:latin typeface="Arial"/>
+              </a:defRPr>
+            </a:pPr>
+            <a:r>
+              <a:rPr>
+                <a:latin typeface="Arial"/>
+              </a:rPr>
               <a:t>Asignados íntegramente al Cluster 1. Coincidencia total con física.</a:t>
             </a:r>
           </a:p>
@@ -6385,7 +6678,11 @@
           <a:bodyPr rtlCol="0" anchor="ctr"/>
           <a:lstStyle/>
           <a:p>
-            <a:pPr algn="ctr"/>
+            <a:pPr algn="ctr">
+              <a:defRPr>
+                <a:latin typeface="Arial"/>
+              </a:defRPr>
+            </a:pPr>
           </a:p>
         </p:txBody>
       </p:sp>
@@ -6416,9 +6713,13 @@
                 <a:solidFill>
                   <a:srgbClr val="000000"/>
                 </a:solidFill>
-              </a:defRPr>
-            </a:pPr>
-            <a:r>
+                <a:latin typeface="Arial"/>
+              </a:defRPr>
+            </a:pPr>
+            <a:r>
+              <a:rPr>
+                <a:latin typeface="Arial"/>
+              </a:rPr>
               <a:t>Semiconductores</a:t>
             </a:r>
           </a:p>
@@ -6428,9 +6729,13 @@
                 <a:solidFill>
                   <a:srgbClr val="000000"/>
                 </a:solidFill>
-              </a:defRPr>
-            </a:pPr>
-            <a:r>
+                <a:latin typeface="Arial"/>
+              </a:defRPr>
+            </a:pPr>
+            <a:r>
+              <a:rPr>
+                <a:latin typeface="Arial"/>
+              </a:rPr>
               <a:t>10 / 12</a:t>
             </a:r>
           </a:p>
@@ -6440,9 +6745,13 @@
                 <a:solidFill>
                   <a:srgbClr val="000000"/>
                 </a:solidFill>
-              </a:defRPr>
-            </a:pPr>
-            <a:r>
+                <a:latin typeface="Arial"/>
+              </a:defRPr>
+            </a:pPr>
+            <a:r>
+              <a:rPr>
+                <a:latin typeface="Arial"/>
+              </a:rPr>
               <a:t>83.3 % Pureza</a:t>
             </a:r>
           </a:p>
@@ -6453,9 +6762,13 @@
                 <a:solidFill>
                   <a:srgbClr val="000000"/>
                 </a:solidFill>
-              </a:defRPr>
-            </a:pPr>
-            <a:r>
+                <a:latin typeface="Arial"/>
+              </a:defRPr>
+            </a:pPr>
+            <a:r>
+              <a:rPr>
+                <a:latin typeface="Arial"/>
+              </a:rPr>
               <a:t>10 al Cluster 2. 2 semimetales clasificados en cluster 0 por conducción cuasi-metálica.</a:t>
             </a:r>
           </a:p>
@@ -6502,7 +6815,11 @@
           <a:bodyPr rtlCol="0" anchor="ctr"/>
           <a:lstStyle/>
           <a:p>
-            <a:pPr algn="ctr"/>
+            <a:pPr algn="ctr">
+              <a:defRPr>
+                <a:latin typeface="Arial"/>
+              </a:defRPr>
+            </a:pPr>
           </a:p>
         </p:txBody>
       </p:sp>
@@ -6533,9 +6850,13 @@
                 <a:solidFill>
                   <a:srgbClr val="000000"/>
                 </a:solidFill>
-              </a:defRPr>
-            </a:pPr>
-            <a:r>
+                <a:latin typeface="Arial"/>
+              </a:defRPr>
+            </a:pPr>
+            <a:r>
+              <a:rPr>
+                <a:latin typeface="Arial"/>
+              </a:rPr>
               <a:t>Métrica Matemática Complementaria (No Supervisada):</a:t>
             </a:r>
           </a:p>
@@ -6610,9 +6931,13 @@
                 <a:solidFill>
                   <a:srgbClr val="000000"/>
                 </a:solidFill>
-              </a:defRPr>
-            </a:pPr>
-            <a:r>
+                <a:latin typeface="Arial"/>
+              </a:defRPr>
+            </a:pPr>
+            <a:r>
+              <a:rPr>
+                <a:latin typeface="Arial"/>
+              </a:rPr>
               <a:t>CPIA · APRENDIZAJE NO SUPERVISADO</a:t>
             </a:r>
           </a:p>
@@ -6645,9 +6970,13 @@
                 <a:solidFill>
                   <a:srgbClr val="000000"/>
                 </a:solidFill>
-              </a:defRPr>
-            </a:pPr>
-            <a:r>
+                <a:latin typeface="Arial"/>
+              </a:defRPr>
+            </a:pPr>
+            <a:r>
+              <a:rPr>
+                <a:latin typeface="Arial"/>
+              </a:rPr>
               <a:t>Conclusiones</a:t>
             </a:r>
           </a:p>
@@ -6694,7 +7023,11 @@
           <a:bodyPr rtlCol="0" anchor="ctr"/>
           <a:lstStyle/>
           <a:p>
-            <a:pPr algn="ctr"/>
+            <a:pPr algn="ctr">
+              <a:defRPr>
+                <a:latin typeface="Arial"/>
+              </a:defRPr>
+            </a:pPr>
           </a:p>
         </p:txBody>
       </p:sp>
@@ -6728,9 +7061,13 @@
                 <a:solidFill>
                   <a:srgbClr val="000000"/>
                 </a:solidFill>
-              </a:defRPr>
-            </a:pPr>
-            <a:r>
+                <a:latin typeface="Arial"/>
+              </a:defRPr>
+            </a:pPr>
+            <a:r>
+              <a:rPr>
+                <a:latin typeface="Arial"/>
+              </a:rPr>
               <a:t>Puntos Clave del Proyecto</a:t>
             </a:r>
           </a:p>
@@ -6743,9 +7080,13 @@
                 <a:solidFill>
                   <a:srgbClr val="000000"/>
                 </a:solidFill>
-              </a:defRPr>
-            </a:pPr>
-            <a:r>
+                <a:latin typeface="Arial"/>
+              </a:defRPr>
+            </a:pPr>
+            <a:r>
+              <a:rPr>
+                <a:latin typeface="Arial"/>
+              </a:rPr>
               <a:t>✔  Física de bandas sin supervisión:  DBSCAN descubre de manera autónoma las 3 fases de conducción (conductores, aislantes y semiconductores) a partir de propiedades macroscópicas.</a:t>
             </a:r>
           </a:p>
@@ -6758,9 +7099,13 @@
                 <a:solidFill>
                   <a:srgbClr val="000000"/>
                 </a:solidFill>
-              </a:defRPr>
-            </a:pPr>
-            <a:r>
+                <a:latin typeface="Arial"/>
+              </a:defRPr>
+            </a:pPr>
+            <a:r>
+              <a:rPr>
+                <a:latin typeface="Arial"/>
+              </a:rPr>
               <a:t>✔  Inmune a densidades dispares:  Supera a K-Means agrupando simultáneamente la ultra-densidad de los metales y la dispersión de 12 órdenes de magnitud de los aislantes.</a:t>
             </a:r>
           </a:p>
@@ -6773,9 +7118,13 @@
                 <a:solidFill>
                   <a:srgbClr val="000000"/>
                 </a:solidFill>
-              </a:defRPr>
-            </a:pPr>
-            <a:r>
+                <a:latin typeface="Arial"/>
+              </a:defRPr>
+            </a:pPr>
+            <a:r>
+              <a:rPr>
+                <a:latin typeface="Arial"/>
+              </a:rPr>
               <a:t>✔  Variables óptimas:  La escala logarítmica log₁₀(ρ) y el coeficiente térmico cuántico α bastan para separar completamente los regímenes de transporte.</a:t>
             </a:r>
           </a:p>
@@ -6788,9 +7137,13 @@
                 <a:solidFill>
                   <a:srgbClr val="000000"/>
                 </a:solidFill>
-              </a:defRPr>
-            </a:pPr>
-            <a:r>
+                <a:latin typeface="Arial"/>
+              </a:defRPr>
+            </a:pPr>
+            <a:r>
+              <a:rPr>
+                <a:latin typeface="Arial"/>
+              </a:rPr>
               <a:t>✔  Validación rotunda:  100% de pureza en conductores y aislantes con Silhouette Score = 0.7858.</a:t>
             </a:r>
           </a:p>

--- a/problemas/5_Materials_Uriel/presentacion_materiales_uriel.pptx
+++ b/problemas/5_Materials_Uriel/presentacion_materiales_uriel.pptx
@@ -4470,8 +4470,8 @@
         </p:nvSpPr>
         <p:spPr>
           <a:xfrm>
-            <a:off x="731520" y="1417320"/>
-            <a:ext cx="10728655" cy="1234440"/>
+            <a:off x="731520" y="1325880"/>
+            <a:ext cx="10728655" cy="1143000"/>
           </a:xfrm>
           <a:prstGeom prst="roundRect">
             <a:avLst/>
@@ -4519,8 +4519,8 @@
         </p:nvSpPr>
         <p:spPr>
           <a:xfrm>
-            <a:off x="914400" y="1463040"/>
-            <a:ext cx="10332720" cy="320040"/>
+            <a:off x="914400" y="1371600"/>
+            <a:ext cx="10332720" cy="274320"/>
           </a:xfrm>
           <a:prstGeom prst="rect">
             <a:avLst/>
@@ -4534,7 +4534,7 @@
           <a:lstStyle/>
           <a:p>
             <a:pPr>
-              <a:defRPr sz="1200" b="1">
+              <a:defRPr sz="1150" b="1">
                 <a:solidFill>
                   <a:srgbClr val="000000"/>
                 </a:solidFill>
@@ -4566,8 +4566,8 @@
         </p:blipFill>
         <p:spPr>
           <a:xfrm>
-            <a:off x="1645920" y="1783080"/>
-            <a:ext cx="8869680" cy="1424232"/>
+            <a:off x="2194560" y="1664208"/>
+            <a:ext cx="7772400" cy="1248039"/>
           </a:xfrm>
           <a:prstGeom prst="rect">
             <a:avLst/>
@@ -4590,8 +4590,8 @@
         </p:blipFill>
         <p:spPr>
           <a:xfrm>
-            <a:off x="731520" y="2788920"/>
-            <a:ext cx="10728655" cy="4015864"/>
+            <a:off x="731520" y="2606040"/>
+            <a:ext cx="10728655" cy="3800847"/>
           </a:xfrm>
           <a:prstGeom prst="rect">
             <a:avLst/>

--- a/problemas/5_Materials_Uriel/presentacion_materiales_uriel.pptx
+++ b/problemas/5_Materials_Uriel/presentacion_materiales_uriel.pptx
@@ -509,7 +509,12 @@
           <a:lstStyle/>
           <a:p>
             <a:r>
-              <a:t>Buenos días tribunal y compañeros. Soy Uriel y presento la clasificación no supervisada de materiales eléctricos con DBSCAN.</a:t>
+              <a:t>GUIÓ SLIDE 1:</a:t>
+            </a:r>
+          </a:p>
+          <a:p>
+            <a:r>
+              <a:t>Bon dia tribunal i companys. Sóc l'Uriel i presento la classificació no supervisada de materials elèctrics mitjançant DBSCAN.</a:t>
             </a:r>
           </a:p>
         </p:txBody>
@@ -579,32 +584,32 @@
           <a:lstStyle/>
           <a:p>
             <a:r>
-              <a:t>GUION SLIDE 2:</a:t>
-            </a:r>
-          </a:p>
-          <a:p>
-            <a:r>
-              <a:t>Definimos el problema físico a partir de las ecuaciones de transporte en LaTeX:</a:t>
-            </a:r>
-          </a:p>
-          <a:p>
-            <a:r>
-              <a:t>- La variación térmica de la resistividad rho(T) y su derivada térmica alfa.</a:t>
-            </a:r>
-          </a:p>
-          <a:p>
-            <a:r>
-              <a:t>- Metales: bandas solapadas, electrones libres, alfa positivo por choques con fonones de la red.</a:t>
-            </a:r>
-          </a:p>
-          <a:p>
-            <a:r>
-              <a:t>- Semiconductores: bandgap moderado, alfa negativo por activación térmica exponencial según Boltzmann.</a:t>
-            </a:r>
-          </a:p>
-          <a:p>
-            <a:r>
-              <a:t>- Aislantes: bandgap colosal (&gt; 5 eV), sin portadores libres a 300 K, alfa nulo y resistividad gigantesca.</a:t>
+              <a:t>GUIÓ SLIDE 2:</a:t>
+            </a:r>
+          </a:p>
+          <a:p>
+            <a:r>
+              <a:t>Definim el problema físic a partir de les equacions de transport:</a:t>
+            </a:r>
+          </a:p>
+          <a:p>
+            <a:r>
+              <a:t>- La variació tèrmica de la resistivitat rho(T) i la seva derivada tèrmica alfa.</a:t>
+            </a:r>
+          </a:p>
+          <a:p>
+            <a:r>
+              <a:t>- Metalls: bandes solapades, electrons lliures, alfa positiu per xocs amb fonons de la xarxa.</a:t>
+            </a:r>
+          </a:p>
+          <a:p>
+            <a:r>
+              <a:t>- Semiconductors: bandgap moderat, alfa negatiu per activació tèrmica exponencial segons Boltzmann.</a:t>
+            </a:r>
+          </a:p>
+          <a:p>
+            <a:r>
+              <a:t>- Aïllants: bandgap colossal (&gt; 5 eV), sense portadors lliures a 300 K, alfa nul i resistivitat gegantina.</a:t>
             </a:r>
           </a:p>
         </p:txBody>
@@ -674,17 +679,17 @@
           <a:lstStyle/>
           <a:p>
             <a:r>
-              <a:t>GUION SLIDE 3:</a:t>
-            </a:r>
-          </a:p>
-          <a:p>
-            <a:r>
-              <a:t>Disponemos de 57 materiales reales en el dataset.</a:t>
-            </a:r>
-          </a:p>
-          <a:p>
-            <a:r>
-              <a:t>Como se aprecia en el gráfico comparativo: en escala lineal, el 99% de los materiales se aplasta en el cero. El logaritmo de resistividad es imprescindible para desplegar el espacio, y combinado con alfa crea un plano perfecto para el clustering.</a:t>
+              <a:t>GUIÓ SLIDE 3:</a:t>
+            </a:r>
+          </a:p>
+          <a:p>
+            <a:r>
+              <a:t>Disposem de 57 materials reals al dataset.</a:t>
+            </a:r>
+          </a:p>
+          <a:p>
+            <a:r>
+              <a:t>Com s'aprecia al gràfic comparatiu: en escala lineal, el 99% dels materials s'aixafa al zero. El logaritme de resistivitat és imprescindible per desplegar l'espai, i combinat amb alfa crea un pla ideal per al clustering.</a:t>
             </a:r>
           </a:p>
         </p:txBody>
@@ -754,17 +759,17 @@
           <a:lstStyle/>
           <a:p>
             <a:r>
-              <a:t>GUION SLIDE 4:</a:t>
-            </a:r>
-          </a:p>
-          <a:p>
-            <a:r>
-              <a:t>Pregunta clave: ¿por qué DBSCAN y no K-Means?</a:t>
-            </a:r>
-          </a:p>
-          <a:p>
-            <a:r>
-              <a:t>En el gráfico de la derecha se ve claro: K-Means impone fronteras esféricas forzadas. Al tener metales ultra concentrados y aislantes dispersos, K-Means falla. DBSCAN sigue los caminos de densidad natural y aísla puntos atípicos como ruido.</a:t>
+              <a:t>GUIÓ SLIDE 4:</a:t>
+            </a:r>
+          </a:p>
+          <a:p>
+            <a:r>
+              <a:t>Pregunta clau: per què DBSCAN i no K-Means?</a:t>
+            </a:r>
+          </a:p>
+          <a:p>
+            <a:r>
+              <a:t>Al gràfic de la dreta es veu clar: K-Means imposa fronteres esfèriques forçades. En tenir metalls ultra concentrats i aïllants dispersos, K-Means falla. DBSCAN segueix els camins de densitat natural i aïlla punts atípics com a soroll.</a:t>
             </a:r>
           </a:p>
         </p:txBody>
@@ -834,27 +839,27 @@
           <a:lstStyle/>
           <a:p>
             <a:r>
-              <a:t>GUION SLIDE 5:</a:t>
-            </a:r>
-          </a:p>
-          <a:p>
-            <a:r>
-              <a:t>En metodología: fórmulas en LaTeX claras y limpias.</a:t>
-            </a:r>
-          </a:p>
-          <a:p>
-            <a:r>
-              <a:t>1. Escalado Z-Score manual con NumPy para igualar varianzas.</a:t>
-            </a:r>
-          </a:p>
-          <a:p>
-            <a:r>
-              <a:t>2. Criterio de núcleo de DBSCAN: puntos con al menos min_samples vecinos en radio épsilon.</a:t>
-            </a:r>
-          </a:p>
-          <a:p>
-            <a:r>
-              <a:t>3. Hiperparámetros fijados rigurosamente: min_samples=3 (dimensión + 1) y épsilon=0.65 obtenido por el codo k-NN.</a:t>
+              <a:t>GUIÓ SLIDE 5:</a:t>
+            </a:r>
+          </a:p>
+          <a:p>
+            <a:r>
+              <a:t>En metodologia: fórmules en LaTeX clares i netes.</a:t>
+            </a:r>
+          </a:p>
+          <a:p>
+            <a:r>
+              <a:t>1. Escalat Z-Score manual amb NumPy per igualar variàncies.</a:t>
+            </a:r>
+          </a:p>
+          <a:p>
+            <a:r>
+              <a:t>2. Criteri de nucli de DBSCAN: punts amb almenys min_samples veïns en radi èpsilon.</a:t>
+            </a:r>
+          </a:p>
+          <a:p>
+            <a:r>
+              <a:t>3. Hiperparàmetres fixats rigorosament: min_samples=3 (dimensió + 1) i èpsilon=0.65 obtingut pel colze k-NN.</a:t>
             </a:r>
           </a:p>
         </p:txBody>
@@ -924,32 +929,32 @@
           <a:lstStyle/>
           <a:p>
             <a:r>
-              <a:t>GUION SLIDE 6:</a:t>
-            </a:r>
-          </a:p>
-          <a:p>
-            <a:r>
-              <a:t>Este es el resultado gráfico final en pantalla grande:</a:t>
-            </a:r>
-          </a:p>
-          <a:p>
-            <a:r>
-              <a:t>- Cluster 0 (ámbar): Metales conductores (Cu, Ag, Au, Al) concentrados arriba a la izquierda con alfa &gt; 0.</a:t>
-            </a:r>
-          </a:p>
-          <a:p>
-            <a:r>
-              <a:t>- Cluster 1 (azul): Aislantes dieléctricos (Vidrio, Cuarzo, Teflón) a la derecha con alfa centrado en cero.</a:t>
-            </a:r>
-          </a:p>
-          <a:p>
-            <a:r>
-              <a:t>- Cluster 2 (verde): Semiconductores (Silicio, Germanio, GaAs) abajo, claramente separados por alfa fuertemente negativo.</a:t>
-            </a:r>
-          </a:p>
-          <a:p>
-            <a:r>
-              <a:t>La línea horizontal de alfa = 0 marca la división física fundamental entre choques de fonones y generación térmica de portadores.</a:t>
+              <a:t>GUIÓ SLIDE 6:</a:t>
+            </a:r>
+          </a:p>
+          <a:p>
+            <a:r>
+              <a:t>Aquest és el resultat gràfic final en pantalla gran:</a:t>
+            </a:r>
+          </a:p>
+          <a:p>
+            <a:r>
+              <a:t>- Clúster 0 (ambre): Metalls conductors (Cu, Ag, Au, Al) concentrats a dalt a l'esquerra amb alfa &gt; 0.</a:t>
+            </a:r>
+          </a:p>
+          <a:p>
+            <a:r>
+              <a:t>- Clúster 1 (blau): Aïllants dielèctrics (Vidre, Quars, Tefló) a la dreta amb alfa centrat a zero.</a:t>
+            </a:r>
+          </a:p>
+          <a:p>
+            <a:r>
+              <a:t>- Clúster 2 (verd): Semiconductors (Silici, Germani, GaAs) a sota, clarament separats per alfa fortament negatiu.</a:t>
+            </a:r>
+          </a:p>
+          <a:p>
+            <a:r>
+              <a:t>La línia horitzontal d'alfa = 0 marca la divisió física fonamental entre xocs de fonons i generació tèrmica de portadors.</a:t>
             </a:r>
           </a:p>
         </p:txBody>
@@ -1019,32 +1024,32 @@
           <a:lstStyle/>
           <a:p>
             <a:r>
-              <a:t>GUION SLIDE 7:</a:t>
-            </a:r>
-          </a:p>
-          <a:p>
-            <a:r>
-              <a:t>En cuanto a validación, la prueba reina es la Matriz de Contingencia Física:</a:t>
-            </a:r>
-          </a:p>
-          <a:p>
-            <a:r>
-              <a:t>- 100% de pureza en conductores (35 de 35 metales en cluster 0).</a:t>
-            </a:r>
-          </a:p>
-          <a:p>
-            <a:r>
-              <a:t>- 100% de pureza en aislantes (10 de 10 dieléctricos en cluster 1).</a:t>
-            </a:r>
-          </a:p>
-          <a:p>
-            <a:r>
-              <a:t>- En semiconductores, los 10 materiales tecnológicos puros forman el cluster 2. Los dos restantes son semimetales cuyo transporte a 300 K es prácticamente metálico.</a:t>
-            </a:r>
-          </a:p>
-          <a:p>
-            <a:r>
-              <a:t>Y como métrica matemática complementaria, la fórmula en LaTeX de Silhouette Score arroja 0.7858.</a:t>
+              <a:t>GUIÓ SLIDE 7:</a:t>
+            </a:r>
+          </a:p>
+          <a:p>
+            <a:r>
+              <a:t>Pel que fa a validació, la prova reina és la Matriu de Contingència Física:</a:t>
+            </a:r>
+          </a:p>
+          <a:p>
+            <a:r>
+              <a:t>- 100% de puresa en conductors (35 de 35 metalls al clúster 0).</a:t>
+            </a:r>
+          </a:p>
+          <a:p>
+            <a:r>
+              <a:t>- 100% de puresa en aïllants (10 de 10 dielèctrics al clúster 1).</a:t>
+            </a:r>
+          </a:p>
+          <a:p>
+            <a:r>
+              <a:t>- En semiconductors, els 10 materials tecnològics purs formen el clúster 2. Els dos restants són semimetalls amb transport cuasimetàl·lic a 300 K.</a:t>
+            </a:r>
+          </a:p>
+          <a:p>
+            <a:r>
+              <a:t>I com a mètrica matemàtica complementària, la fórmula de Silhouette Score dona 0.7858.</a:t>
             </a:r>
           </a:p>
         </p:txBody>
@@ -1114,32 +1119,32 @@
           <a:lstStyle/>
           <a:p>
             <a:r>
-              <a:t>GUION SLIDE 8:</a:t>
-            </a:r>
-          </a:p>
-          <a:p>
-            <a:r>
-              <a:t>Para concluir:</a:t>
-            </a:r>
-          </a:p>
-          <a:p>
-            <a:r>
-              <a:t>1. DBSCAN demuestra que la densidad espacial macroscópica refleja con total fidelidad la física cuántica de bandas.</a:t>
-            </a:r>
-          </a:p>
-          <a:p>
-            <a:r>
-              <a:t>2. Ha demostrado ser la herramienta correcta frente a K-Means al tolerar densidades desiguales.</a:t>
-            </a:r>
-          </a:p>
-          <a:p>
-            <a:r>
-              <a:t>3. Con solo dos variables físicas y una estandarización rigurosa, se obtiene una pureza del 100% en conductores y aislantes.</a:t>
-            </a:r>
-          </a:p>
-          <a:p>
-            <a:r>
-              <a:t>Muchas gracias.</a:t>
+              <a:t>GUIÓ SLIDE 8:</a:t>
+            </a:r>
+          </a:p>
+          <a:p>
+            <a:r>
+              <a:t>Per concloure:</a:t>
+            </a:r>
+          </a:p>
+          <a:p>
+            <a:r>
+              <a:t>1. DBSCAN demostra que la densitat espacial macroscòpica reflecteix fidelment la física quàntica de bandes.</a:t>
+            </a:r>
+          </a:p>
+          <a:p>
+            <a:r>
+              <a:t>2. Ha demostrat ser l'eina adequada davant K-Means en tolerar densitats desiguals.</a:t>
+            </a:r>
+          </a:p>
+          <a:p>
+            <a:r>
+              <a:t>3. Amb només dues variables físiques i una estandardització rigorosa, s'obté un 100% de puresa en conductors i aïllants.</a:t>
+            </a:r>
+          </a:p>
+          <a:p>
+            <a:r>
+              <a:t>Moltes gràcies.</a:t>
             </a:r>
           </a:p>
         </p:txBody>
@@ -4228,7 +4233,7 @@
               <a:rPr>
                 <a:latin typeface="Arial"/>
               </a:rPr>
-              <a:t>CPIA · APRENDIZAJE NO SUPERVISADO</a:t>
+              <a:t>CPIA · APRENENTATGE NO SUPERVISAT</a:t>
             </a:r>
           </a:p>
         </p:txBody>
@@ -4267,7 +4272,7 @@
               <a:rPr>
                 <a:latin typeface="Arial"/>
               </a:rPr>
-              <a:t>Clasificación de Materiales Eléctricos mediante DBSCAN</a:t>
+              <a:t>Classificació de Materials Elèctrics mitjançant DBSCAN</a:t>
             </a:r>
           </a:p>
         </p:txBody>
@@ -4306,7 +4311,7 @@
               <a:rPr>
                 <a:latin typeface="Arial"/>
               </a:rPr>
-              <a:t>Descubrimiento No Supervisado de Fases Cuánticas (Conductores, Semiconductores y Aislantes)</a:t>
+              <a:t>Descobriment No Supervisat de Fases Quàntiques (Conductors, Semiconductors i Aïllants)</a:t>
             </a:r>
           </a:p>
         </p:txBody>
@@ -4345,7 +4350,7 @@
               <a:rPr>
                 <a:latin typeface="Arial"/>
               </a:rPr>
-              <a:t>Uriel · Grado en Ingeniería Física (UPC)</a:t>
+              <a:t>Uriel · Grau en Enginyeria Física (UPC)</a:t>
             </a:r>
           </a:p>
           <a:p>
@@ -4361,7 +4366,7 @@
               <a:rPr>
                 <a:latin typeface="Arial"/>
               </a:rPr>
-              <a:t>Equipo: Matías · Martí · Uriel · Arnau Montull</a:t>
+              <a:t>Equip: Matías · Martí · Uriel · Arnau Montull</a:t>
             </a:r>
           </a:p>
         </p:txBody>
@@ -4418,7 +4423,7 @@
               <a:rPr>
                 <a:latin typeface="Arial"/>
               </a:rPr>
-              <a:t>CPIA · APRENDIZAJE NO SUPERVISADO</a:t>
+              <a:t>CPIA · APRENENTATGE NO SUPERVISAT</a:t>
             </a:r>
           </a:p>
         </p:txBody>
@@ -4457,7 +4462,7 @@
               <a:rPr>
                 <a:latin typeface="Arial"/>
               </a:rPr>
-              <a:t>El Problema Físico: Estructura de Bandas y Firmas Térmicas</a:t>
+              <a:t>El Problema Físic: Estructura de Bandes i Signatures Tèrmiques</a:t>
             </a:r>
           </a:p>
         </p:txBody>
@@ -4545,7 +4550,7 @@
               <a:rPr>
                 <a:latin typeface="Arial"/>
               </a:rPr>
-              <a:t>Ecuaciones Macroscópicas de Transporte Eléctrico:</a:t>
+              <a:t>Equacions Macroscòpiques de Transport Elèctric:</a:t>
             </a:r>
           </a:p>
         </p:txBody>
@@ -4650,7 +4655,7 @@
               <a:rPr>
                 <a:latin typeface="Arial"/>
               </a:rPr>
-              <a:t>CPIA · APRENDIZAJE NO SUPERVISADO</a:t>
+              <a:t>CPIA · APRENENTATGE NO SUPERVISAT</a:t>
             </a:r>
           </a:p>
         </p:txBody>
@@ -4689,7 +4694,7 @@
               <a:rPr>
                 <a:latin typeface="Arial"/>
               </a:rPr>
-              <a:t>Dataset Experimental y Espacio de Trabajo (log₁₀ρ, α)</a:t>
+              <a:t>Dataset Experimental i Espai de Treball (log₁₀ρ, α)</a:t>
             </a:r>
           </a:p>
         </p:txBody>
@@ -4777,7 +4782,7 @@
               <a:rPr>
                 <a:latin typeface="Arial"/>
               </a:rPr>
-              <a:t>¿Cómo clasificar sin etiquetas?</a:t>
+              <a:t>Com classificar sense etiquetes?</a:t>
             </a:r>
           </a:p>
         </p:txBody>
@@ -4843,7 +4848,7 @@
               <a:rPr>
                 <a:latin typeface="Arial"/>
               </a:rPr>
-              <a:t>• 57 Materiales reales: Metales puros, aleaciones, semiconductores y dieléctricos.</a:t>
+              <a:t>• 57 Materials reals: Metalls purs, aliatges, semiconductors i dielèctrics.</a:t>
             </a:r>
           </a:p>
           <a:p>
@@ -4862,7 +4867,7 @@
               <a:rPr>
                 <a:latin typeface="Arial"/>
               </a:rPr>
-              <a:t>• 30 órdenes de magnitud: De conductores (~10⁻⁸ Ω·m) a teflón (&gt; 10²² Ω·m).</a:t>
+              <a:t>• 30 ordres de magnitud: De conductors (~10⁻⁸ Ω·m) a tefló (&gt; 10²² Ω·m).</a:t>
             </a:r>
           </a:p>
           <a:p>
@@ -4881,7 +4886,7 @@
               <a:rPr>
                 <a:latin typeface="Arial"/>
               </a:rPr>
-              <a:t>• Compresión logarítmica: Evita el colapso numérico en el origen.</a:t>
+              <a:t>• Compressió logarítmica: Evita el col·lapse numèric a l'origen.</a:t>
             </a:r>
           </a:p>
           <a:p>
@@ -4900,7 +4905,7 @@
               <a:rPr>
                 <a:latin typeface="Arial"/>
               </a:rPr>
-              <a:t>• Firma cuántica: α delata el origen microscópico del transporte.</a:t>
+              <a:t>• Signatura quàntica: α delata l'origen microscòpic del transport.</a:t>
             </a:r>
           </a:p>
           <a:p>
@@ -4919,7 +4924,7 @@
               <a:rPr>
                 <a:latin typeface="Arial"/>
               </a:rPr>
-              <a:t>• Objetivo no supervisado: Descubrir las clases automáticamente por densidad.</a:t>
+              <a:t>• Objectiu no supervisat: Descobrir les classes automàticament per densitat.</a:t>
             </a:r>
           </a:p>
         </p:txBody>
@@ -5000,7 +5005,7 @@
               <a:rPr>
                 <a:latin typeface="Arial"/>
               </a:rPr>
-              <a:t>CPIA · APRENDIZAJE NO SUPERVISADO</a:t>
+              <a:t>CPIA · APRENENTATGE NO SUPERVISAT</a:t>
             </a:r>
           </a:p>
         </p:txBody>
@@ -5039,7 +5044,7 @@
               <a:rPr>
                 <a:latin typeface="Arial"/>
               </a:rPr>
-              <a:t>¿Por qué DBSCAN y no K-Means?</a:t>
+              <a:t>Per què DBSCAN i no K-Means?</a:t>
             </a:r>
           </a:p>
         </p:txBody>
@@ -5127,7 +5132,7 @@
               <a:rPr>
                 <a:latin typeface="Arial"/>
               </a:rPr>
-              <a:t>K-Means (Inadecuado en este dominio)</a:t>
+              <a:t>K-Means (Inadequat en aquest domini)</a:t>
             </a:r>
           </a:p>
           <a:p>
@@ -5146,7 +5151,7 @@
               <a:rPr>
                 <a:latin typeface="Arial"/>
               </a:rPr>
-              <a:t>✖  Asume grupos esféricos e isodensos (igual varianza).</a:t>
+              <a:t>✖  Assumeix grups esfèrics i isodensos (igual variància).</a:t>
             </a:r>
           </a:p>
           <a:p>
@@ -5165,7 +5170,7 @@
               <a:rPr>
                 <a:latin typeface="Arial"/>
               </a:rPr>
-              <a:t>✖  Fractura el grupo disperso de aislantes.</a:t>
+              <a:t>✖  Fractura el grup dispers d'aïllants.</a:t>
             </a:r>
           </a:p>
           <a:p>
@@ -5184,7 +5189,7 @@
               <a:rPr>
                 <a:latin typeface="Arial"/>
               </a:rPr>
-              <a:t>✖  Exige prefijar 'k' a priori de forma arbitraria.</a:t>
+              <a:t>✖  Exigeix prefixar 'k' a priori de forma arbitrària.</a:t>
             </a:r>
           </a:p>
           <a:p>
@@ -5203,7 +5208,7 @@
               <a:rPr>
                 <a:latin typeface="Arial"/>
               </a:rPr>
-              <a:t>✖  No detecta ruido: fuerza anomalías a tener cluster.</a:t>
+              <a:t>✖  No detecta soroll: força anomalies a tenir clúster.</a:t>
             </a:r>
           </a:p>
           <a:p>
@@ -5220,7 +5225,7 @@
               <a:rPr>
                 <a:latin typeface="Arial"/>
               </a:rPr>
-              <a:t>DBSCAN (Elección Óptima)</a:t>
+              <a:t>DBSCAN (Elecció Òptima)</a:t>
             </a:r>
           </a:p>
           <a:p>
@@ -5239,7 +5244,7 @@
               <a:rPr>
                 <a:latin typeface="Arial"/>
               </a:rPr>
-              <a:t>✔  Conecta por densidad local de cualquier forma.</a:t>
+              <a:t>✔  Connecta per densitat local de qualsevol forma.</a:t>
             </a:r>
           </a:p>
           <a:p>
@@ -5258,7 +5263,7 @@
               <a:rPr>
                 <a:latin typeface="Arial"/>
               </a:rPr>
-              <a:t>✔  Tolera metales hiperdensos y aislantes laxos.</a:t>
+              <a:t>✔  Tolera metalls hiperdensos i aïllants laxos.</a:t>
             </a:r>
           </a:p>
           <a:p>
@@ -5277,7 +5282,7 @@
               <a:rPr>
                 <a:latin typeface="Arial"/>
               </a:rPr>
-              <a:t>✔  Descubre el número de clusters sin prefijar k.</a:t>
+              <a:t>✔  Descobreix el nombre de clústers sense prefixar k.</a:t>
             </a:r>
           </a:p>
           <a:p>
@@ -5296,7 +5301,7 @@
               <a:rPr>
                 <a:latin typeface="Arial"/>
               </a:rPr>
-              <a:t>✔  Etiqueta ruido y anomalías de forma nativa (-1).</a:t>
+              <a:t>✔  Etiqueta soroll i anomalies de forma nativa (-1).</a:t>
             </a:r>
           </a:p>
         </p:txBody>
@@ -5377,7 +5382,7 @@
               <a:rPr>
                 <a:latin typeface="Arial"/>
               </a:rPr>
-              <a:t>CPIA · APRENDIZAJE NO SUPERVISADO</a:t>
+              <a:t>CPIA · APRENENTATGE NO SUPERVISAT</a:t>
             </a:r>
           </a:p>
         </p:txBody>
@@ -5416,7 +5421,7 @@
               <a:rPr>
                 <a:latin typeface="Arial"/>
               </a:rPr>
-              <a:t>Metodología Matemática: Fórmulas y Parámetros</a:t>
+              <a:t>Metodologia Matemàtica: Fórmules i Paràmetres</a:t>
             </a:r>
           </a:p>
         </p:txBody>
@@ -5504,14 +5509,14 @@
               <a:rPr>
                 <a:latin typeface="Arial"/>
               </a:rPr>
-              <a:t>1. Estandarización Z-Score</a:t>
+              <a:t>1. Estandardització Z-Score</a:t>
             </a:r>
             <a:br/>
             <a:r>
               <a:rPr>
                 <a:latin typeface="Arial"/>
               </a:rPr>
-              <a:t>(Implementada con NumPy)</a:t>
+              <a:t>(Implementada amb NumPy)</a:t>
             </a:r>
           </a:p>
         </p:txBody>
@@ -5577,7 +5582,7 @@
               <a:rPr>
                 <a:latin typeface="Arial"/>
               </a:rPr>
-              <a:t>• μ = Media muestral por columna</a:t>
+              <a:t>• μ = Mitjana mostral per columna</a:t>
             </a:r>
           </a:p>
           <a:p>
@@ -5596,7 +5601,7 @@
               <a:rPr>
                 <a:latin typeface="Arial"/>
               </a:rPr>
-              <a:t>• σ = Desviación estándar típica</a:t>
+              <a:t>• σ = Desviació estàndard típica</a:t>
             </a:r>
           </a:p>
           <a:p>
@@ -5615,7 +5620,7 @@
               <a:rPr>
                 <a:latin typeface="Arial"/>
               </a:rPr>
-              <a:t>• Resultado: Media = 0, Varianza = 1</a:t>
+              <a:t>• Resultat: Mitjana = 0, Variància = 1</a:t>
             </a:r>
           </a:p>
           <a:p>
@@ -5634,7 +5639,7 @@
               <a:rPr>
                 <a:latin typeface="Arial"/>
               </a:rPr>
-              <a:t>• Imprescindible: equipara el rango de log₁₀ρ (~31) con el de α (~0.08) para la distancia euclídea.</a:t>
+              <a:t>• Imprescindible: equipara el rang de log₁₀ρ (~31) amb el d'α (~0.08) per a la distància euclidiana.</a:t>
             </a:r>
           </a:p>
         </p:txBody>
@@ -5722,7 +5727,7 @@
               <a:rPr>
                 <a:latin typeface="Arial"/>
               </a:rPr>
-              <a:t>2. Criterio de Núcleo</a:t>
+              <a:t>2. Criteri de Nucli</a:t>
             </a:r>
             <a:br/>
             <a:r>
@@ -5795,7 +5800,7 @@
               <a:rPr>
                 <a:latin typeface="Arial"/>
               </a:rPr>
-              <a:t>• d(p, q) = Distancia Euclídea en 2D</a:t>
+              <a:t>• d(p, q) = Distància Euclidiana en 2D</a:t>
             </a:r>
           </a:p>
           <a:p>
@@ -5814,7 +5819,7 @@
               <a:rPr>
                 <a:latin typeface="Arial"/>
               </a:rPr>
-              <a:t>• Punto Núcleo (Core Point):</a:t>
+              <a:t>• Punt Nucli (Core Point):</a:t>
             </a:r>
           </a:p>
           <a:p>
@@ -5852,7 +5857,7 @@
               <a:rPr>
                 <a:latin typeface="Arial"/>
               </a:rPr>
-              <a:t>• Punto Frontera (Border):</a:t>
+              <a:t>• Punt Frontera (Border):</a:t>
             </a:r>
           </a:p>
           <a:p>
@@ -5871,7 +5876,7 @@
               <a:rPr>
                 <a:latin typeface="Arial"/>
               </a:rPr>
-              <a:t>•    Alcanzable desde un núcleo</a:t>
+              <a:t>•    Assolible des d'un nucli</a:t>
             </a:r>
           </a:p>
           <a:p>
@@ -5890,7 +5895,7 @@
               <a:rPr>
                 <a:latin typeface="Arial"/>
               </a:rPr>
-              <a:t>• Ruido (Noise):</a:t>
+              <a:t>• Soroll (Noise):</a:t>
             </a:r>
           </a:p>
           <a:p>
@@ -5909,7 +5914,7 @@
               <a:rPr>
                 <a:latin typeface="Arial"/>
               </a:rPr>
-              <a:t>•    No alcanzable (|N_ε| &lt; min_samples)</a:t>
+              <a:t>•    No assolible (|N_ε| &lt; min_samples)</a:t>
             </a:r>
           </a:p>
         </p:txBody>
@@ -5997,14 +6002,14 @@
               <a:rPr>
                 <a:latin typeface="Arial"/>
               </a:rPr>
-              <a:t>3. Parámetros Fijados</a:t>
+              <a:t>3. Paràmetres Fixats</a:t>
             </a:r>
             <a:br/>
             <a:r>
               <a:rPr>
                 <a:latin typeface="Arial"/>
               </a:rPr>
-              <a:t>(Criterio Objetivo)</a:t>
+              <a:t>(Criteri Objectiu)</a:t>
             </a:r>
           </a:p>
         </p:txBody>
@@ -6089,7 +6094,7 @@
               <a:rPr>
                 <a:latin typeface="Arial"/>
               </a:rPr>
-              <a:t>•    Regla canónica k ≥ d + 1 (dimensión d = 2).</a:t>
+              <a:t>•    Regla canònica k ≥ d + 1 (dimensió d = 2).</a:t>
             </a:r>
           </a:p>
           <a:p>
@@ -6127,7 +6132,7 @@
               <a:rPr>
                 <a:latin typeface="Arial"/>
               </a:rPr>
-              <a:t>•    Determinado mediante gráfico k-NN (codo).</a:t>
+              <a:t>•    Determinat mitjançant gràfic k-NN (colze).</a:t>
             </a:r>
           </a:p>
           <a:p>
@@ -6146,7 +6151,7 @@
               <a:rPr>
                 <a:latin typeface="Arial"/>
               </a:rPr>
-              <a:t>•    Ventana óptima que aísla aislantes sin fusionar metales.</a:t>
+              <a:t>•    Finestra òptima que aïlla aïllants sense fusionar metalls.</a:t>
             </a:r>
           </a:p>
           <a:p>
@@ -6165,7 +6170,7 @@
               <a:rPr>
                 <a:latin typeface="Arial"/>
               </a:rPr>
-              <a:t>• Ejecución: scikit-learn DBSCAN</a:t>
+              <a:t>• Execució: scikit-learn DBSCAN</a:t>
             </a:r>
           </a:p>
         </p:txBody>
@@ -6222,7 +6227,7 @@
               <a:rPr>
                 <a:latin typeface="Arial"/>
               </a:rPr>
-              <a:t>Resultado DBSCAN: Clasificación 2D de Materiales Eléctricos</a:t>
+              <a:t>Resultat DBSCAN: Classificació 2D de Materials Elèctrics</a:t>
             </a:r>
           </a:p>
           <a:p>
@@ -6238,7 +6243,7 @@
               <a:rPr>
                 <a:latin typeface="Arial"/>
               </a:rPr>
-              <a:t>ε = 0.65 · min_samples = 3  |  3 Clusters descubiertos  |  0 Ruido</a:t>
+              <a:t>ε = 0.65 · min_samples = 3  |  3 Clústers descoberts  |  0 Soroll</a:t>
             </a:r>
           </a:p>
         </p:txBody>
@@ -6319,7 +6324,7 @@
               <a:rPr>
                 <a:latin typeface="Arial"/>
               </a:rPr>
-              <a:t>CPIA · APRENDIZAJE NO SUPERVISADO</a:t>
+              <a:t>CPIA · APRENENTATGE NO SUPERVISAT</a:t>
             </a:r>
           </a:p>
         </p:txBody>
@@ -6358,7 +6363,7 @@
               <a:rPr>
                 <a:latin typeface="Arial"/>
               </a:rPr>
-              <a:t>Validación Experimental: Matriz de Contingencia Física</a:t>
+              <a:t>Validació Experimental: Matriu de Contingència Física</a:t>
             </a:r>
           </a:p>
         </p:txBody>
@@ -6446,7 +6451,7 @@
               <a:rPr>
                 <a:latin typeface="Arial"/>
               </a:rPr>
-              <a:t>Conductores (Metales)</a:t>
+              <a:t>Conductors (Metalls)</a:t>
             </a:r>
           </a:p>
           <a:p>
@@ -6478,7 +6483,7 @@
               <a:rPr>
                 <a:latin typeface="Arial"/>
               </a:rPr>
-              <a:t>100 % Pureza</a:t>
+              <a:t>100 % Puresa</a:t>
             </a:r>
           </a:p>
           <a:p>
@@ -6495,7 +6500,7 @@
               <a:rPr>
                 <a:latin typeface="Arial"/>
               </a:rPr>
-              <a:t>Asignados íntegramente al Cluster 0. Cero falsos negativos.</a:t>
+              <a:t>Assignats íntegrament al Clúster 0. Zero falsos negatius.</a:t>
             </a:r>
           </a:p>
         </p:txBody>
@@ -6583,7 +6588,7 @@
               <a:rPr>
                 <a:latin typeface="Arial"/>
               </a:rPr>
-              <a:t>Aislantes (Dieléctricos)</a:t>
+              <a:t>Aïllants (Dielèctrics)</a:t>
             </a:r>
           </a:p>
           <a:p>
@@ -6615,7 +6620,7 @@
               <a:rPr>
                 <a:latin typeface="Arial"/>
               </a:rPr>
-              <a:t>100 % Pureza</a:t>
+              <a:t>100 % Puresa</a:t>
             </a:r>
           </a:p>
           <a:p>
@@ -6632,7 +6637,7 @@
               <a:rPr>
                 <a:latin typeface="Arial"/>
               </a:rPr>
-              <a:t>Asignados íntegramente al Cluster 1. Coincidencia total con física.</a:t>
+              <a:t>Assignats íntegrament al Clúster 1. Coincidència total amb la física.</a:t>
             </a:r>
           </a:p>
         </p:txBody>
@@ -6720,7 +6725,7 @@
               <a:rPr>
                 <a:latin typeface="Arial"/>
               </a:rPr>
-              <a:t>Semiconductores</a:t>
+              <a:t>Semiconductors</a:t>
             </a:r>
           </a:p>
           <a:p>
@@ -6752,7 +6757,7 @@
               <a:rPr>
                 <a:latin typeface="Arial"/>
               </a:rPr>
-              <a:t>83.3 % Pureza</a:t>
+              <a:t>83.3 % Puresa</a:t>
             </a:r>
           </a:p>
           <a:p>
@@ -6769,7 +6774,7 @@
               <a:rPr>
                 <a:latin typeface="Arial"/>
               </a:rPr>
-              <a:t>10 al Cluster 2. 2 semimetales clasificados en cluster 0 por conducción cuasi-metálica.</a:t>
+              <a:t>10 al Clúster 2. 2 semimetalls classificats al clúster 0 per conducció cuasimetàl·lica.</a:t>
             </a:r>
           </a:p>
         </p:txBody>
@@ -6857,7 +6862,7 @@
               <a:rPr>
                 <a:latin typeface="Arial"/>
               </a:rPr>
-              <a:t>Métrica Matemática Complementaria (No Supervisada):</a:t>
+              <a:t>Mètrica Matemàtica Complementària (No Supervisada):</a:t>
             </a:r>
           </a:p>
         </p:txBody>
@@ -6938,7 +6943,7 @@
               <a:rPr>
                 <a:latin typeface="Arial"/>
               </a:rPr>
-              <a:t>CPIA · APRENDIZAJE NO SUPERVISADO</a:t>
+              <a:t>CPIA · APRENENTATGE NO SUPERVISAT</a:t>
             </a:r>
           </a:p>
         </p:txBody>
@@ -6977,7 +6982,7 @@
               <a:rPr>
                 <a:latin typeface="Arial"/>
               </a:rPr>
-              <a:t>Conclusiones</a:t>
+              <a:t>Conclusions</a:t>
             </a:r>
           </a:p>
         </p:txBody>
@@ -7068,7 +7073,7 @@
               <a:rPr>
                 <a:latin typeface="Arial"/>
               </a:rPr>
-              <a:t>Puntos Clave del Proyecto</a:t>
+              <a:t>Punts Clau del Projecte</a:t>
             </a:r>
           </a:p>
           <a:p>
@@ -7087,7 +7092,7 @@
               <a:rPr>
                 <a:latin typeface="Arial"/>
               </a:rPr>
-              <a:t>✔  Física de bandas sin supervisión:  DBSCAN descubre de manera autónoma las 3 fases de conducción (conductores, aislantes y semiconductores) a partir de propiedades macroscópicas.</a:t>
+              <a:t>✔  Física de bandes sense supervisió:  DBSCAN descobreix de manera autònoma les 3 fases de conducció (conductors, aïllants i semiconductors) a partir de propietats macroscòpiques.</a:t>
             </a:r>
           </a:p>
           <a:p>
@@ -7106,7 +7111,7 @@
               <a:rPr>
                 <a:latin typeface="Arial"/>
               </a:rPr>
-              <a:t>✔  Inmune a densidades dispares:  Supera a K-Means agrupando simultáneamente la ultra-densidad de los metales y la dispersión de 12 órdenes de magnitud de los aislantes.</a:t>
+              <a:t>✔  Immune a densitats dispars:  Supera K-Means agrupant simultàniament la ultradensitat dels metalls i la dispersió de 12 ordres de magnitud dels aïllants.</a:t>
             </a:r>
           </a:p>
           <a:p>
@@ -7125,7 +7130,7 @@
               <a:rPr>
                 <a:latin typeface="Arial"/>
               </a:rPr>
-              <a:t>✔  Variables óptimas:  La escala logarítmica log₁₀(ρ) y el coeficiente térmico cuántico α bastan para separar completamente los regímenes de transporte.</a:t>
+              <a:t>✔  Variables òptimes:  L'escala logarítmica log₁₀(ρ) i el coeficient tèrmic quàntic α són suficients per separar completament els règims de transport.</a:t>
             </a:r>
           </a:p>
           <a:p>
@@ -7144,7 +7149,7 @@
               <a:rPr>
                 <a:latin typeface="Arial"/>
               </a:rPr>
-              <a:t>✔  Validación rotunda:  100% de pureza en conductores y aislantes con Silhouette Score = 0.7858.</a:t>
+              <a:t>✔  Validació rotunda:  100% de puresa en conductors i aïllants amb Silhouette Score = 0.7858.</a:t>
             </a:r>
           </a:p>
         </p:txBody>

--- a/problemas/5_Materials_Uriel/presentacion_materiales_uriel.pptx
+++ b/problemas/5_Materials_Uriel/presentacion_materiales_uriel.pptx
@@ -689,7 +689,7 @@
           </a:p>
           <a:p>
             <a:r>
-              <a:t>Com s'aprecia al gràfic comparatiu: en escala lineal, el 99% dels materials s'aixafa al zero. El logaritme de resistivitat és imprescindible per desplegar l'espai, i combinat amb alfa crea un pla ideal per al clustering.</a:t>
+              <a:t>A la dreta veiem l'espai bidimensional físic ABANS d'aplicar cap algorisme: els materials en brut sense etiquetes. El logaritme de resistivitat desplega els 30 ordres de magnitud i alfa separa els règims microscòpics.</a:t>
             </a:r>
           </a:p>
         </p:txBody>
@@ -934,27 +934,37 @@
           </a:p>
           <a:p>
             <a:r>
-              <a:t>Aquest és el resultat gràfic final en pantalla gran:</a:t>
-            </a:r>
-          </a:p>
-          <a:p>
-            <a:r>
-              <a:t>- Clúster 0 (ambre): Metalls conductors (Cu, Ag, Au, Al) concentrats a dalt a l'esquerra amb alfa &gt; 0.</a:t>
-            </a:r>
-          </a:p>
-          <a:p>
-            <a:r>
-              <a:t>- Clúster 1 (blau): Aïllants dielèctrics (Vidre, Quars, Tefló) a la dreta amb alfa centrat a zero.</a:t>
-            </a:r>
-          </a:p>
-          <a:p>
-            <a:r>
-              <a:t>- Clúster 2 (verd): Semiconductors (Silici, Germani, GaAs) a sota, clarament separats per alfa fortament negatiu.</a:t>
-            </a:r>
-          </a:p>
-          <a:p>
-            <a:r>
-              <a:t>La línia horitzontal d'alfa = 0 marca la divisió física fonamental entre xocs de fonons i generació tèrmica de portadors.</a:t>
+              <a:t>Aquest és el panell comparatiu d'abans i després en pantalla gran:</a:t>
+            </a:r>
+          </a:p>
+          <a:p>
+            <a:r>
+              <a:t>- A l'esquerra: les 57 dades experimentals en brut tal com entren a l'algorisme, sense etiquetes de classe.</a:t>
+            </a:r>
+          </a:p>
+          <a:p>
+            <a:r>
+              <a:t>- A la dreta: el descobriment autònom de les 3 classes físiques pures per connectivitat de densitat amb DBSCAN:</a:t>
+            </a:r>
+          </a:p>
+          <a:p>
+            <a:r>
+              <a:t>  • Clúster 0 (ambre): 35 metalls conductors amb alfa &gt; 0.</a:t>
+            </a:r>
+          </a:p>
+          <a:p>
+            <a:r>
+              <a:t>  • Clúster 1 (blau): 10 aïllants dielèctrics amb alfa proper a zero i resistivitat gegant.</a:t>
+            </a:r>
+          </a:p>
+          <a:p>
+            <a:r>
+              <a:t>  • Clúster 2 (verd): 10 semiconductors per sota de la frontera física alfa = 0.</a:t>
+            </a:r>
+          </a:p>
+          <a:p>
+            <a:r>
+              <a:t>- La línia d'alfa = 0 separa clarament la conducció per fonons de l'activació tèrmica.</a:t>
             </a:r>
           </a:p>
         </p:txBody>
@@ -4924,14 +4934,14 @@
               <a:rPr>
                 <a:latin typeface="Arial"/>
               </a:rPr>
-              <a:t>• Objectiu no supervisat: Descobrir les classes automàticament per densitat.</a:t>
+              <a:t>• Dades sense etiquetar: L'algorisme ha de descobrir l'estructura sol.</a:t>
             </a:r>
           </a:p>
         </p:txBody>
       </p:sp>
       <p:pic>
         <p:nvPicPr>
-          <p:cNvPr id="8" name="Picture 7" descr="distribucion_escala_rho.png"/>
+          <p:cNvPr id="8" name="Picture 7" descr="materiales_antes_clustering.png"/>
           <p:cNvPicPr>
             <a:picLocks noChangeAspect="1"/>
           </p:cNvPicPr>
@@ -4945,8 +4955,8 @@
         </p:blipFill>
         <p:spPr>
           <a:xfrm>
-            <a:off x="5120640" y="1737360"/>
-            <a:ext cx="6309360" cy="2358044"/>
+            <a:off x="5120640" y="1463040"/>
+            <a:ext cx="6309360" cy="4101084"/>
           </a:xfrm>
           <a:prstGeom prst="rect">
             <a:avLst/>
@@ -6227,7 +6237,7 @@
               <a:rPr>
                 <a:latin typeface="Arial"/>
               </a:rPr>
-              <a:t>Resultat DBSCAN: Classificació 2D de Materials Elèctrics</a:t>
+              <a:t>Resultat DBSCAN: Abans i Després de l'Agrupament</a:t>
             </a:r>
           </a:p>
           <a:p>
@@ -6243,14 +6253,14 @@
               <a:rPr>
                 <a:latin typeface="Arial"/>
               </a:rPr>
-              <a:t>ε = 0.65 · min_samples = 3  |  3 Clústers descoberts  |  0 Soroll</a:t>
+              <a:t>Dades Experimentals en Brut vs. 3 Clústers Purs Descoberts (ε = 0.65, min_samples = 3)</a:t>
             </a:r>
           </a:p>
         </p:txBody>
       </p:sp>
       <p:pic>
         <p:nvPicPr>
-          <p:cNvPr id="3" name="Picture 2" descr="clusters_materiales_dbscan.png"/>
+          <p:cNvPr id="3" name="Picture 2" descr="comparativa_abans_despres_dbscan.png"/>
           <p:cNvPicPr>
             <a:picLocks noChangeAspect="1"/>
           </p:cNvPicPr>
@@ -6264,8 +6274,8 @@
         </p:blipFill>
         <p:spPr>
           <a:xfrm>
-            <a:off x="1005840" y="1051560"/>
-            <a:ext cx="10149840" cy="6597396"/>
+            <a:off x="731520" y="1188720"/>
+            <a:ext cx="10728655" cy="4157354"/>
           </a:xfrm>
           <a:prstGeom prst="rect">
             <a:avLst/>

--- a/problemas/5_Materials_Uriel/presentacion_materiales_uriel.pptx
+++ b/problemas/5_Materials_Uriel/presentacion_materiales_uriel.pptx
@@ -764,7 +764,7 @@
           </a:p>
           <a:p>
             <a:r>
-              <a:t>Pregunta clau: per què DBSCAN i no K-Means?</a:t>
+              <a:t>DBSCAN vs. K-Means:</a:t>
             </a:r>
           </a:p>
           <a:p>
@@ -1054,12 +1054,7 @@
           </a:p>
           <a:p>
             <a:r>
-              <a:t>- En semiconductors, els 10 materials tecnològics purs formen el clúster 2. Els dos restants són semimetalls amb transport cuasimetàl·lic a 300 K.</a:t>
-            </a:r>
-          </a:p>
-          <a:p>
-            <a:r>
-              <a:t>I com a mètrica matemàtica complementària, la fórmula de Silhouette Score dona 0.7858.</a:t>
+              <a:t>- En semiconductors, 10 de 12 materials purs formen el clúster 2. Els dos restants són semimetalls amb transport cuasimetàl·lic a 300 K.</a:t>
             </a:r>
           </a:p>
         </p:txBody>
@@ -4321,7 +4316,7 @@
               <a:rPr>
                 <a:latin typeface="Arial"/>
               </a:rPr>
-              <a:t>Descobriment No Supervisat de Fases Quàntiques (Conductors, Semiconductors i Aïllants)</a:t>
+              <a:t>Classificació de materials Conductors, Semiconductors i Aïllants</a:t>
             </a:r>
           </a:p>
         </p:txBody>
@@ -4915,7 +4910,7 @@
               <a:rPr>
                 <a:latin typeface="Arial"/>
               </a:rPr>
-              <a:t>• Signatura quàntica: α delata l'origen microscòpic del transport.</a:t>
+              <a:t>• Signatura quàntica: α indica l'origen microscòpic del transport.</a:t>
             </a:r>
           </a:p>
           <a:p>
@@ -5054,7 +5049,7 @@
               <a:rPr>
                 <a:latin typeface="Arial"/>
               </a:rPr>
-              <a:t>Per què DBSCAN i no K-Means?</a:t>
+              <a:t>DBSCAN vs. K-Means?</a:t>
             </a:r>
           </a:p>
         </p:txBody>
@@ -6387,7 +6382,7 @@
         <p:spPr>
           <a:xfrm>
             <a:off x="731520" y="1463040"/>
-            <a:ext cx="3337560" cy="3108960"/>
+            <a:ext cx="3337560" cy="4754880"/>
           </a:xfrm>
           <a:prstGeom prst="roundRect">
             <a:avLst/>
@@ -6435,8 +6430,8 @@
         </p:nvSpPr>
         <p:spPr>
           <a:xfrm>
-            <a:off x="914400" y="1645920"/>
-            <a:ext cx="2971800" cy="2743200"/>
+            <a:off x="914400" y="1783080"/>
+            <a:ext cx="2971800" cy="4114800"/>
           </a:xfrm>
           <a:prstGeom prst="rect">
             <a:avLst/>
@@ -6450,7 +6445,7 @@
           <a:lstStyle/>
           <a:p>
             <a:pPr>
-              <a:defRPr sz="1600" b="1">
+              <a:defRPr sz="1800" b="1">
                 <a:solidFill>
                   <a:srgbClr val="000000"/>
                 </a:solidFill>
@@ -6466,7 +6461,7 @@
           </a:p>
           <a:p>
             <a:pPr algn="ctr">
-              <a:defRPr sz="3200" b="1">
+              <a:defRPr sz="3600" b="1">
                 <a:solidFill>
                   <a:srgbClr val="000000"/>
                 </a:solidFill>
@@ -6482,7 +6477,7 @@
           </a:p>
           <a:p>
             <a:pPr algn="ctr">
-              <a:defRPr sz="1600" b="1">
+              <a:defRPr sz="1800" b="1">
                 <a:solidFill>
                   <a:srgbClr val="000000"/>
                 </a:solidFill>
@@ -6499,7 +6494,7 @@
           <a:p>
             <a:br/>
             <a:pPr>
-              <a:defRPr sz="1100">
+              <a:defRPr sz="1300">
                 <a:solidFill>
                   <a:srgbClr val="000000"/>
                 </a:solidFill>
@@ -6524,7 +6519,7 @@
         <p:spPr>
           <a:xfrm>
             <a:off x="4434840" y="1463040"/>
-            <a:ext cx="3337560" cy="3108960"/>
+            <a:ext cx="3337560" cy="4754880"/>
           </a:xfrm>
           <a:prstGeom prst="roundRect">
             <a:avLst/>
@@ -6572,8 +6567,8 @@
         </p:nvSpPr>
         <p:spPr>
           <a:xfrm>
-            <a:off x="4617720" y="1645920"/>
-            <a:ext cx="2971800" cy="2743200"/>
+            <a:off x="4617720" y="1783080"/>
+            <a:ext cx="2971800" cy="4114800"/>
           </a:xfrm>
           <a:prstGeom prst="rect">
             <a:avLst/>
@@ -6587,7 +6582,7 @@
           <a:lstStyle/>
           <a:p>
             <a:pPr>
-              <a:defRPr sz="1600" b="1">
+              <a:defRPr sz="1800" b="1">
                 <a:solidFill>
                   <a:srgbClr val="000000"/>
                 </a:solidFill>
@@ -6603,7 +6598,7 @@
           </a:p>
           <a:p>
             <a:pPr algn="ctr">
-              <a:defRPr sz="3200" b="1">
+              <a:defRPr sz="3600" b="1">
                 <a:solidFill>
                   <a:srgbClr val="000000"/>
                 </a:solidFill>
@@ -6619,7 +6614,7 @@
           </a:p>
           <a:p>
             <a:pPr algn="ctr">
-              <a:defRPr sz="1600" b="1">
+              <a:defRPr sz="1800" b="1">
                 <a:solidFill>
                   <a:srgbClr val="000000"/>
                 </a:solidFill>
@@ -6636,7 +6631,7 @@
           <a:p>
             <a:br/>
             <a:pPr>
-              <a:defRPr sz="1100">
+              <a:defRPr sz="1300">
                 <a:solidFill>
                   <a:srgbClr val="000000"/>
                 </a:solidFill>
@@ -6661,7 +6656,7 @@
         <p:spPr>
           <a:xfrm>
             <a:off x="8138160" y="1463040"/>
-            <a:ext cx="3337560" cy="3108960"/>
+            <a:ext cx="3337560" cy="4754880"/>
           </a:xfrm>
           <a:prstGeom prst="roundRect">
             <a:avLst/>
@@ -6709,8 +6704,8 @@
         </p:nvSpPr>
         <p:spPr>
           <a:xfrm>
-            <a:off x="8321040" y="1645920"/>
-            <a:ext cx="2971800" cy="2743200"/>
+            <a:off x="8321040" y="1783080"/>
+            <a:ext cx="2971800" cy="4114800"/>
           </a:xfrm>
           <a:prstGeom prst="rect">
             <a:avLst/>
@@ -6724,7 +6719,7 @@
           <a:lstStyle/>
           <a:p>
             <a:pPr>
-              <a:defRPr sz="1600" b="1">
+              <a:defRPr sz="1800" b="1">
                 <a:solidFill>
                   <a:srgbClr val="000000"/>
                 </a:solidFill>
@@ -6740,7 +6735,7 @@
           </a:p>
           <a:p>
             <a:pPr algn="ctr">
-              <a:defRPr sz="3200" b="1">
+              <a:defRPr sz="3600" b="1">
                 <a:solidFill>
                   <a:srgbClr val="000000"/>
                 </a:solidFill>
@@ -6756,7 +6751,7 @@
           </a:p>
           <a:p>
             <a:pPr algn="ctr">
-              <a:defRPr sz="1600" b="1">
+              <a:defRPr sz="1800" b="1">
                 <a:solidFill>
                   <a:srgbClr val="000000"/>
                 </a:solidFill>
@@ -6773,7 +6768,7 @@
           <a:p>
             <a:br/>
             <a:pPr>
-              <a:defRPr sz="1050">
+              <a:defRPr sz="1200">
                 <a:solidFill>
                   <a:srgbClr val="000000"/>
                 </a:solidFill>
@@ -6789,118 +6784,6 @@
           </a:p>
         </p:txBody>
       </p:sp>
-      <p:sp>
-        <p:nvSpPr>
-          <p:cNvPr id="10" name="Rounded Rectangle 9"/>
-          <p:cNvSpPr/>
-          <p:nvPr/>
-        </p:nvSpPr>
-        <p:spPr>
-          <a:xfrm>
-            <a:off x="731520" y="4800600"/>
-            <a:ext cx="10728655" cy="1417320"/>
-          </a:xfrm>
-          <a:prstGeom prst="roundRect">
-            <a:avLst/>
-          </a:prstGeom>
-          <a:solidFill>
-            <a:srgbClr val="FFFFFF"/>
-          </a:solidFill>
-          <a:ln w="19050">
-            <a:solidFill>
-              <a:srgbClr val="000000"/>
-            </a:solidFill>
-          </a:ln>
-        </p:spPr>
-        <p:style>
-          <a:lnRef idx="1">
-            <a:schemeClr val="accent1"/>
-          </a:lnRef>
-          <a:fillRef idx="3">
-            <a:schemeClr val="accent1"/>
-          </a:fillRef>
-          <a:effectRef idx="2">
-            <a:schemeClr val="accent1"/>
-          </a:effectRef>
-          <a:fontRef idx="minor">
-            <a:schemeClr val="lt1"/>
-          </a:fontRef>
-        </p:style>
-        <p:txBody>
-          <a:bodyPr rtlCol="0" anchor="ctr"/>
-          <a:lstStyle/>
-          <a:p>
-            <a:pPr algn="ctr">
-              <a:defRPr>
-                <a:latin typeface="Arial"/>
-              </a:defRPr>
-            </a:pPr>
-          </a:p>
-        </p:txBody>
-      </p:sp>
-      <p:sp>
-        <p:nvSpPr>
-          <p:cNvPr id="11" name="TextBox 10"/>
-          <p:cNvSpPr txBox="1"/>
-          <p:nvPr/>
-        </p:nvSpPr>
-        <p:spPr>
-          <a:xfrm>
-            <a:off x="1005840" y="4892040"/>
-            <a:ext cx="10149840" cy="320040"/>
-          </a:xfrm>
-          <a:prstGeom prst="rect">
-            <a:avLst/>
-          </a:prstGeom>
-          <a:noFill/>
-        </p:spPr>
-        <p:txBody>
-          <a:bodyPr wrap="none">
-            <a:spAutoFit/>
-          </a:bodyPr>
-          <a:lstStyle/>
-          <a:p>
-            <a:pPr>
-              <a:defRPr sz="1150" b="1">
-                <a:solidFill>
-                  <a:srgbClr val="000000"/>
-                </a:solidFill>
-                <a:latin typeface="Arial"/>
-              </a:defRPr>
-            </a:pPr>
-            <a:r>
-              <a:rPr>
-                <a:latin typeface="Arial"/>
-              </a:rPr>
-              <a:t>Mètrica Matemàtica Complementària (No Supervisada):</a:t>
-            </a:r>
-          </a:p>
-        </p:txBody>
-      </p:sp>
-      <p:pic>
-        <p:nvPicPr>
-          <p:cNvPr id="12" name="Picture 11" descr="formula_silhouette.png"/>
-          <p:cNvPicPr>
-            <a:picLocks noChangeAspect="1"/>
-          </p:cNvPicPr>
-          <p:nvPr/>
-        </p:nvPicPr>
-        <p:blipFill>
-          <a:blip r:embed="rId2"/>
-          <a:stretch>
-            <a:fillRect/>
-          </a:stretch>
-        </p:blipFill>
-        <p:spPr>
-          <a:xfrm>
-            <a:off x="2011680" y="5257800"/>
-            <a:ext cx="8046720" cy="1356845"/>
-          </a:xfrm>
-          <a:prstGeom prst="rect">
-            <a:avLst/>
-          </a:prstGeom>
-        </p:spPr>
-      </p:pic>
     </p:spTree>
   </p:cSld>
   <p:clrMapOvr>

--- a/problemas/5_Materials_Uriel/presentacion_materiales_uriel.pptx
+++ b/problemas/5_Materials_Uriel/presentacion_materiales_uriel.pptx
@@ -6937,8 +6937,8 @@
         </p:nvSpPr>
         <p:spPr>
           <a:xfrm>
-            <a:off x="1463040" y="1828800"/>
-            <a:ext cx="9235440" cy="4023360"/>
+            <a:off x="1463040" y="1920240"/>
+            <a:ext cx="9235440" cy="3931920"/>
           </a:xfrm>
           <a:prstGeom prst="rect">
             <a:avLst/>
@@ -6953,9 +6953,9 @@
           <a:p>
             <a:pPr>
               <a:spcAft>
-                <a:spcPts val="1400"/>
+                <a:spcPts val="1600"/>
               </a:spcAft>
-              <a:defRPr sz="2000" b="1">
+              <a:defRPr sz="1500">
                 <a:solidFill>
                   <a:srgbClr val="000000"/>
                 </a:solidFill>
@@ -6966,15 +6966,15 @@
               <a:rPr>
                 <a:latin typeface="Arial"/>
               </a:rPr>
-              <a:t>Punts Clau del Projecte</a:t>
+              <a:t>✔  Física de bandes sense supervisió:  DBSCAN descobreix de manera autònoma les 3 fases de conducció (conductors, aïllants i semiconductors) a partir de propietats macroscòpiques.</a:t>
             </a:r>
           </a:p>
           <a:p>
             <a:pPr>
               <a:spcAft>
-                <a:spcPts val="1200"/>
+                <a:spcPts val="1600"/>
               </a:spcAft>
-              <a:defRPr sz="1400">
+              <a:defRPr sz="1500">
                 <a:solidFill>
                   <a:srgbClr val="000000"/>
                 </a:solidFill>
@@ -6985,15 +6985,15 @@
               <a:rPr>
                 <a:latin typeface="Arial"/>
               </a:rPr>
-              <a:t>✔  Física de bandes sense supervisió:  DBSCAN descobreix de manera autònoma les 3 fases de conducció (conductors, aïllants i semiconductors) a partir de propietats macroscòpiques.</a:t>
+              <a:t>✔  Immune a densitats dispars:  Supera K-Means agrupant simultàniament la ultradensitat dels metalls i la dispersió de 12 ordres de magnitud dels aïllants.</a:t>
             </a:r>
           </a:p>
           <a:p>
             <a:pPr>
               <a:spcAft>
-                <a:spcPts val="1200"/>
+                <a:spcPts val="1600"/>
               </a:spcAft>
-              <a:defRPr sz="1400">
+              <a:defRPr sz="1500">
                 <a:solidFill>
                   <a:srgbClr val="000000"/>
                 </a:solidFill>
@@ -7004,15 +7004,15 @@
               <a:rPr>
                 <a:latin typeface="Arial"/>
               </a:rPr>
-              <a:t>✔  Immune a densitats dispars:  Supera K-Means agrupant simultàniament la ultradensitat dels metalls i la dispersió de 12 ordres de magnitud dels aïllants.</a:t>
+              <a:t>✔  Variables òptimes:  L'escala logarítmica log₁₀(ρ) i el coeficient tèrmic quàntic α són suficients per separar completament els règims de transport.</a:t>
             </a:r>
           </a:p>
           <a:p>
             <a:pPr>
               <a:spcAft>
-                <a:spcPts val="1200"/>
+                <a:spcPts val="1600"/>
               </a:spcAft>
-              <a:defRPr sz="1400">
+              <a:defRPr sz="1500">
                 <a:solidFill>
                   <a:srgbClr val="000000"/>
                 </a:solidFill>
@@ -7023,26 +7023,7 @@
               <a:rPr>
                 <a:latin typeface="Arial"/>
               </a:rPr>
-              <a:t>✔  Variables òptimes:  L'escala logarítmica log₁₀(ρ) i el coeficient tèrmic quàntic α són suficients per separar completament els règims de transport.</a:t>
-            </a:r>
-          </a:p>
-          <a:p>
-            <a:pPr>
-              <a:spcAft>
-                <a:spcPts val="1200"/>
-              </a:spcAft>
-              <a:defRPr sz="1400">
-                <a:solidFill>
-                  <a:srgbClr val="000000"/>
-                </a:solidFill>
-                <a:latin typeface="Arial"/>
-              </a:defRPr>
-            </a:pPr>
-            <a:r>
-              <a:rPr>
-                <a:latin typeface="Arial"/>
-              </a:rPr>
-              <a:t>✔  Validació rotunda:  100% de puresa en conductors i aïllants amb Silhouette Score = 0.7858.</a:t>
+              <a:t>✔  Validació rotunda:  100% de puresa en conductors i aïllants</a:t>
             </a:r>
           </a:p>
         </p:txBody>
